--- a/docs/Sentinel-Finale-Pitch.pptx
+++ b/docs/Sentinel-Finale-Pitch.pptx
@@ -23,9 +23,10 @@
     <p:sldId id="271" r:id="rId17"/>
     <p:sldId id="272" r:id="rId18"/>
     <p:sldId id="273" r:id="rId19"/>
+    <p:sldId id="274" r:id="rId20"/>
   </p:sldIdLst>
   <p:notesMasterIdLst>
-    <p:notesMasterId r:id="rId20"/>
+    <p:notesMasterId r:id="rId21"/>
   </p:notesMasterIdLst>
   <p:sldSz cx="12192000" cy="6858000"/>
   <p:notesSz cx="6858000" cy="12192000"/>
@@ -1316,7 +1317,7 @@
           <a:p>
             <a:r>
               <a:rPr lang="en-US" dirty="0"/>
-              <a:t>Six reasons this fits. Nothing is ripped out. Nothing locks the State to one vendor — open standards and documented APIs throughout. It keeps working when the network does not. It speaks the languages officers use. It is ready for the national and state databases. And it is secure by design: encrypted links, department-scoped access and a tamper-evident log.</a:t>
+              <a:t>This is the answer to “why you”. Three things, each with its proof. One: it is already proven on Gujarat’s own cameras — we connected the government grid from its live catalogue and measured plate reading on its footage, not on demo videos. Two: the evidence holds up — every time is the camera’s own, every stop has its frame, nothing is ever guessed, and the record cannot be quietly changed. Three: it fits what Gujarat already owns — any vendor, nothing replaced, analysis in each district so it keeps working when links drop. Then point at the strip: Gujarati, the State’s databases, open standards, and no face recognition.</a:t>
             </a:r>
             <a:endParaRPr lang="en-US" dirty="0"/>
           </a:p>
@@ -1404,7 +1405,7 @@
           <a:p>
             <a:r>
               <a:rPr lang="en-US" dirty="0"/>
-              <a:t>Say “we measured that”. The plate accuracy is measured on hand-checked plates from the government grid — and it is below our own target, which we say plainly; it started at under ten percent and the measurement is what drove it up. The rest is the discipline behind it: a laptop handling live analysis, more than six hundred automated tests, and a disaster-recovery drill that restores a million records in seconds and proves nothing was altered.</a:t>
+              <a:t>There are really two other ways to do this. Leave every department on its own system — nothing changes, and nothing connects. Or pull every camera into one central system — it connects everything, but it re-routes all the video, needs a backbone the State does not have, and stops when a link drops. Sentinel gets the reach of the second without disturbing anything in the first. We compare approaches here, not named products.</a:t>
             </a:r>
             <a:endParaRPr lang="en-US" dirty="0"/>
           </a:p>
@@ -1492,7 +1493,7 @@
           <a:p>
             <a:r>
               <a:rPr lang="en-US" dirty="0"/>
-              <a:t>Each phase is useful on its own and none needs a big-bang cutover: one district pilot in three months, four districts and the main VMS vendors by nine, every district by twenty-one months, and consented private cameras in the last phase.</a:t>
+              <a:t>Say “we measured that”. The plate accuracy is measured on hand-checked plates from the government grid — and it is below our own target, which we say plainly; it started at under ten percent and the measurement is what drove it up. The rest is the discipline behind it: a laptop handling live analysis, more than six hundred automated tests, and a disaster-recovery drill that restores a million records in seconds and proves nothing was altered.</a:t>
             </a:r>
             <a:endParaRPr lang="en-US" dirty="0"/>
           </a:p>
@@ -1580,7 +1581,7 @@
           <a:p>
             <a:r>
               <a:rPr lang="en-US" dirty="0"/>
-              <a:t>Close on the ask, then the line. Hand over the Movement Report from the demonstration if it has not been handed over already. Questions: see docs/13-SHOWCASE-PREP.md §10.</a:t>
+              <a:t>Each phase is useful on its own and none needs a big-bang cutover: one district pilot in three months, four districts and the main VMS vendors by nine, every district by twenty-one months, and consented private cameras in the last phase.</a:t>
             </a:r>
             <a:endParaRPr lang="en-US" dirty="0"/>
           </a:p>
@@ -1604,6 +1605,94 @@
             <a:fld id="{F7021451-1387-4CA6-816F-3879F97B5CBC}" type="slidenum">
               <a:rPr lang="en-US"/>
               <a:t>18</a:t>
+            </a:fld>
+            <a:endParaRPr lang="en-US"/>
+          </a:p>
+        </p:txBody>
+      </p:sp>
+    </p:spTree>
+    <p:extLst>
+      <p:ext uri="{BB962C8B-B14F-4D97-AF65-F5344CB8AC3E}">
+        <p14:creationId xmlns:p14="http://schemas.microsoft.com/office/powerpoint/2010/main" val="1024086991"/>
+      </p:ext>
+    </p:extLst>
+  </p:cSld>
+  <p:clrMapOvr>
+    <a:masterClrMapping/>
+  </p:clrMapOvr>
+</p:notes>
+</file>
+
+<file path=ppt/notesSlides/notesSlide19.xml><?xml version="1.0" encoding="utf-8"?>
+<p:notes xmlns:a="http://schemas.openxmlformats.org/drawingml/2006/main" xmlns:r="http://schemas.openxmlformats.org/officeDocument/2006/relationships" xmlns:p="http://schemas.openxmlformats.org/presentationml/2006/main">
+  <p:cSld>
+    <p:spTree>
+      <p:nvGrpSpPr>
+        <p:cNvPr id="1" name=""/>
+        <p:cNvGrpSpPr/>
+        <p:nvPr/>
+      </p:nvGrpSpPr>
+      <p:grpSpPr>
+        <a:xfrm>
+          <a:off x="0" y="0"/>
+          <a:ext cx="0" cy="0"/>
+          <a:chOff x="0" y="0"/>
+          <a:chExt cx="0" cy="0"/>
+        </a:xfrm>
+      </p:grpSpPr>
+      <p:sp>
+        <p:nvSpPr>
+          <p:cNvPr id="2" name="Slide Image Placeholder 1"/>
+          <p:cNvSpPr>
+            <a:spLocks noGrp="1" noRot="1" noChangeAspect="1"/>
+          </p:cNvSpPr>
+          <p:nvPr>
+            <p:ph type="sldImg"/>
+          </p:nvPr>
+        </p:nvSpPr>
+        <p:spPr/>
+      </p:sp>
+      <p:sp>
+        <p:nvSpPr>
+          <p:cNvPr id="3" name="Notes Placeholder 2"/>
+          <p:cNvSpPr>
+            <a:spLocks noGrp="1"/>
+          </p:cNvSpPr>
+          <p:nvPr>
+            <p:ph type="body" idx="1"/>
+          </p:nvPr>
+        </p:nvSpPr>
+        <p:spPr/>
+        <p:txBody>
+          <a:bodyPr/>
+          <a:lstStyle/>
+          <a:p>
+            <a:r>
+              <a:rPr lang="en-US" dirty="0"/>
+              <a:t>Close on the ask, then the line. Hand over the Movement Report from the demonstration if it has not been handed over already. Questions: see docs/13-SHOWCASE-PREP.md §10.</a:t>
+            </a:r>
+            <a:endParaRPr lang="en-US" dirty="0"/>
+          </a:p>
+        </p:txBody>
+      </p:sp>
+      <p:sp>
+        <p:nvSpPr>
+          <p:cNvPr id="4" name="Slide Number Placeholder 3"/>
+          <p:cNvSpPr>
+            <a:spLocks noGrp="1"/>
+          </p:cNvSpPr>
+          <p:nvPr>
+            <p:ph type="sldNum" sz="quarter" idx="10"/>
+          </p:nvPr>
+        </p:nvSpPr>
+        <p:spPr/>
+        <p:txBody>
+          <a:bodyPr/>
+          <a:lstStyle/>
+          <a:p>
+            <a:fld id="{F7021451-1387-4CA6-816F-3879F97B5CBC}" type="slidenum">
+              <a:rPr lang="en-US"/>
+              <a:t>19</a:t>
             </a:fld>
             <a:endParaRPr lang="en-US"/>
           </a:p>
@@ -8650,7 +8739,7 @@
                 <a:ea typeface="Arial" pitchFamily="34" charset="-122"/>
                 <a:cs typeface="Arial" pitchFamily="34" charset="-120"/>
               </a:rPr>
-              <a:t>Designed for how Gujarat actually works</a:t>
+              <a:t>What sets Sentinel apart</a:t>
             </a:r>
             <a:endParaRPr lang="en-US" sz="3200" dirty="0"/>
           </a:p>
@@ -8703,12 +8792,78 @@
         </p:nvSpPr>
         <p:spPr>
           <a:xfrm>
-            <a:off x="548640" y="1737360"/>
-            <a:ext cx="3246120" cy="1261872"/>
+            <a:off x="548640" y="1554480"/>
+            <a:ext cx="11094415" cy="868680"/>
           </a:xfrm>
           <a:prstGeom prst="roundRect">
             <a:avLst>
-              <a:gd name="adj" fmla="val 8696"/>
+              <a:gd name="adj" fmla="val 12632"/>
+            </a:avLst>
+          </a:prstGeom>
+          <a:solidFill>
+            <a:srgbClr val="EAF0FD"/>
+          </a:solidFill>
+          <a:ln w="9525">
+            <a:solidFill>
+              <a:srgbClr val="C9D7F7"/>
+            </a:solidFill>
+            <a:prstDash val="solid"/>
+          </a:ln>
+        </p:spPr>
+      </p:sp>
+      <p:sp>
+        <p:nvSpPr>
+          <p:cNvPr id="7" name="Text 4"/>
+          <p:cNvSpPr/>
+          <p:nvPr/>
+        </p:nvSpPr>
+        <p:spPr>
+          <a:xfrm>
+            <a:off x="868680" y="1645920"/>
+            <a:ext cx="10454335" cy="685800"/>
+          </a:xfrm>
+          <a:prstGeom prst="rect">
+            <a:avLst/>
+          </a:prstGeom>
+          <a:noFill/>
+          <a:ln/>
+        </p:spPr>
+        <p:txBody>
+          <a:bodyPr wrap="square" lIns="0" tIns="0" rIns="0" bIns="0" rtlCol="0" anchor="ctr"/>
+          <a:lstStyle/>
+          <a:p>
+            <a:pPr indent="0" marL="0">
+              <a:buNone/>
+            </a:pPr>
+            <a:r>
+              <a:rPr lang="en-US" sz="1800" b="1" dirty="0">
+                <a:solidFill>
+                  <a:srgbClr val="2456D6"/>
+                </a:solidFill>
+                <a:latin typeface="Arial" pitchFamily="34" charset="0"/>
+                <a:ea typeface="Arial" pitchFamily="34" charset="-122"/>
+                <a:cs typeface="Arial" pitchFamily="34" charset="-120"/>
+              </a:rPr>
+              <a:t>Sentinel traces a vehicle across every department’s cameras — on the systems Gujarat already owns, with evidence that holds up.</a:t>
+            </a:r>
+            <a:endParaRPr lang="en-US" sz="1800" dirty="0"/>
+          </a:p>
+        </p:txBody>
+      </p:sp>
+      <p:sp>
+        <p:nvSpPr>
+          <p:cNvPr id="8" name="Shape 5"/>
+          <p:cNvSpPr/>
+          <p:nvPr/>
+        </p:nvSpPr>
+        <p:spPr>
+          <a:xfrm>
+            <a:off x="548640" y="2697480"/>
+            <a:ext cx="3515258" cy="3063240"/>
+          </a:xfrm>
+          <a:prstGeom prst="roundRect">
+            <a:avLst>
+              <a:gd name="adj" fmla="val 3582"/>
             </a:avLst>
           </a:prstGeom>
           <a:solidFill>
@@ -8731,24 +8886,24 @@
       </p:sp>
       <p:sp>
         <p:nvSpPr>
-          <p:cNvPr id="7" name="Shape 4"/>
-          <p:cNvSpPr/>
-          <p:nvPr/>
-        </p:nvSpPr>
-        <p:spPr>
-          <a:xfrm>
-            <a:off x="777240" y="1984248"/>
-            <a:ext cx="493776" cy="493776"/>
+          <p:cNvPr id="9" name="Shape 6"/>
+          <p:cNvSpPr/>
+          <p:nvPr/>
+        </p:nvSpPr>
+        <p:spPr>
+          <a:xfrm>
+            <a:off x="822960" y="2971800"/>
+            <a:ext cx="603504" cy="603504"/>
           </a:xfrm>
           <a:prstGeom prst="ellipse">
             <a:avLst/>
           </a:prstGeom>
           <a:solidFill>
-            <a:srgbClr val="2456D6"/>
+            <a:srgbClr val="D97706"/>
           </a:solidFill>
           <a:ln w="12700">
             <a:solidFill>
-              <a:srgbClr val="2456D6"/>
+              <a:srgbClr val="D97706"/>
             </a:solidFill>
             <a:prstDash val="solid"/>
           </a:ln>
@@ -8756,7 +8911,7 @@
       </p:sp>
       <p:pic>
         <p:nvPicPr>
-          <p:cNvPr id="8" name="Image 0" descr="preencoded.png">    </p:cNvPr>
+          <p:cNvPr id="10" name="Image 0" descr="preencoded.png">    </p:cNvPr>
           <p:cNvPicPr>
             <a:picLocks noChangeAspect="1"/>
           </p:cNvPicPr>
@@ -8770,8 +8925,8 @@
         </p:blipFill>
         <p:spPr>
           <a:xfrm>
-            <a:off x="890808" y="2097816"/>
-            <a:ext cx="266639" cy="266639"/>
+            <a:off x="961766" y="3110606"/>
+            <a:ext cx="325892" cy="325892"/>
           </a:xfrm>
           <a:prstGeom prst="rect">
             <a:avLst/>
@@ -8780,30 +8935,30 @@
       </p:pic>
       <p:sp>
         <p:nvSpPr>
-          <p:cNvPr id="9" name="Text 5"/>
-          <p:cNvSpPr/>
-          <p:nvPr/>
-        </p:nvSpPr>
-        <p:spPr>
-          <a:xfrm>
-            <a:off x="1417320" y="1956816"/>
-            <a:ext cx="2194560" cy="329184"/>
-          </a:xfrm>
-          <a:prstGeom prst="rect">
-            <a:avLst/>
-          </a:prstGeom>
-          <a:noFill/>
-          <a:ln/>
-        </p:spPr>
-        <p:txBody>
-          <a:bodyPr wrap="square" lIns="0" tIns="0" rIns="0" bIns="0" rtlCol="0" anchor="t"/>
-          <a:lstStyle/>
-          <a:p>
-            <a:pPr indent="0" marL="0">
-              <a:buNone/>
-            </a:pPr>
-            <a:r>
-              <a:rPr lang="en-US" sz="1400" b="1" dirty="0">
+          <p:cNvPr id="11" name="Text 7"/>
+          <p:cNvSpPr/>
+          <p:nvPr/>
+        </p:nvSpPr>
+        <p:spPr>
+          <a:xfrm>
+            <a:off x="1554480" y="2990088"/>
+            <a:ext cx="2280818" cy="603504"/>
+          </a:xfrm>
+          <a:prstGeom prst="rect">
+            <a:avLst/>
+          </a:prstGeom>
+          <a:noFill/>
+          <a:ln/>
+        </p:spPr>
+        <p:txBody>
+          <a:bodyPr wrap="square" lIns="0" tIns="0" rIns="0" bIns="0" rtlCol="0" anchor="ctr"/>
+          <a:lstStyle/>
+          <a:p>
+            <a:pPr indent="0" marL="0">
+              <a:buNone/>
+            </a:pPr>
+            <a:r>
+              <a:rPr lang="en-US" sz="1700" b="1" dirty="0">
                 <a:solidFill>
                   <a:srgbClr val="0F1B33"/>
                 </a:solidFill>
@@ -8811,22 +8966,22 @@
                 <a:ea typeface="Arial" pitchFamily="34" charset="-122"/>
                 <a:cs typeface="Arial" pitchFamily="34" charset="-120"/>
               </a:rPr>
-              <a:t>No rip and replace</a:t>
-            </a:r>
-            <a:endParaRPr lang="en-US" sz="1400" dirty="0"/>
-          </a:p>
-        </p:txBody>
-      </p:sp>
-      <p:sp>
-        <p:nvSpPr>
-          <p:cNvPr id="10" name="Text 6"/>
-          <p:cNvSpPr/>
-          <p:nvPr/>
-        </p:nvSpPr>
-        <p:spPr>
-          <a:xfrm>
-            <a:off x="1417320" y="2286000"/>
-            <a:ext cx="2194560" cy="640080"/>
+              <a:t>Proven on Gujarat’s own cameras</a:t>
+            </a:r>
+            <a:endParaRPr lang="en-US" sz="1700" dirty="0"/>
+          </a:p>
+        </p:txBody>
+      </p:sp>
+      <p:sp>
+        <p:nvSpPr>
+          <p:cNvPr id="12" name="Text 8"/>
+          <p:cNvSpPr/>
+          <p:nvPr/>
+        </p:nvSpPr>
+        <p:spPr>
+          <a:xfrm>
+            <a:off x="822960" y="3749040"/>
+            <a:ext cx="2966618" cy="731520"/>
           </a:xfrm>
           <a:prstGeom prst="rect">
             <a:avLst/>
@@ -8842,15 +8997,165 @@
               <a:buNone/>
             </a:pPr>
             <a:r>
-              <a:rPr lang="en-US" sz="1200" dirty="0">
-                <a:solidFill>
-                  <a:srgbClr val="536079"/>
+              <a:rPr lang="en-US" sz="1400" dirty="0">
+                <a:solidFill>
+                  <a:srgbClr val="0F1B33"/>
                 </a:solidFill>
                 <a:latin typeface="Calibri" pitchFamily="34" charset="0"/>
                 <a:ea typeface="Calibri" pitchFamily="34" charset="-122"/>
                 <a:cs typeface="Calibri" pitchFamily="34" charset="-120"/>
               </a:rPr>
-              <a:t>Uses the cameras, recorders and VMS already installed.</a:t>
+              <a:t>Not a lab demonstration: built and tested on the government’s own camera grid.</a:t>
+            </a:r>
+            <a:endParaRPr lang="en-US" sz="1400" dirty="0"/>
+          </a:p>
+        </p:txBody>
+      </p:sp>
+      <p:sp>
+        <p:nvSpPr>
+          <p:cNvPr id="13" name="Shape 9"/>
+          <p:cNvSpPr/>
+          <p:nvPr/>
+        </p:nvSpPr>
+        <p:spPr>
+          <a:xfrm>
+            <a:off x="822960" y="4544568"/>
+            <a:ext cx="2966618" cy="0"/>
+          </a:xfrm>
+          <a:prstGeom prst="line">
+            <a:avLst/>
+          </a:prstGeom>
+          <a:noFill/>
+          <a:ln w="9525">
+            <a:solidFill>
+              <a:srgbClr val="DDE3EE"/>
+            </a:solidFill>
+            <a:prstDash val="solid"/>
+          </a:ln>
+        </p:spPr>
+      </p:sp>
+      <p:sp>
+        <p:nvSpPr>
+          <p:cNvPr id="14" name="Shape 10"/>
+          <p:cNvSpPr/>
+          <p:nvPr/>
+        </p:nvSpPr>
+        <p:spPr>
+          <a:xfrm>
+            <a:off x="822960" y="4681728"/>
+            <a:ext cx="274320" cy="274320"/>
+          </a:xfrm>
+          <a:prstGeom prst="ellipse">
+            <a:avLst/>
+          </a:prstGeom>
+          <a:solidFill>
+            <a:srgbClr val="0F766E"/>
+          </a:solidFill>
+          <a:ln w="12700">
+            <a:solidFill>
+              <a:srgbClr val="0F766E"/>
+            </a:solidFill>
+            <a:prstDash val="solid"/>
+          </a:ln>
+        </p:spPr>
+      </p:sp>
+      <p:pic>
+        <p:nvPicPr>
+          <p:cNvPr id="15" name="Image 1" descr="preencoded.png">    </p:cNvPr>
+          <p:cNvPicPr>
+            <a:picLocks noChangeAspect="1"/>
+          </p:cNvPicPr>
+          <p:nvPr/>
+        </p:nvPicPr>
+        <p:blipFill>
+          <a:blip r:embed="rId2"/>
+          <a:stretch>
+            <a:fillRect/>
+          </a:stretch>
+        </p:blipFill>
+        <p:spPr>
+          <a:xfrm>
+            <a:off x="886054" y="4744822"/>
+            <a:ext cx="148133" cy="148133"/>
+          </a:xfrm>
+          <a:prstGeom prst="rect">
+            <a:avLst/>
+          </a:prstGeom>
+        </p:spPr>
+      </p:pic>
+      <p:sp>
+        <p:nvSpPr>
+          <p:cNvPr id="16" name="Text 11"/>
+          <p:cNvSpPr/>
+          <p:nvPr/>
+        </p:nvSpPr>
+        <p:spPr>
+          <a:xfrm>
+            <a:off x="1188720" y="4681728"/>
+            <a:ext cx="1371600" cy="274320"/>
+          </a:xfrm>
+          <a:prstGeom prst="rect">
+            <a:avLst/>
+          </a:prstGeom>
+          <a:noFill/>
+          <a:ln/>
+        </p:spPr>
+        <p:txBody>
+          <a:bodyPr wrap="square" lIns="0" tIns="0" rIns="0" bIns="0" rtlCol="0" anchor="ctr"/>
+          <a:lstStyle/>
+          <a:p>
+            <a:pPr indent="0" marL="0">
+              <a:buNone/>
+            </a:pPr>
+            <a:r>
+              <a:rPr lang="en-US" sz="1100" b="1" dirty="0">
+                <a:solidFill>
+                  <a:srgbClr val="0F766E"/>
+                </a:solidFill>
+                <a:latin typeface="Arial" pitchFamily="34" charset="0"/>
+                <a:ea typeface="Arial" pitchFamily="34" charset="-122"/>
+                <a:cs typeface="Arial" pitchFamily="34" charset="-120"/>
+              </a:rPr>
+              <a:t>Proof</a:t>
+            </a:r>
+            <a:endParaRPr lang="en-US" sz="1100" dirty="0"/>
+          </a:p>
+        </p:txBody>
+      </p:sp>
+      <p:sp>
+        <p:nvSpPr>
+          <p:cNvPr id="17" name="Text 12"/>
+          <p:cNvSpPr/>
+          <p:nvPr/>
+        </p:nvSpPr>
+        <p:spPr>
+          <a:xfrm>
+            <a:off x="822960" y="5001768"/>
+            <a:ext cx="2966618" cy="713232"/>
+          </a:xfrm>
+          <a:prstGeom prst="rect">
+            <a:avLst/>
+          </a:prstGeom>
+          <a:noFill/>
+          <a:ln/>
+        </p:spPr>
+        <p:txBody>
+          <a:bodyPr wrap="square" lIns="0" tIns="0" rIns="0" bIns="0" rtlCol="0" anchor="t"/>
+          <a:lstStyle/>
+          <a:p>
+            <a:pPr indent="0" marL="0">
+              <a:buNone/>
+            </a:pPr>
+            <a:r>
+              <a:rPr lang="en-US" sz="1200" dirty="0">
+                <a:solidFill>
+                  <a:srgbClr val="536079"/>
+                </a:solidFill>
+                <a:latin typeface="Calibri" pitchFamily="34" charset="0"/>
+                <a:ea typeface="Calibri" pitchFamily="34" charset="-122"/>
+                <a:cs typeface="Calibri" pitchFamily="34" charset="-120"/>
+              </a:rPr>
+              <a:t>All 30 grid cameras onboarded from the live catalogue; plate reading measured on 81 hand-checked plates from that footage.</a:t>
             </a:r>
             <a:endParaRPr lang="en-US" sz="1200" dirty="0"/>
           </a:p>
@@ -8858,18 +9163,18 @@
       </p:sp>
       <p:sp>
         <p:nvSpPr>
-          <p:cNvPr id="11" name="Shape 7"/>
-          <p:cNvSpPr/>
-          <p:nvPr/>
-        </p:nvSpPr>
-        <p:spPr>
-          <a:xfrm>
-            <a:off x="4069080" y="1737360"/>
-            <a:ext cx="3246120" cy="1261872"/>
+          <p:cNvPr id="18" name="Shape 13"/>
+          <p:cNvSpPr/>
+          <p:nvPr/>
+        </p:nvSpPr>
+        <p:spPr>
+          <a:xfrm>
+            <a:off x="4338218" y="2697480"/>
+            <a:ext cx="3515258" cy="3063240"/>
           </a:xfrm>
           <a:prstGeom prst="roundRect">
             <a:avLst>
-              <a:gd name="adj" fmla="val 8696"/>
+              <a:gd name="adj" fmla="val 3582"/>
             </a:avLst>
           </a:prstGeom>
           <a:solidFill>
@@ -8892,14 +9197,14 @@
       </p:sp>
       <p:sp>
         <p:nvSpPr>
-          <p:cNvPr id="12" name="Shape 8"/>
-          <p:cNvSpPr/>
-          <p:nvPr/>
-        </p:nvSpPr>
-        <p:spPr>
-          <a:xfrm>
-            <a:off x="4297680" y="1984248"/>
-            <a:ext cx="493776" cy="493776"/>
+          <p:cNvPr id="19" name="Shape 14"/>
+          <p:cNvSpPr/>
+          <p:nvPr/>
+        </p:nvSpPr>
+        <p:spPr>
+          <a:xfrm>
+            <a:off x="4612538" y="2971800"/>
+            <a:ext cx="603504" cy="603504"/>
           </a:xfrm>
           <a:prstGeom prst="ellipse">
             <a:avLst/>
@@ -8917,22 +9222,22 @@
       </p:sp>
       <p:pic>
         <p:nvPicPr>
-          <p:cNvPr id="13" name="Image 1" descr="preencoded.png">    </p:cNvPr>
+          <p:cNvPr id="20" name="Image 2" descr="preencoded.png">    </p:cNvPr>
           <p:cNvPicPr>
             <a:picLocks noChangeAspect="1"/>
           </p:cNvPicPr>
           <p:nvPr/>
         </p:nvPicPr>
         <p:blipFill>
-          <a:blip r:embed="rId2"/>
+          <a:blip r:embed="rId3"/>
           <a:stretch>
             <a:fillRect/>
           </a:stretch>
         </p:blipFill>
         <p:spPr>
           <a:xfrm>
-            <a:off x="4411248" y="2097816"/>
-            <a:ext cx="266639" cy="266639"/>
+            <a:off x="4751344" y="3110606"/>
+            <a:ext cx="325892" cy="325892"/>
           </a:xfrm>
           <a:prstGeom prst="rect">
             <a:avLst/>
@@ -8941,30 +9246,30 @@
       </p:pic>
       <p:sp>
         <p:nvSpPr>
-          <p:cNvPr id="14" name="Text 9"/>
-          <p:cNvSpPr/>
-          <p:nvPr/>
-        </p:nvSpPr>
-        <p:spPr>
-          <a:xfrm>
-            <a:off x="4937760" y="1956816"/>
-            <a:ext cx="2194560" cy="329184"/>
-          </a:xfrm>
-          <a:prstGeom prst="rect">
-            <a:avLst/>
-          </a:prstGeom>
-          <a:noFill/>
-          <a:ln/>
-        </p:spPr>
-        <p:txBody>
-          <a:bodyPr wrap="square" lIns="0" tIns="0" rIns="0" bIns="0" rtlCol="0" anchor="t"/>
-          <a:lstStyle/>
-          <a:p>
-            <a:pPr indent="0" marL="0">
-              <a:buNone/>
-            </a:pPr>
-            <a:r>
-              <a:rPr lang="en-US" sz="1400" b="1" dirty="0">
+          <p:cNvPr id="21" name="Text 15"/>
+          <p:cNvSpPr/>
+          <p:nvPr/>
+        </p:nvSpPr>
+        <p:spPr>
+          <a:xfrm>
+            <a:off x="5344058" y="2990088"/>
+            <a:ext cx="2280818" cy="603504"/>
+          </a:xfrm>
+          <a:prstGeom prst="rect">
+            <a:avLst/>
+          </a:prstGeom>
+          <a:noFill/>
+          <a:ln/>
+        </p:spPr>
+        <p:txBody>
+          <a:bodyPr wrap="square" lIns="0" tIns="0" rIns="0" bIns="0" rtlCol="0" anchor="ctr"/>
+          <a:lstStyle/>
+          <a:p>
+            <a:pPr indent="0" marL="0">
+              <a:buNone/>
+            </a:pPr>
+            <a:r>
+              <a:rPr lang="en-US" sz="1700" b="1" dirty="0">
                 <a:solidFill>
                   <a:srgbClr val="0F1B33"/>
                 </a:solidFill>
@@ -8972,22 +9277,22 @@
                 <a:ea typeface="Arial" pitchFamily="34" charset="-122"/>
                 <a:cs typeface="Arial" pitchFamily="34" charset="-120"/>
               </a:rPr>
-              <a:t>No vendor lock-in</a:t>
-            </a:r>
-            <a:endParaRPr lang="en-US" sz="1400" dirty="0"/>
-          </a:p>
-        </p:txBody>
-      </p:sp>
-      <p:sp>
-        <p:nvSpPr>
-          <p:cNvPr id="15" name="Text 10"/>
-          <p:cNvSpPr/>
-          <p:nvPr/>
-        </p:nvSpPr>
-        <p:spPr>
-          <a:xfrm>
-            <a:off x="4937760" y="2286000"/>
-            <a:ext cx="2194560" cy="640080"/>
+              <a:t>Evidence that holds up</a:t>
+            </a:r>
+            <a:endParaRPr lang="en-US" sz="1700" dirty="0"/>
+          </a:p>
+        </p:txBody>
+      </p:sp>
+      <p:sp>
+        <p:nvSpPr>
+          <p:cNvPr id="22" name="Text 16"/>
+          <p:cNvSpPr/>
+          <p:nvPr/>
+        </p:nvSpPr>
+        <p:spPr>
+          <a:xfrm>
+            <a:off x="4612538" y="3749040"/>
+            <a:ext cx="2966618" cy="731520"/>
           </a:xfrm>
           <a:prstGeom prst="rect">
             <a:avLst/>
@@ -9003,15 +9308,165 @@
               <a:buNone/>
             </a:pPr>
             <a:r>
-              <a:rPr lang="en-US" sz="1200" dirty="0">
-                <a:solidFill>
-                  <a:srgbClr val="536079"/>
+              <a:rPr lang="en-US" sz="1400" dirty="0">
+                <a:solidFill>
+                  <a:srgbClr val="0F1B33"/>
                 </a:solidFill>
                 <a:latin typeface="Calibri" pitchFamily="34" charset="0"/>
                 <a:ea typeface="Calibri" pitchFamily="34" charset="-122"/>
                 <a:cs typeface="Calibri" pitchFamily="34" charset="-120"/>
               </a:rPr>
-              <a:t>Open standards, open-source components, documented APIs.</a:t>
+              <a:t>Every sighting carries the camera’s own time, its frame, and a record no one can quietly change.</a:t>
+            </a:r>
+            <a:endParaRPr lang="en-US" sz="1400" dirty="0"/>
+          </a:p>
+        </p:txBody>
+      </p:sp>
+      <p:sp>
+        <p:nvSpPr>
+          <p:cNvPr id="23" name="Shape 17"/>
+          <p:cNvSpPr/>
+          <p:nvPr/>
+        </p:nvSpPr>
+        <p:spPr>
+          <a:xfrm>
+            <a:off x="4612538" y="4544568"/>
+            <a:ext cx="2966618" cy="0"/>
+          </a:xfrm>
+          <a:prstGeom prst="line">
+            <a:avLst/>
+          </a:prstGeom>
+          <a:noFill/>
+          <a:ln w="9525">
+            <a:solidFill>
+              <a:srgbClr val="DDE3EE"/>
+            </a:solidFill>
+            <a:prstDash val="solid"/>
+          </a:ln>
+        </p:spPr>
+      </p:sp>
+      <p:sp>
+        <p:nvSpPr>
+          <p:cNvPr id="24" name="Shape 18"/>
+          <p:cNvSpPr/>
+          <p:nvPr/>
+        </p:nvSpPr>
+        <p:spPr>
+          <a:xfrm>
+            <a:off x="4612538" y="4681728"/>
+            <a:ext cx="274320" cy="274320"/>
+          </a:xfrm>
+          <a:prstGeom prst="ellipse">
+            <a:avLst/>
+          </a:prstGeom>
+          <a:solidFill>
+            <a:srgbClr val="0F766E"/>
+          </a:solidFill>
+          <a:ln w="12700">
+            <a:solidFill>
+              <a:srgbClr val="0F766E"/>
+            </a:solidFill>
+            <a:prstDash val="solid"/>
+          </a:ln>
+        </p:spPr>
+      </p:sp>
+      <p:pic>
+        <p:nvPicPr>
+          <p:cNvPr id="25" name="Image 3" descr="preencoded.png">    </p:cNvPr>
+          <p:cNvPicPr>
+            <a:picLocks noChangeAspect="1"/>
+          </p:cNvPicPr>
+          <p:nvPr/>
+        </p:nvPicPr>
+        <p:blipFill>
+          <a:blip r:embed="rId4"/>
+          <a:stretch>
+            <a:fillRect/>
+          </a:stretch>
+        </p:blipFill>
+        <p:spPr>
+          <a:xfrm>
+            <a:off x="4675632" y="4744822"/>
+            <a:ext cx="148133" cy="148133"/>
+          </a:xfrm>
+          <a:prstGeom prst="rect">
+            <a:avLst/>
+          </a:prstGeom>
+        </p:spPr>
+      </p:pic>
+      <p:sp>
+        <p:nvSpPr>
+          <p:cNvPr id="26" name="Text 19"/>
+          <p:cNvSpPr/>
+          <p:nvPr/>
+        </p:nvSpPr>
+        <p:spPr>
+          <a:xfrm>
+            <a:off x="4978298" y="4681728"/>
+            <a:ext cx="1371600" cy="274320"/>
+          </a:xfrm>
+          <a:prstGeom prst="rect">
+            <a:avLst/>
+          </a:prstGeom>
+          <a:noFill/>
+          <a:ln/>
+        </p:spPr>
+        <p:txBody>
+          <a:bodyPr wrap="square" lIns="0" tIns="0" rIns="0" bIns="0" rtlCol="0" anchor="ctr"/>
+          <a:lstStyle/>
+          <a:p>
+            <a:pPr indent="0" marL="0">
+              <a:buNone/>
+            </a:pPr>
+            <a:r>
+              <a:rPr lang="en-US" sz="1100" b="1" dirty="0">
+                <a:solidFill>
+                  <a:srgbClr val="0F766E"/>
+                </a:solidFill>
+                <a:latin typeface="Arial" pitchFamily="34" charset="0"/>
+                <a:ea typeface="Arial" pitchFamily="34" charset="-122"/>
+                <a:cs typeface="Arial" pitchFamily="34" charset="-120"/>
+              </a:rPr>
+              <a:t>Proof</a:t>
+            </a:r>
+            <a:endParaRPr lang="en-US" sz="1100" dirty="0"/>
+          </a:p>
+        </p:txBody>
+      </p:sp>
+      <p:sp>
+        <p:nvSpPr>
+          <p:cNvPr id="27" name="Text 20"/>
+          <p:cNvSpPr/>
+          <p:nvPr/>
+        </p:nvSpPr>
+        <p:spPr>
+          <a:xfrm>
+            <a:off x="4612538" y="5001768"/>
+            <a:ext cx="2966618" cy="713232"/>
+          </a:xfrm>
+          <a:prstGeom prst="rect">
+            <a:avLst/>
+          </a:prstGeom>
+          <a:noFill/>
+          <a:ln/>
+        </p:spPr>
+        <p:txBody>
+          <a:bodyPr wrap="square" lIns="0" tIns="0" rIns="0" bIns="0" rtlCol="0" anchor="t"/>
+          <a:lstStyle/>
+          <a:p>
+            <a:pPr indent="0" marL="0">
+              <a:buNone/>
+            </a:pPr>
+            <a:r>
+              <a:rPr lang="en-US" sz="1200" dirty="0">
+                <a:solidFill>
+                  <a:srgbClr val="536079"/>
+                </a:solidFill>
+                <a:latin typeface="Calibri" pitchFamily="34" charset="0"/>
+                <a:ea typeface="Calibri" pitchFamily="34" charset="-122"/>
+                <a:cs typeface="Calibri" pitchFamily="34" charset="-120"/>
+              </a:rPr>
+              <a:t>Times read off the frame — “time unknown” when unreadable, never a guess; impossible journeys flagged; reports digitally sealed.</a:t>
             </a:r>
             <a:endParaRPr lang="en-US" sz="1200" dirty="0"/>
           </a:p>
@@ -9019,18 +9474,18 @@
       </p:sp>
       <p:sp>
         <p:nvSpPr>
-          <p:cNvPr id="16" name="Shape 11"/>
-          <p:cNvSpPr/>
-          <p:nvPr/>
-        </p:nvSpPr>
-        <p:spPr>
-          <a:xfrm>
-            <a:off x="548640" y="3200400"/>
-            <a:ext cx="3246120" cy="1261872"/>
+          <p:cNvPr id="28" name="Shape 21"/>
+          <p:cNvSpPr/>
+          <p:nvPr/>
+        </p:nvSpPr>
+        <p:spPr>
+          <a:xfrm>
+            <a:off x="8127797" y="2697480"/>
+            <a:ext cx="3515258" cy="3063240"/>
           </a:xfrm>
           <a:prstGeom prst="roundRect">
             <a:avLst>
-              <a:gd name="adj" fmla="val 8696"/>
+              <a:gd name="adj" fmla="val 3582"/>
             </a:avLst>
           </a:prstGeom>
           <a:solidFill>
@@ -9053,14 +9508,14 @@
       </p:sp>
       <p:sp>
         <p:nvSpPr>
-          <p:cNvPr id="17" name="Shape 12"/>
-          <p:cNvSpPr/>
-          <p:nvPr/>
-        </p:nvSpPr>
-        <p:spPr>
-          <a:xfrm>
-            <a:off x="777240" y="3447288"/>
-            <a:ext cx="493776" cy="493776"/>
+          <p:cNvPr id="29" name="Shape 22"/>
+          <p:cNvSpPr/>
+          <p:nvPr/>
+        </p:nvSpPr>
+        <p:spPr>
+          <a:xfrm>
+            <a:off x="8402117" y="2971800"/>
+            <a:ext cx="603504" cy="603504"/>
           </a:xfrm>
           <a:prstGeom prst="ellipse">
             <a:avLst/>
@@ -9078,329 +9533,7 @@
       </p:sp>
       <p:pic>
         <p:nvPicPr>
-          <p:cNvPr id="18" name="Image 2" descr="preencoded.png">    </p:cNvPr>
-          <p:cNvPicPr>
-            <a:picLocks noChangeAspect="1"/>
-          </p:cNvPicPr>
-          <p:nvPr/>
-        </p:nvPicPr>
-        <p:blipFill>
-          <a:blip r:embed="rId3"/>
-          <a:stretch>
-            <a:fillRect/>
-          </a:stretch>
-        </p:blipFill>
-        <p:spPr>
-          <a:xfrm>
-            <a:off x="890808" y="3560856"/>
-            <a:ext cx="266639" cy="266639"/>
-          </a:xfrm>
-          <a:prstGeom prst="rect">
-            <a:avLst/>
-          </a:prstGeom>
-        </p:spPr>
-      </p:pic>
-      <p:sp>
-        <p:nvSpPr>
-          <p:cNvPr id="19" name="Text 13"/>
-          <p:cNvSpPr/>
-          <p:nvPr/>
-        </p:nvSpPr>
-        <p:spPr>
-          <a:xfrm>
-            <a:off x="1417320" y="3419856"/>
-            <a:ext cx="2194560" cy="329184"/>
-          </a:xfrm>
-          <a:prstGeom prst="rect">
-            <a:avLst/>
-          </a:prstGeom>
-          <a:noFill/>
-          <a:ln/>
-        </p:spPr>
-        <p:txBody>
-          <a:bodyPr wrap="square" lIns="0" tIns="0" rIns="0" bIns="0" rtlCol="0" anchor="t"/>
-          <a:lstStyle/>
-          <a:p>
-            <a:pPr indent="0" marL="0">
-              <a:buNone/>
-            </a:pPr>
-            <a:r>
-              <a:rPr lang="en-US" sz="1400" b="1" dirty="0">
-                <a:solidFill>
-                  <a:srgbClr val="0F1B33"/>
-                </a:solidFill>
-                <a:latin typeface="Arial" pitchFamily="34" charset="0"/>
-                <a:ea typeface="Arial" pitchFamily="34" charset="-122"/>
-                <a:cs typeface="Arial" pitchFamily="34" charset="-120"/>
-              </a:rPr>
-              <a:t>Works when links drop</a:t>
-            </a:r>
-            <a:endParaRPr lang="en-US" sz="1400" dirty="0"/>
-          </a:p>
-        </p:txBody>
-      </p:sp>
-      <p:sp>
-        <p:nvSpPr>
-          <p:cNvPr id="20" name="Text 14"/>
-          <p:cNvSpPr/>
-          <p:nvPr/>
-        </p:nvSpPr>
-        <p:spPr>
-          <a:xfrm>
-            <a:off x="1417320" y="3749040"/>
-            <a:ext cx="2194560" cy="640080"/>
-          </a:xfrm>
-          <a:prstGeom prst="rect">
-            <a:avLst/>
-          </a:prstGeom>
-          <a:noFill/>
-          <a:ln/>
-        </p:spPr>
-        <p:txBody>
-          <a:bodyPr wrap="square" lIns="0" tIns="0" rIns="0" bIns="0" rtlCol="0" anchor="t"/>
-          <a:lstStyle/>
-          <a:p>
-            <a:pPr indent="0" marL="0">
-              <a:buNone/>
-            </a:pPr>
-            <a:r>
-              <a:rPr lang="en-US" sz="1200" dirty="0">
-                <a:solidFill>
-                  <a:srgbClr val="536079"/>
-                </a:solidFill>
-                <a:latin typeface="Calibri" pitchFamily="34" charset="0"/>
-                <a:ea typeface="Calibri" pitchFamily="34" charset="-122"/>
-                <a:cs typeface="Calibri" pitchFamily="34" charset="-120"/>
-              </a:rPr>
-              <a:t>Districts keep reading and alerting; nothing is lost.</a:t>
-            </a:r>
-            <a:endParaRPr lang="en-US" sz="1200" dirty="0"/>
-          </a:p>
-        </p:txBody>
-      </p:sp>
-      <p:sp>
-        <p:nvSpPr>
-          <p:cNvPr id="21" name="Shape 15"/>
-          <p:cNvSpPr/>
-          <p:nvPr/>
-        </p:nvSpPr>
-        <p:spPr>
-          <a:xfrm>
-            <a:off x="4069080" y="3200400"/>
-            <a:ext cx="3246120" cy="1261872"/>
-          </a:xfrm>
-          <a:prstGeom prst="roundRect">
-            <a:avLst>
-              <a:gd name="adj" fmla="val 8696"/>
-            </a:avLst>
-          </a:prstGeom>
-          <a:solidFill>
-            <a:srgbClr val="FFFFFF"/>
-          </a:solidFill>
-          <a:ln w="9525">
-            <a:solidFill>
-              <a:srgbClr val="DDE3EE"/>
-            </a:solidFill>
-            <a:prstDash val="solid"/>
-          </a:ln>
-          <a:effectLst>
-            <a:outerShdw sx="100000" sy="100000" kx="0" ky="0" algn="bl" rotWithShape="0" blurRad="177800" dist="38100" dir="5400000">
-              <a:srgbClr val="1F2A44">
-                <a:alpha val="12000"/>
-              </a:srgbClr>
-            </a:outerShdw>
-          </a:effectLst>
-        </p:spPr>
-      </p:sp>
-      <p:sp>
-        <p:nvSpPr>
-          <p:cNvPr id="22" name="Shape 16"/>
-          <p:cNvSpPr/>
-          <p:nvPr/>
-        </p:nvSpPr>
-        <p:spPr>
-          <a:xfrm>
-            <a:off x="4297680" y="3447288"/>
-            <a:ext cx="493776" cy="493776"/>
-          </a:xfrm>
-          <a:prstGeom prst="ellipse">
-            <a:avLst/>
-          </a:prstGeom>
-          <a:solidFill>
-            <a:srgbClr val="D97706"/>
-          </a:solidFill>
-          <a:ln w="12700">
-            <a:solidFill>
-              <a:srgbClr val="D97706"/>
-            </a:solidFill>
-            <a:prstDash val="solid"/>
-          </a:ln>
-        </p:spPr>
-      </p:sp>
-      <p:pic>
-        <p:nvPicPr>
-          <p:cNvPr id="23" name="Image 3" descr="preencoded.png">    </p:cNvPr>
-          <p:cNvPicPr>
-            <a:picLocks noChangeAspect="1"/>
-          </p:cNvPicPr>
-          <p:nvPr/>
-        </p:nvPicPr>
-        <p:blipFill>
-          <a:blip r:embed="rId4"/>
-          <a:stretch>
-            <a:fillRect/>
-          </a:stretch>
-        </p:blipFill>
-        <p:spPr>
-          <a:xfrm>
-            <a:off x="4411248" y="3560856"/>
-            <a:ext cx="266639" cy="266639"/>
-          </a:xfrm>
-          <a:prstGeom prst="rect">
-            <a:avLst/>
-          </a:prstGeom>
-        </p:spPr>
-      </p:pic>
-      <p:sp>
-        <p:nvSpPr>
-          <p:cNvPr id="24" name="Text 17"/>
-          <p:cNvSpPr/>
-          <p:nvPr/>
-        </p:nvSpPr>
-        <p:spPr>
-          <a:xfrm>
-            <a:off x="4937760" y="3419856"/>
-            <a:ext cx="2194560" cy="329184"/>
-          </a:xfrm>
-          <a:prstGeom prst="rect">
-            <a:avLst/>
-          </a:prstGeom>
-          <a:noFill/>
-          <a:ln/>
-        </p:spPr>
-        <p:txBody>
-          <a:bodyPr wrap="square" lIns="0" tIns="0" rIns="0" bIns="0" rtlCol="0" anchor="t"/>
-          <a:lstStyle/>
-          <a:p>
-            <a:pPr indent="0" marL="0">
-              <a:buNone/>
-            </a:pPr>
-            <a:r>
-              <a:rPr lang="en-US" sz="1400" b="1" dirty="0">
-                <a:solidFill>
-                  <a:srgbClr val="0F1B33"/>
-                </a:solidFill>
-                <a:latin typeface="Arial" pitchFamily="34" charset="0"/>
-                <a:ea typeface="Arial" pitchFamily="34" charset="-122"/>
-                <a:cs typeface="Arial" pitchFamily="34" charset="-120"/>
-              </a:rPr>
-              <a:t>Speaks Gujarati</a:t>
-            </a:r>
-            <a:endParaRPr lang="en-US" sz="1400" dirty="0"/>
-          </a:p>
-        </p:txBody>
-      </p:sp>
-      <p:sp>
-        <p:nvSpPr>
-          <p:cNvPr id="25" name="Text 18"/>
-          <p:cNvSpPr/>
-          <p:nvPr/>
-        </p:nvSpPr>
-        <p:spPr>
-          <a:xfrm>
-            <a:off x="4937760" y="3749040"/>
-            <a:ext cx="2194560" cy="640080"/>
-          </a:xfrm>
-          <a:prstGeom prst="rect">
-            <a:avLst/>
-          </a:prstGeom>
-          <a:noFill/>
-          <a:ln/>
-        </p:spPr>
-        <p:txBody>
-          <a:bodyPr wrap="square" lIns="0" tIns="0" rIns="0" bIns="0" rtlCol="0" anchor="t"/>
-          <a:lstStyle/>
-          <a:p>
-            <a:pPr indent="0" marL="0">
-              <a:buNone/>
-            </a:pPr>
-            <a:r>
-              <a:rPr lang="en-US" sz="1200" dirty="0">
-                <a:solidFill>
-                  <a:srgbClr val="536079"/>
-                </a:solidFill>
-                <a:latin typeface="Calibri" pitchFamily="34" charset="0"/>
-                <a:ea typeface="Calibri" pitchFamily="34" charset="-122"/>
-                <a:cs typeface="Calibri" pitchFamily="34" charset="-120"/>
-              </a:rPr>
-              <a:t>The whole console in English, Hindi and Gujarati.</a:t>
-            </a:r>
-            <a:endParaRPr lang="en-US" sz="1200" dirty="0"/>
-          </a:p>
-        </p:txBody>
-      </p:sp>
-      <p:sp>
-        <p:nvSpPr>
-          <p:cNvPr id="26" name="Shape 19"/>
-          <p:cNvSpPr/>
-          <p:nvPr/>
-        </p:nvSpPr>
-        <p:spPr>
-          <a:xfrm>
-            <a:off x="548640" y="4663440"/>
-            <a:ext cx="3246120" cy="1261872"/>
-          </a:xfrm>
-          <a:prstGeom prst="roundRect">
-            <a:avLst>
-              <a:gd name="adj" fmla="val 8696"/>
-            </a:avLst>
-          </a:prstGeom>
-          <a:solidFill>
-            <a:srgbClr val="FFFFFF"/>
-          </a:solidFill>
-          <a:ln w="9525">
-            <a:solidFill>
-              <a:srgbClr val="DDE3EE"/>
-            </a:solidFill>
-            <a:prstDash val="solid"/>
-          </a:ln>
-          <a:effectLst>
-            <a:outerShdw sx="100000" sy="100000" kx="0" ky="0" algn="bl" rotWithShape="0" blurRad="177800" dist="38100" dir="5400000">
-              <a:srgbClr val="1F2A44">
-                <a:alpha val="12000"/>
-              </a:srgbClr>
-            </a:outerShdw>
-          </a:effectLst>
-        </p:spPr>
-      </p:sp>
-      <p:sp>
-        <p:nvSpPr>
-          <p:cNvPr id="27" name="Shape 20"/>
-          <p:cNvSpPr/>
-          <p:nvPr/>
-        </p:nvSpPr>
-        <p:spPr>
-          <a:xfrm>
-            <a:off x="777240" y="4910328"/>
-            <a:ext cx="493776" cy="493776"/>
-          </a:xfrm>
-          <a:prstGeom prst="ellipse">
-            <a:avLst/>
-          </a:prstGeom>
-          <a:solidFill>
-            <a:srgbClr val="2456D6"/>
-          </a:solidFill>
-          <a:ln w="12700">
-            <a:solidFill>
-              <a:srgbClr val="2456D6"/>
-            </a:solidFill>
-            <a:prstDash val="solid"/>
-          </a:ln>
-        </p:spPr>
-      </p:sp>
-      <p:pic>
-        <p:nvPicPr>
-          <p:cNvPr id="28" name="Image 4" descr="preencoded.png">    </p:cNvPr>
+          <p:cNvPr id="30" name="Image 4" descr="preencoded.png">    </p:cNvPr>
           <p:cNvPicPr>
             <a:picLocks noChangeAspect="1"/>
           </p:cNvPicPr>
@@ -9414,8 +9547,8 @@
         </p:blipFill>
         <p:spPr>
           <a:xfrm>
-            <a:off x="890808" y="5023896"/>
-            <a:ext cx="266639" cy="266639"/>
+            <a:off x="8540923" y="3110606"/>
+            <a:ext cx="325892" cy="325892"/>
           </a:xfrm>
           <a:prstGeom prst="rect">
             <a:avLst/>
@@ -9424,30 +9557,30 @@
       </p:pic>
       <p:sp>
         <p:nvSpPr>
-          <p:cNvPr id="29" name="Text 21"/>
-          <p:cNvSpPr/>
-          <p:nvPr/>
-        </p:nvSpPr>
-        <p:spPr>
-          <a:xfrm>
-            <a:off x="1417320" y="4882896"/>
-            <a:ext cx="2194560" cy="329184"/>
-          </a:xfrm>
-          <a:prstGeom prst="rect">
-            <a:avLst/>
-          </a:prstGeom>
-          <a:noFill/>
-          <a:ln/>
-        </p:spPr>
-        <p:txBody>
-          <a:bodyPr wrap="square" lIns="0" tIns="0" rIns="0" bIns="0" rtlCol="0" anchor="t"/>
-          <a:lstStyle/>
-          <a:p>
-            <a:pPr indent="0" marL="0">
-              <a:buNone/>
-            </a:pPr>
-            <a:r>
-              <a:rPr lang="en-US" sz="1400" b="1" dirty="0">
+          <p:cNvPr id="31" name="Text 23"/>
+          <p:cNvSpPr/>
+          <p:nvPr/>
+        </p:nvSpPr>
+        <p:spPr>
+          <a:xfrm>
+            <a:off x="9133637" y="2990088"/>
+            <a:ext cx="2280818" cy="603504"/>
+          </a:xfrm>
+          <a:prstGeom prst="rect">
+            <a:avLst/>
+          </a:prstGeom>
+          <a:noFill/>
+          <a:ln/>
+        </p:spPr>
+        <p:txBody>
+          <a:bodyPr wrap="square" lIns="0" tIns="0" rIns="0" bIns="0" rtlCol="0" anchor="ctr"/>
+          <a:lstStyle/>
+          <a:p>
+            <a:pPr indent="0" marL="0">
+              <a:buNone/>
+            </a:pPr>
+            <a:r>
+              <a:rPr lang="en-US" sz="1700" b="1" dirty="0">
                 <a:solidFill>
                   <a:srgbClr val="0F1B33"/>
                 </a:solidFill>
@@ -9455,22 +9588,22 @@
                 <a:ea typeface="Arial" pitchFamily="34" charset="-122"/>
                 <a:cs typeface="Arial" pitchFamily="34" charset="-120"/>
               </a:rPr>
-              <a:t>Ready to integrate</a:t>
-            </a:r>
-            <a:endParaRPr lang="en-US" sz="1400" dirty="0"/>
-          </a:p>
-        </p:txBody>
-      </p:sp>
-      <p:sp>
-        <p:nvSpPr>
-          <p:cNvPr id="30" name="Text 22"/>
-          <p:cNvSpPr/>
-          <p:nvPr/>
-        </p:nvSpPr>
-        <p:spPr>
-          <a:xfrm>
-            <a:off x="1417320" y="5212080"/>
-            <a:ext cx="2194560" cy="640080"/>
+              <a:t>Fits what Gujarat already owns</a:t>
+            </a:r>
+            <a:endParaRPr lang="en-US" sz="1700" dirty="0"/>
+          </a:p>
+        </p:txBody>
+      </p:sp>
+      <p:sp>
+        <p:nvSpPr>
+          <p:cNvPr id="32" name="Text 24"/>
+          <p:cNvSpPr/>
+          <p:nvPr/>
+        </p:nvSpPr>
+        <p:spPr>
+          <a:xfrm>
+            <a:off x="8402117" y="3749040"/>
+            <a:ext cx="2966618" cy="731520"/>
           </a:xfrm>
           <a:prstGeom prst="rect">
             <a:avLst/>
@@ -9486,74 +9619,63 @@
               <a:buNone/>
             </a:pPr>
             <a:r>
-              <a:rPr lang="en-US" sz="1200" dirty="0">
-                <a:solidFill>
-                  <a:srgbClr val="536079"/>
+              <a:rPr lang="en-US" sz="1400" dirty="0">
+                <a:solidFill>
+                  <a:srgbClr val="0F1B33"/>
                 </a:solidFill>
                 <a:latin typeface="Calibri" pitchFamily="34" charset="0"/>
                 <a:ea typeface="Calibri" pitchFamily="34" charset="-122"/>
                 <a:cs typeface="Calibri" pitchFamily="34" charset="-120"/>
               </a:rPr>
-              <a:t>VAHAN, SARTHI, eGujCop, AFIS and NAFIS connectors built.</a:t>
-            </a:r>
-            <a:endParaRPr lang="en-US" sz="1200" dirty="0"/>
-          </a:p>
-        </p:txBody>
-      </p:sp>
-      <p:sp>
-        <p:nvSpPr>
-          <p:cNvPr id="31" name="Shape 23"/>
-          <p:cNvSpPr/>
-          <p:nvPr/>
-        </p:nvSpPr>
-        <p:spPr>
-          <a:xfrm>
-            <a:off x="4069080" y="4663440"/>
-            <a:ext cx="3246120" cy="1261872"/>
-          </a:xfrm>
-          <a:prstGeom prst="roundRect">
-            <a:avLst>
-              <a:gd name="adj" fmla="val 8696"/>
-            </a:avLst>
-          </a:prstGeom>
-          <a:solidFill>
-            <a:srgbClr val="FFFFFF"/>
-          </a:solidFill>
+              <a:t>Any vendor’s cameras and VMS, nothing replaced, analysis in each district.</a:t>
+            </a:r>
+            <a:endParaRPr lang="en-US" sz="1400" dirty="0"/>
+          </a:p>
+        </p:txBody>
+      </p:sp>
+      <p:sp>
+        <p:nvSpPr>
+          <p:cNvPr id="33" name="Shape 25"/>
+          <p:cNvSpPr/>
+          <p:nvPr/>
+        </p:nvSpPr>
+        <p:spPr>
+          <a:xfrm>
+            <a:off x="8402117" y="4544568"/>
+            <a:ext cx="2966618" cy="0"/>
+          </a:xfrm>
+          <a:prstGeom prst="line">
+            <a:avLst/>
+          </a:prstGeom>
+          <a:noFill/>
           <a:ln w="9525">
             <a:solidFill>
               <a:srgbClr val="DDE3EE"/>
             </a:solidFill>
             <a:prstDash val="solid"/>
           </a:ln>
-          <a:effectLst>
-            <a:outerShdw sx="100000" sy="100000" kx="0" ky="0" algn="bl" rotWithShape="0" blurRad="177800" dist="38100" dir="5400000">
-              <a:srgbClr val="1F2A44">
-                <a:alpha val="12000"/>
-              </a:srgbClr>
-            </a:outerShdw>
-          </a:effectLst>
-        </p:spPr>
-      </p:sp>
-      <p:sp>
-        <p:nvSpPr>
-          <p:cNvPr id="32" name="Shape 24"/>
-          <p:cNvSpPr/>
-          <p:nvPr/>
-        </p:nvSpPr>
-        <p:spPr>
-          <a:xfrm>
-            <a:off x="4297680" y="4910328"/>
-            <a:ext cx="493776" cy="493776"/>
+        </p:spPr>
+      </p:sp>
+      <p:sp>
+        <p:nvSpPr>
+          <p:cNvPr id="34" name="Shape 26"/>
+          <p:cNvSpPr/>
+          <p:nvPr/>
+        </p:nvSpPr>
+        <p:spPr>
+          <a:xfrm>
+            <a:off x="8402117" y="4681728"/>
+            <a:ext cx="274320" cy="274320"/>
           </a:xfrm>
           <a:prstGeom prst="ellipse">
             <a:avLst/>
           </a:prstGeom>
           <a:solidFill>
-            <a:srgbClr val="2456D6"/>
+            <a:srgbClr val="0F766E"/>
           </a:solidFill>
           <a:ln w="12700">
             <a:solidFill>
-              <a:srgbClr val="2456D6"/>
+              <a:srgbClr val="0F766E"/>
             </a:solidFill>
             <a:prstDash val="solid"/>
           </a:ln>
@@ -9561,7 +9683,7 @@
       </p:sp>
       <p:pic>
         <p:nvPicPr>
-          <p:cNvPr id="33" name="Image 5" descr="preencoded.png">    </p:cNvPr>
+          <p:cNvPr id="35" name="Image 5" descr="preencoded.png">    </p:cNvPr>
           <p:cNvPicPr>
             <a:picLocks noChangeAspect="1"/>
           </p:cNvPicPr>
@@ -9575,8 +9697,8 @@
         </p:blipFill>
         <p:spPr>
           <a:xfrm>
-            <a:off x="4411248" y="5023896"/>
-            <a:ext cx="266639" cy="266639"/>
+            <a:off x="8465210" y="4744822"/>
+            <a:ext cx="148133" cy="148133"/>
           </a:xfrm>
           <a:prstGeom prst="rect">
             <a:avLst/>
@@ -9585,53 +9707,53 @@
       </p:pic>
       <p:sp>
         <p:nvSpPr>
-          <p:cNvPr id="34" name="Text 25"/>
-          <p:cNvSpPr/>
-          <p:nvPr/>
-        </p:nvSpPr>
-        <p:spPr>
-          <a:xfrm>
-            <a:off x="4937760" y="4882896"/>
-            <a:ext cx="2194560" cy="329184"/>
-          </a:xfrm>
-          <a:prstGeom prst="rect">
-            <a:avLst/>
-          </a:prstGeom>
-          <a:noFill/>
-          <a:ln/>
-        </p:spPr>
-        <p:txBody>
-          <a:bodyPr wrap="square" lIns="0" tIns="0" rIns="0" bIns="0" rtlCol="0" anchor="t"/>
-          <a:lstStyle/>
-          <a:p>
-            <a:pPr indent="0" marL="0">
-              <a:buNone/>
-            </a:pPr>
-            <a:r>
-              <a:rPr lang="en-US" sz="1400" b="1" dirty="0">
-                <a:solidFill>
-                  <a:srgbClr val="0F1B33"/>
+          <p:cNvPr id="36" name="Text 27"/>
+          <p:cNvSpPr/>
+          <p:nvPr/>
+        </p:nvSpPr>
+        <p:spPr>
+          <a:xfrm>
+            <a:off x="8767877" y="4681728"/>
+            <a:ext cx="1371600" cy="274320"/>
+          </a:xfrm>
+          <a:prstGeom prst="rect">
+            <a:avLst/>
+          </a:prstGeom>
+          <a:noFill/>
+          <a:ln/>
+        </p:spPr>
+        <p:txBody>
+          <a:bodyPr wrap="square" lIns="0" tIns="0" rIns="0" bIns="0" rtlCol="0" anchor="ctr"/>
+          <a:lstStyle/>
+          <a:p>
+            <a:pPr indent="0" marL="0">
+              <a:buNone/>
+            </a:pPr>
+            <a:r>
+              <a:rPr lang="en-US" sz="1100" b="1" dirty="0">
+                <a:solidFill>
+                  <a:srgbClr val="0F766E"/>
                 </a:solidFill>
                 <a:latin typeface="Arial" pitchFamily="34" charset="0"/>
                 <a:ea typeface="Arial" pitchFamily="34" charset="-122"/>
                 <a:cs typeface="Arial" pitchFamily="34" charset="-120"/>
               </a:rPr>
-              <a:t>Secure by design</a:t>
-            </a:r>
-            <a:endParaRPr lang="en-US" sz="1400" dirty="0"/>
-          </a:p>
-        </p:txBody>
-      </p:sp>
-      <p:sp>
-        <p:nvSpPr>
-          <p:cNvPr id="35" name="Text 26"/>
-          <p:cNvSpPr/>
-          <p:nvPr/>
-        </p:nvSpPr>
-        <p:spPr>
-          <a:xfrm>
-            <a:off x="4937760" y="5212080"/>
-            <a:ext cx="2194560" cy="640080"/>
+              <a:t>Proof</a:t>
+            </a:r>
+            <a:endParaRPr lang="en-US" sz="1100" dirty="0"/>
+          </a:p>
+        </p:txBody>
+      </p:sp>
+      <p:sp>
+        <p:nvSpPr>
+          <p:cNvPr id="37" name="Text 28"/>
+          <p:cNvSpPr/>
+          <p:nvPr/>
+        </p:nvSpPr>
+        <p:spPr>
+          <a:xfrm>
+            <a:off x="8402117" y="5001768"/>
+            <a:ext cx="2966618" cy="713232"/>
           </a:xfrm>
           <a:prstGeom prst="rect">
             <a:avLst/>
@@ -9655,7 +9777,7 @@
                 <a:ea typeface="Calibri" pitchFamily="34" charset="-122"/>
                 <a:cs typeface="Calibri" pitchFamily="34" charset="-120"/>
               </a:rPr>
-              <a:t>Encrypted links, scoped access, tamper-evident logging.</a:t>
+              <a:t>RTSP, ONVIF, Hikvision and Dahua; about 1,000× less network than centralising; keeps alerting offline for 72 hours.</a:t>
             </a:r>
             <a:endParaRPr lang="en-US" sz="1200" dirty="0"/>
           </a:p>
@@ -9663,41 +9785,32 @@
       </p:sp>
       <p:sp>
         <p:nvSpPr>
-          <p:cNvPr id="36" name="Shape 27"/>
-          <p:cNvSpPr/>
-          <p:nvPr/>
-        </p:nvSpPr>
-        <p:spPr>
-          <a:xfrm>
-            <a:off x="7662672" y="1719072"/>
-            <a:ext cx="4044391" cy="4408705"/>
-          </a:xfrm>
-          <a:prstGeom prst="roundRect">
-            <a:avLst>
-              <a:gd name="adj" fmla="val 2261"/>
-            </a:avLst>
+          <p:cNvPr id="38" name="Shape 29"/>
+          <p:cNvSpPr/>
+          <p:nvPr/>
+        </p:nvSpPr>
+        <p:spPr>
+          <a:xfrm>
+            <a:off x="548640" y="5989320"/>
+            <a:ext cx="365760" cy="365760"/>
+          </a:xfrm>
+          <a:prstGeom prst="ellipse">
+            <a:avLst/>
           </a:prstGeom>
           <a:solidFill>
-            <a:srgbClr val="FFFFFF"/>
+            <a:srgbClr val="0F766E"/>
           </a:solidFill>
-          <a:ln w="9525">
+          <a:ln w="12700">
             <a:solidFill>
-              <a:srgbClr val="DDE3EE"/>
+              <a:srgbClr val="0F766E"/>
             </a:solidFill>
             <a:prstDash val="solid"/>
           </a:ln>
-          <a:effectLst>
-            <a:outerShdw sx="100000" sy="100000" kx="0" ky="0" algn="bl" rotWithShape="0" blurRad="254000" dist="76200" dir="5400000">
-              <a:srgbClr val="1F2A44">
-                <a:alpha val="16000"/>
-              </a:srgbClr>
-            </a:outerShdw>
-          </a:effectLst>
         </p:spPr>
       </p:sp>
       <p:pic>
         <p:nvPicPr>
-          <p:cNvPr id="37" name="Image 6" descr="preencoded.png">    </p:cNvPr>
+          <p:cNvPr id="39" name="Image 6" descr="preencoded.png">    </p:cNvPr>
           <p:cNvPicPr>
             <a:picLocks noChangeAspect="1"/>
           </p:cNvPicPr>
@@ -9711,8 +9824,8 @@
         </p:blipFill>
         <p:spPr>
           <a:xfrm>
-            <a:off x="7726680" y="1783080"/>
-            <a:ext cx="3916375" cy="4280689"/>
+            <a:off x="632765" y="6073445"/>
+            <a:ext cx="197510" cy="197510"/>
           </a:xfrm>
           <a:prstGeom prst="rect">
             <a:avLst/>
@@ -9721,40 +9834,304 @@
       </p:pic>
       <p:sp>
         <p:nvSpPr>
-          <p:cNvPr id="38" name="Text 28"/>
-          <p:cNvSpPr/>
-          <p:nvPr/>
-        </p:nvSpPr>
-        <p:spPr>
-          <a:xfrm>
-            <a:off x="7726680" y="6228361"/>
-            <a:ext cx="3916375" cy="274320"/>
-          </a:xfrm>
-          <a:prstGeom prst="rect">
-            <a:avLst/>
-          </a:prstGeom>
-          <a:noFill/>
-          <a:ln/>
-        </p:spPr>
-        <p:txBody>
-          <a:bodyPr wrap="square" lIns="0" tIns="0" rIns="0" bIns="0" rtlCol="0" anchor="t"/>
-          <a:lstStyle/>
-          <a:p>
-            <a:pPr indent="0" marL="0">
-              <a:buNone/>
-            </a:pPr>
-            <a:r>
-              <a:rPr lang="en-US" sz="1100" i="1" dirty="0">
-                <a:solidFill>
-                  <a:srgbClr val="536079"/>
+          <p:cNvPr id="40" name="Text 30"/>
+          <p:cNvSpPr/>
+          <p:nvPr/>
+        </p:nvSpPr>
+        <p:spPr>
+          <a:xfrm>
+            <a:off x="1024128" y="5989320"/>
+            <a:ext cx="2224964" cy="365760"/>
+          </a:xfrm>
+          <a:prstGeom prst="rect">
+            <a:avLst/>
+          </a:prstGeom>
+          <a:noFill/>
+          <a:ln/>
+        </p:spPr>
+        <p:txBody>
+          <a:bodyPr wrap="square" lIns="0" tIns="0" rIns="0" bIns="0" rtlCol="0" anchor="ctr"/>
+          <a:lstStyle/>
+          <a:p>
+            <a:pPr indent="0" marL="0">
+              <a:buNone/>
+            </a:pPr>
+            <a:r>
+              <a:rPr lang="en-US" sz="1200" b="1" dirty="0">
+                <a:solidFill>
+                  <a:srgbClr val="0F1B33"/>
                 </a:solidFill>
                 <a:latin typeface="Calibri" pitchFamily="34" charset="0"/>
                 <a:ea typeface="Calibri" pitchFamily="34" charset="-122"/>
                 <a:cs typeface="Calibri" pitchFamily="34" charset="-120"/>
               </a:rPr>
-              <a:t>The same console, in Gujarati</a:t>
-            </a:r>
-            <a:endParaRPr lang="en-US" sz="1100" dirty="0"/>
+              <a:t>English, Hindi and Gujarati</a:t>
+            </a:r>
+            <a:endParaRPr lang="en-US" sz="1200" dirty="0"/>
+          </a:p>
+        </p:txBody>
+      </p:sp>
+      <p:sp>
+        <p:nvSpPr>
+          <p:cNvPr id="41" name="Shape 31"/>
+          <p:cNvSpPr/>
+          <p:nvPr/>
+        </p:nvSpPr>
+        <p:spPr>
+          <a:xfrm>
+            <a:off x="3322244" y="5989320"/>
+            <a:ext cx="365760" cy="365760"/>
+          </a:xfrm>
+          <a:prstGeom prst="ellipse">
+            <a:avLst/>
+          </a:prstGeom>
+          <a:solidFill>
+            <a:srgbClr val="0F766E"/>
+          </a:solidFill>
+          <a:ln w="12700">
+            <a:solidFill>
+              <a:srgbClr val="0F766E"/>
+            </a:solidFill>
+            <a:prstDash val="solid"/>
+          </a:ln>
+        </p:spPr>
+      </p:sp>
+      <p:pic>
+        <p:nvPicPr>
+          <p:cNvPr id="42" name="Image 7" descr="preencoded.png">    </p:cNvPr>
+          <p:cNvPicPr>
+            <a:picLocks noChangeAspect="1"/>
+          </p:cNvPicPr>
+          <p:nvPr/>
+        </p:nvPicPr>
+        <p:blipFill>
+          <a:blip r:embed="rId8"/>
+          <a:stretch>
+            <a:fillRect/>
+          </a:stretch>
+        </p:blipFill>
+        <p:spPr>
+          <a:xfrm>
+            <a:off x="3406369" y="6073445"/>
+            <a:ext cx="197510" cy="197510"/>
+          </a:xfrm>
+          <a:prstGeom prst="rect">
+            <a:avLst/>
+          </a:prstGeom>
+        </p:spPr>
+      </p:pic>
+      <p:sp>
+        <p:nvSpPr>
+          <p:cNvPr id="43" name="Text 32"/>
+          <p:cNvSpPr/>
+          <p:nvPr/>
+        </p:nvSpPr>
+        <p:spPr>
+          <a:xfrm>
+            <a:off x="3797732" y="5989320"/>
+            <a:ext cx="2224964" cy="365760"/>
+          </a:xfrm>
+          <a:prstGeom prst="rect">
+            <a:avLst/>
+          </a:prstGeom>
+          <a:noFill/>
+          <a:ln/>
+        </p:spPr>
+        <p:txBody>
+          <a:bodyPr wrap="square" lIns="0" tIns="0" rIns="0" bIns="0" rtlCol="0" anchor="ctr"/>
+          <a:lstStyle/>
+          <a:p>
+            <a:pPr indent="0" marL="0">
+              <a:buNone/>
+            </a:pPr>
+            <a:r>
+              <a:rPr lang="en-US" sz="1200" b="1" dirty="0">
+                <a:solidFill>
+                  <a:srgbClr val="0F1B33"/>
+                </a:solidFill>
+                <a:latin typeface="Calibri" pitchFamily="34" charset="0"/>
+                <a:ea typeface="Calibri" pitchFamily="34" charset="-122"/>
+                <a:cs typeface="Calibri" pitchFamily="34" charset="-120"/>
+              </a:rPr>
+              <a:t>VAHAN, eGujCop and more: ready</a:t>
+            </a:r>
+            <a:endParaRPr lang="en-US" sz="1200" dirty="0"/>
+          </a:p>
+        </p:txBody>
+      </p:sp>
+      <p:sp>
+        <p:nvSpPr>
+          <p:cNvPr id="44" name="Shape 33"/>
+          <p:cNvSpPr/>
+          <p:nvPr/>
+        </p:nvSpPr>
+        <p:spPr>
+          <a:xfrm>
+            <a:off x="6095848" y="5989320"/>
+            <a:ext cx="365760" cy="365760"/>
+          </a:xfrm>
+          <a:prstGeom prst="ellipse">
+            <a:avLst/>
+          </a:prstGeom>
+          <a:solidFill>
+            <a:srgbClr val="0F766E"/>
+          </a:solidFill>
+          <a:ln w="12700">
+            <a:solidFill>
+              <a:srgbClr val="0F766E"/>
+            </a:solidFill>
+            <a:prstDash val="solid"/>
+          </a:ln>
+        </p:spPr>
+      </p:sp>
+      <p:pic>
+        <p:nvPicPr>
+          <p:cNvPr id="45" name="Image 8" descr="preencoded.png">    </p:cNvPr>
+          <p:cNvPicPr>
+            <a:picLocks noChangeAspect="1"/>
+          </p:cNvPicPr>
+          <p:nvPr/>
+        </p:nvPicPr>
+        <p:blipFill>
+          <a:blip r:embed="rId9"/>
+          <a:stretch>
+            <a:fillRect/>
+          </a:stretch>
+        </p:blipFill>
+        <p:spPr>
+          <a:xfrm>
+            <a:off x="6179972" y="6073445"/>
+            <a:ext cx="197510" cy="197510"/>
+          </a:xfrm>
+          <a:prstGeom prst="rect">
+            <a:avLst/>
+          </a:prstGeom>
+        </p:spPr>
+      </p:pic>
+      <p:sp>
+        <p:nvSpPr>
+          <p:cNvPr id="46" name="Text 34"/>
+          <p:cNvSpPr/>
+          <p:nvPr/>
+        </p:nvSpPr>
+        <p:spPr>
+          <a:xfrm>
+            <a:off x="6571336" y="5989320"/>
+            <a:ext cx="2224964" cy="365760"/>
+          </a:xfrm>
+          <a:prstGeom prst="rect">
+            <a:avLst/>
+          </a:prstGeom>
+          <a:noFill/>
+          <a:ln/>
+        </p:spPr>
+        <p:txBody>
+          <a:bodyPr wrap="square" lIns="0" tIns="0" rIns="0" bIns="0" rtlCol="0" anchor="ctr"/>
+          <a:lstStyle/>
+          <a:p>
+            <a:pPr indent="0" marL="0">
+              <a:buNone/>
+            </a:pPr>
+            <a:r>
+              <a:rPr lang="en-US" sz="1200" b="1" dirty="0">
+                <a:solidFill>
+                  <a:srgbClr val="0F1B33"/>
+                </a:solidFill>
+                <a:latin typeface="Calibri" pitchFamily="34" charset="0"/>
+                <a:ea typeface="Calibri" pitchFamily="34" charset="-122"/>
+                <a:cs typeface="Calibri" pitchFamily="34" charset="-120"/>
+              </a:rPr>
+              <a:t>Open standards, no lock-in</a:t>
+            </a:r>
+            <a:endParaRPr lang="en-US" sz="1200" dirty="0"/>
+          </a:p>
+        </p:txBody>
+      </p:sp>
+      <p:sp>
+        <p:nvSpPr>
+          <p:cNvPr id="47" name="Shape 35"/>
+          <p:cNvSpPr/>
+          <p:nvPr/>
+        </p:nvSpPr>
+        <p:spPr>
+          <a:xfrm>
+            <a:off x="8869451" y="5989320"/>
+            <a:ext cx="365760" cy="365760"/>
+          </a:xfrm>
+          <a:prstGeom prst="ellipse">
+            <a:avLst/>
+          </a:prstGeom>
+          <a:solidFill>
+            <a:srgbClr val="0F766E"/>
+          </a:solidFill>
+          <a:ln w="12700">
+            <a:solidFill>
+              <a:srgbClr val="0F766E"/>
+            </a:solidFill>
+            <a:prstDash val="solid"/>
+          </a:ln>
+        </p:spPr>
+      </p:sp>
+      <p:pic>
+        <p:nvPicPr>
+          <p:cNvPr id="48" name="Image 9" descr="preencoded.png">    </p:cNvPr>
+          <p:cNvPicPr>
+            <a:picLocks noChangeAspect="1"/>
+          </p:cNvPicPr>
+          <p:nvPr/>
+        </p:nvPicPr>
+        <p:blipFill>
+          <a:blip r:embed="rId10"/>
+          <a:stretch>
+            <a:fillRect/>
+          </a:stretch>
+        </p:blipFill>
+        <p:spPr>
+          <a:xfrm>
+            <a:off x="8953576" y="6073445"/>
+            <a:ext cx="197510" cy="197510"/>
+          </a:xfrm>
+          <a:prstGeom prst="rect">
+            <a:avLst/>
+          </a:prstGeom>
+        </p:spPr>
+      </p:pic>
+      <p:sp>
+        <p:nvSpPr>
+          <p:cNvPr id="49" name="Text 36"/>
+          <p:cNvSpPr/>
+          <p:nvPr/>
+        </p:nvSpPr>
+        <p:spPr>
+          <a:xfrm>
+            <a:off x="9344939" y="5989320"/>
+            <a:ext cx="2224964" cy="365760"/>
+          </a:xfrm>
+          <a:prstGeom prst="rect">
+            <a:avLst/>
+          </a:prstGeom>
+          <a:noFill/>
+          <a:ln/>
+        </p:spPr>
+        <p:txBody>
+          <a:bodyPr wrap="square" lIns="0" tIns="0" rIns="0" bIns="0" rtlCol="0" anchor="ctr"/>
+          <a:lstStyle/>
+          <a:p>
+            <a:pPr indent="0" marL="0">
+              <a:buNone/>
+            </a:pPr>
+            <a:r>
+              <a:rPr lang="en-US" sz="1200" b="1" dirty="0">
+                <a:solidFill>
+                  <a:srgbClr val="0F1B33"/>
+                </a:solidFill>
+                <a:latin typeface="Calibri" pitchFamily="34" charset="0"/>
+                <a:ea typeface="Calibri" pitchFamily="34" charset="-122"/>
+                <a:cs typeface="Calibri" pitchFamily="34" charset="-120"/>
+              </a:rPr>
+              <a:t>No face recognition</a:t>
+            </a:r>
+            <a:endParaRPr lang="en-US" sz="1200" dirty="0"/>
           </a:p>
         </p:txBody>
       </p:sp>
@@ -9823,7 +10200,7 @@
                 <a:ea typeface="Arial" pitchFamily="34" charset="-122"/>
                 <a:cs typeface="Arial" pitchFamily="34" charset="-120"/>
               </a:rPr>
-              <a:t>PROVEN, NOT PROMISED</a:t>
+              <a:t>CHOOSING AN APPROACH</a:t>
             </a:r>
             <a:endParaRPr lang="en-US" sz="1100" dirty="0"/>
           </a:p>
@@ -9862,7 +10239,7 @@
                 <a:ea typeface="Arial" pitchFamily="34" charset="-122"/>
                 <a:cs typeface="Arial" pitchFamily="34" charset="-120"/>
               </a:rPr>
-              <a:t>Measured on real government footage</a:t>
+              <a:t>How Sentinel compares</a:t>
             </a:r>
             <a:endParaRPr lang="en-US" sz="3200" dirty="0"/>
           </a:p>
@@ -9915,657 +10292,207 @@
         </p:nvSpPr>
         <p:spPr>
           <a:xfrm>
-            <a:off x="548640" y="1691640"/>
-            <a:ext cx="2567864" cy="2514600"/>
+            <a:off x="9011717" y="1618488"/>
+            <a:ext cx="2585618" cy="4352544"/>
           </a:xfrm>
           <a:prstGeom prst="roundRect">
             <a:avLst>
-              <a:gd name="adj" fmla="val 4364"/>
+              <a:gd name="adj" fmla="val 4244"/>
             </a:avLst>
           </a:prstGeom>
           <a:solidFill>
-            <a:srgbClr val="FFFFFF"/>
+            <a:srgbClr val="EAF0FD"/>
           </a:solidFill>
+          <a:ln w="9525">
+            <a:solidFill>
+              <a:srgbClr val="C9D7F7"/>
+            </a:solidFill>
+            <a:prstDash val="solid"/>
+          </a:ln>
+        </p:spPr>
+      </p:sp>
+      <p:sp>
+        <p:nvSpPr>
+          <p:cNvPr id="7" name="Text 4"/>
+          <p:cNvSpPr/>
+          <p:nvPr/>
+        </p:nvSpPr>
+        <p:spPr>
+          <a:xfrm>
+            <a:off x="3840480" y="1691640"/>
+            <a:ext cx="2219858" cy="548640"/>
+          </a:xfrm>
+          <a:prstGeom prst="rect">
+            <a:avLst/>
+          </a:prstGeom>
+          <a:noFill/>
+          <a:ln/>
+        </p:spPr>
+        <p:txBody>
+          <a:bodyPr wrap="square" lIns="0" tIns="0" rIns="0" bIns="0" rtlCol="0" anchor="ctr"/>
+          <a:lstStyle/>
+          <a:p>
+            <a:pPr indent="0" marL="0">
+              <a:buNone/>
+            </a:pPr>
+            <a:r>
+              <a:rPr lang="en-US" sz="1400" b="1" dirty="0">
+                <a:solidFill>
+                  <a:srgbClr val="536079"/>
+                </a:solidFill>
+                <a:latin typeface="Arial" pitchFamily="34" charset="0"/>
+                <a:ea typeface="Arial" pitchFamily="34" charset="-122"/>
+                <a:cs typeface="Arial" pitchFamily="34" charset="-120"/>
+              </a:rPr>
+              <a:t>Separate department systems</a:t>
+            </a:r>
+            <a:endParaRPr lang="en-US" sz="1400" dirty="0"/>
+          </a:p>
+        </p:txBody>
+      </p:sp>
+      <p:sp>
+        <p:nvSpPr>
+          <p:cNvPr id="8" name="Text 5"/>
+          <p:cNvSpPr/>
+          <p:nvPr/>
+        </p:nvSpPr>
+        <p:spPr>
+          <a:xfrm>
+            <a:off x="6517538" y="1691640"/>
+            <a:ext cx="2219858" cy="548640"/>
+          </a:xfrm>
+          <a:prstGeom prst="rect">
+            <a:avLst/>
+          </a:prstGeom>
+          <a:noFill/>
+          <a:ln/>
+        </p:spPr>
+        <p:txBody>
+          <a:bodyPr wrap="square" lIns="0" tIns="0" rIns="0" bIns="0" rtlCol="0" anchor="ctr"/>
+          <a:lstStyle/>
+          <a:p>
+            <a:pPr indent="0" marL="0">
+              <a:buNone/>
+            </a:pPr>
+            <a:r>
+              <a:rPr lang="en-US" sz="1400" b="1" dirty="0">
+                <a:solidFill>
+                  <a:srgbClr val="536079"/>
+                </a:solidFill>
+                <a:latin typeface="Arial" pitchFamily="34" charset="0"/>
+                <a:ea typeface="Arial" pitchFamily="34" charset="-122"/>
+                <a:cs typeface="Arial" pitchFamily="34" charset="-120"/>
+              </a:rPr>
+              <a:t>Centralise every camera</a:t>
+            </a:r>
+            <a:endParaRPr lang="en-US" sz="1400" dirty="0"/>
+          </a:p>
+        </p:txBody>
+      </p:sp>
+      <p:sp>
+        <p:nvSpPr>
+          <p:cNvPr id="9" name="Text 6"/>
+          <p:cNvSpPr/>
+          <p:nvPr/>
+        </p:nvSpPr>
+        <p:spPr>
+          <a:xfrm>
+            <a:off x="9194597" y="1691640"/>
+            <a:ext cx="2219858" cy="548640"/>
+          </a:xfrm>
+          <a:prstGeom prst="rect">
+            <a:avLst/>
+          </a:prstGeom>
+          <a:noFill/>
+          <a:ln/>
+        </p:spPr>
+        <p:txBody>
+          <a:bodyPr wrap="square" lIns="0" tIns="0" rIns="0" bIns="0" rtlCol="0" anchor="ctr"/>
+          <a:lstStyle/>
+          <a:p>
+            <a:pPr indent="0" marL="0">
+              <a:buNone/>
+            </a:pPr>
+            <a:r>
+              <a:rPr lang="en-US" sz="1800" b="1" dirty="0">
+                <a:solidFill>
+                  <a:srgbClr val="2456D6"/>
+                </a:solidFill>
+                <a:latin typeface="Arial" pitchFamily="34" charset="0"/>
+                <a:ea typeface="Arial" pitchFamily="34" charset="-122"/>
+                <a:cs typeface="Arial" pitchFamily="34" charset="-120"/>
+              </a:rPr>
+              <a:t>Sentinel</a:t>
+            </a:r>
+            <a:endParaRPr lang="en-US" sz="1800" dirty="0"/>
+          </a:p>
+        </p:txBody>
+      </p:sp>
+      <p:sp>
+        <p:nvSpPr>
+          <p:cNvPr id="10" name="Shape 7"/>
+          <p:cNvSpPr/>
+          <p:nvPr/>
+        </p:nvSpPr>
+        <p:spPr>
+          <a:xfrm>
+            <a:off x="548640" y="2240280"/>
+            <a:ext cx="11094415" cy="0"/>
+          </a:xfrm>
+          <a:prstGeom prst="line">
+            <a:avLst/>
+          </a:prstGeom>
+          <a:noFill/>
           <a:ln w="9525">
             <a:solidFill>
               <a:srgbClr val="DDE3EE"/>
             </a:solidFill>
             <a:prstDash val="solid"/>
           </a:ln>
-          <a:effectLst>
-            <a:outerShdw sx="100000" sy="100000" kx="0" ky="0" algn="bl" rotWithShape="0" blurRad="177800" dist="38100" dir="5400000">
-              <a:srgbClr val="1F2A44">
-                <a:alpha val="12000"/>
-              </a:srgbClr>
-            </a:outerShdw>
-          </a:effectLst>
-        </p:spPr>
-      </p:sp>
-      <p:sp>
-        <p:nvSpPr>
-          <p:cNvPr id="7" name="Text 4"/>
-          <p:cNvSpPr/>
-          <p:nvPr/>
-        </p:nvSpPr>
-        <p:spPr>
-          <a:xfrm>
-            <a:off x="822960" y="1874520"/>
-            <a:ext cx="2019224" cy="822960"/>
-          </a:xfrm>
-          <a:prstGeom prst="rect">
-            <a:avLst/>
-          </a:prstGeom>
-          <a:noFill/>
-          <a:ln/>
-        </p:spPr>
-        <p:txBody>
-          <a:bodyPr wrap="square" lIns="0" tIns="0" rIns="0" bIns="0" rtlCol="0" anchor="t"/>
-          <a:lstStyle/>
-          <a:p>
-            <a:pPr indent="0" marL="0">
-              <a:buNone/>
-            </a:pPr>
-            <a:r>
-              <a:rPr lang="en-US" sz="4400" b="1" dirty="0">
-                <a:solidFill>
-                  <a:srgbClr val="0F766E"/>
+        </p:spPr>
+      </p:sp>
+      <p:sp>
+        <p:nvSpPr>
+          <p:cNvPr id="11" name="Text 8"/>
+          <p:cNvSpPr/>
+          <p:nvPr/>
+        </p:nvSpPr>
+        <p:spPr>
+          <a:xfrm>
+            <a:off x="548640" y="2350008"/>
+            <a:ext cx="2880360" cy="512064"/>
+          </a:xfrm>
+          <a:prstGeom prst="rect">
+            <a:avLst/>
+          </a:prstGeom>
+          <a:noFill/>
+          <a:ln/>
+        </p:spPr>
+        <p:txBody>
+          <a:bodyPr wrap="square" lIns="0" tIns="0" rIns="0" bIns="0" rtlCol="0" anchor="ctr"/>
+          <a:lstStyle/>
+          <a:p>
+            <a:pPr indent="0" marL="0">
+              <a:buNone/>
+            </a:pPr>
+            <a:r>
+              <a:rPr lang="en-US" sz="1400" b="1" dirty="0">
+                <a:solidFill>
+                  <a:srgbClr val="0F1B33"/>
                 </a:solidFill>
                 <a:latin typeface="Arial" pitchFamily="34" charset="0"/>
                 <a:ea typeface="Arial" pitchFamily="34" charset="-122"/>
                 <a:cs typeface="Arial" pitchFamily="34" charset="-120"/>
               </a:rPr>
-              <a:t>78%</a:t>
-            </a:r>
-            <a:endParaRPr lang="en-US" sz="4400" dirty="0"/>
-          </a:p>
-        </p:txBody>
-      </p:sp>
-      <p:sp>
-        <p:nvSpPr>
-          <p:cNvPr id="8" name="Text 5"/>
-          <p:cNvSpPr/>
-          <p:nvPr/>
-        </p:nvSpPr>
-        <p:spPr>
-          <a:xfrm>
-            <a:off x="822960" y="2743200"/>
-            <a:ext cx="2019224" cy="548640"/>
-          </a:xfrm>
-          <a:prstGeom prst="rect">
-            <a:avLst/>
-          </a:prstGeom>
-          <a:noFill/>
-          <a:ln/>
-        </p:spPr>
-        <p:txBody>
-          <a:bodyPr wrap="square" lIns="0" tIns="0" rIns="0" bIns="0" rtlCol="0" anchor="t"/>
-          <a:lstStyle/>
-          <a:p>
-            <a:pPr indent="0" marL="0">
-              <a:buNone/>
-            </a:pPr>
-            <a:r>
-              <a:rPr lang="en-US" sz="1400" b="1" dirty="0">
-                <a:solidFill>
-                  <a:srgbClr val="0F1B33"/>
-                </a:solidFill>
-                <a:latin typeface="Arial" pitchFamily="34" charset="0"/>
-                <a:ea typeface="Arial" pitchFamily="34" charset="-122"/>
-                <a:cs typeface="Arial" pitchFamily="34" charset="-120"/>
-              </a:rPr>
-              <a:t>plates read exactly</a:t>
+              <a:t>Trace a vehicle across all departments</a:t>
             </a:r>
             <a:endParaRPr lang="en-US" sz="1400" dirty="0"/>
           </a:p>
         </p:txBody>
-      </p:sp>
-      <p:sp>
-        <p:nvSpPr>
-          <p:cNvPr id="9" name="Text 6"/>
-          <p:cNvSpPr/>
-          <p:nvPr/>
-        </p:nvSpPr>
-        <p:spPr>
-          <a:xfrm>
-            <a:off x="822960" y="3310128"/>
-            <a:ext cx="2019224" cy="777240"/>
-          </a:xfrm>
-          <a:prstGeom prst="rect">
-            <a:avLst/>
-          </a:prstGeom>
-          <a:noFill/>
-          <a:ln/>
-        </p:spPr>
-        <p:txBody>
-          <a:bodyPr wrap="square" lIns="0" tIns="0" rIns="0" bIns="0" rtlCol="0" anchor="t"/>
-          <a:lstStyle/>
-          <a:p>
-            <a:pPr indent="0" marL="0">
-              <a:buNone/>
-            </a:pPr>
-            <a:r>
-              <a:rPr lang="en-US" sz="1200" dirty="0">
-                <a:solidFill>
-                  <a:srgbClr val="536079"/>
-                </a:solidFill>
-                <a:latin typeface="Calibri" pitchFamily="34" charset="0"/>
-                <a:ea typeface="Calibri" pitchFamily="34" charset="-122"/>
-                <a:cs typeface="Calibri" pitchFamily="34" charset="-120"/>
-              </a:rPr>
-              <a:t>On 81 hand-checked real government plates; 88% of characters correct</a:t>
-            </a:r>
-            <a:endParaRPr lang="en-US" sz="1200" dirty="0"/>
-          </a:p>
-        </p:txBody>
-      </p:sp>
-      <p:sp>
-        <p:nvSpPr>
-          <p:cNvPr id="10" name="Shape 7"/>
-          <p:cNvSpPr/>
-          <p:nvPr/>
-        </p:nvSpPr>
-        <p:spPr>
-          <a:xfrm>
-            <a:off x="3390824" y="1691640"/>
-            <a:ext cx="2567864" cy="2514600"/>
-          </a:xfrm>
-          <a:prstGeom prst="roundRect">
-            <a:avLst>
-              <a:gd name="adj" fmla="val 4364"/>
-            </a:avLst>
-          </a:prstGeom>
-          <a:solidFill>
-            <a:srgbClr val="FFFFFF"/>
-          </a:solidFill>
-          <a:ln w="9525">
-            <a:solidFill>
-              <a:srgbClr val="DDE3EE"/>
-            </a:solidFill>
-            <a:prstDash val="solid"/>
-          </a:ln>
-          <a:effectLst>
-            <a:outerShdw sx="100000" sy="100000" kx="0" ky="0" algn="bl" rotWithShape="0" blurRad="177800" dist="38100" dir="5400000">
-              <a:srgbClr val="1F2A44">
-                <a:alpha val="12000"/>
-              </a:srgbClr>
-            </a:outerShdw>
-          </a:effectLst>
-        </p:spPr>
-      </p:sp>
-      <p:sp>
-        <p:nvSpPr>
-          <p:cNvPr id="11" name="Text 8"/>
-          <p:cNvSpPr/>
-          <p:nvPr/>
-        </p:nvSpPr>
-        <p:spPr>
-          <a:xfrm>
-            <a:off x="3665144" y="1874520"/>
-            <a:ext cx="2019224" cy="822960"/>
-          </a:xfrm>
-          <a:prstGeom prst="rect">
-            <a:avLst/>
-          </a:prstGeom>
-          <a:noFill/>
-          <a:ln/>
-        </p:spPr>
-        <p:txBody>
-          <a:bodyPr wrap="square" lIns="0" tIns="0" rIns="0" bIns="0" rtlCol="0" anchor="t"/>
-          <a:lstStyle/>
-          <a:p>
-            <a:pPr indent="0" marL="0">
-              <a:buNone/>
-            </a:pPr>
-            <a:r>
-              <a:rPr lang="en-US" sz="4400" b="1" dirty="0">
-                <a:solidFill>
-                  <a:srgbClr val="0F766E"/>
-                </a:solidFill>
-                <a:latin typeface="Arial" pitchFamily="34" charset="0"/>
-                <a:ea typeface="Arial" pitchFamily="34" charset="-122"/>
-                <a:cs typeface="Arial" pitchFamily="34" charset="-120"/>
-              </a:rPr>
-              <a:t>16</a:t>
-            </a:r>
-            <a:endParaRPr lang="en-US" sz="4400" dirty="0"/>
-          </a:p>
-        </p:txBody>
-      </p:sp>
-      <p:sp>
-        <p:nvSpPr>
-          <p:cNvPr id="12" name="Text 9"/>
-          <p:cNvSpPr/>
-          <p:nvPr/>
-        </p:nvSpPr>
-        <p:spPr>
-          <a:xfrm>
-            <a:off x="3665144" y="2743200"/>
-            <a:ext cx="2019224" cy="548640"/>
-          </a:xfrm>
-          <a:prstGeom prst="rect">
-            <a:avLst/>
-          </a:prstGeom>
-          <a:noFill/>
-          <a:ln/>
-        </p:spPr>
-        <p:txBody>
-          <a:bodyPr wrap="square" lIns="0" tIns="0" rIns="0" bIns="0" rtlCol="0" anchor="t"/>
-          <a:lstStyle/>
-          <a:p>
-            <a:pPr indent="0" marL="0">
-              <a:buNone/>
-            </a:pPr>
-            <a:r>
-              <a:rPr lang="en-US" sz="1400" b="1" dirty="0">
-                <a:solidFill>
-                  <a:srgbClr val="0F1B33"/>
-                </a:solidFill>
-                <a:latin typeface="Arial" pitchFamily="34" charset="0"/>
-                <a:ea typeface="Arial" pitchFamily="34" charset="-122"/>
-                <a:cs typeface="Arial" pitchFamily="34" charset="-120"/>
-              </a:rPr>
-              <a:t>frames a second, on one laptop</a:t>
-            </a:r>
-            <a:endParaRPr lang="en-US" sz="1400" dirty="0"/>
-          </a:p>
-        </p:txBody>
-      </p:sp>
-      <p:sp>
-        <p:nvSpPr>
-          <p:cNvPr id="13" name="Text 10"/>
-          <p:cNvSpPr/>
-          <p:nvPr/>
-        </p:nvSpPr>
-        <p:spPr>
-          <a:xfrm>
-            <a:off x="3665144" y="3310128"/>
-            <a:ext cx="2019224" cy="777240"/>
-          </a:xfrm>
-          <a:prstGeom prst="rect">
-            <a:avLst/>
-          </a:prstGeom>
-          <a:noFill/>
-          <a:ln/>
-        </p:spPr>
-        <p:txBody>
-          <a:bodyPr wrap="square" lIns="0" tIns="0" rIns="0" bIns="0" rtlCol="0" anchor="t"/>
-          <a:lstStyle/>
-          <a:p>
-            <a:pPr indent="0" marL="0">
-              <a:buNone/>
-            </a:pPr>
-            <a:r>
-              <a:rPr lang="en-US" sz="1200" dirty="0">
-                <a:solidFill>
-                  <a:srgbClr val="536079"/>
-                </a:solidFill>
-                <a:latin typeface="Calibri" pitchFamily="34" charset="0"/>
-                <a:ea typeface="Calibri" pitchFamily="34" charset="-122"/>
-                <a:cs typeface="Calibri" pitchFamily="34" charset="-120"/>
-              </a:rPr>
-              <a:t>End-to-end live analysis on a CPU — the on-site set-up</a:t>
-            </a:r>
-            <a:endParaRPr lang="en-US" sz="1200" dirty="0"/>
-          </a:p>
-        </p:txBody>
-      </p:sp>
-      <p:sp>
-        <p:nvSpPr>
-          <p:cNvPr id="14" name="Shape 11"/>
-          <p:cNvSpPr/>
-          <p:nvPr/>
-        </p:nvSpPr>
-        <p:spPr>
-          <a:xfrm>
-            <a:off x="6233008" y="1691640"/>
-            <a:ext cx="2567864" cy="2514600"/>
-          </a:xfrm>
-          <a:prstGeom prst="roundRect">
-            <a:avLst>
-              <a:gd name="adj" fmla="val 4364"/>
-            </a:avLst>
-          </a:prstGeom>
-          <a:solidFill>
-            <a:srgbClr val="FFFFFF"/>
-          </a:solidFill>
-          <a:ln w="9525">
-            <a:solidFill>
-              <a:srgbClr val="DDE3EE"/>
-            </a:solidFill>
-            <a:prstDash val="solid"/>
-          </a:ln>
-          <a:effectLst>
-            <a:outerShdw sx="100000" sy="100000" kx="0" ky="0" algn="bl" rotWithShape="0" blurRad="177800" dist="38100" dir="5400000">
-              <a:srgbClr val="1F2A44">
-                <a:alpha val="12000"/>
-              </a:srgbClr>
-            </a:outerShdw>
-          </a:effectLst>
-        </p:spPr>
-      </p:sp>
-      <p:sp>
-        <p:nvSpPr>
-          <p:cNvPr id="15" name="Text 12"/>
-          <p:cNvSpPr/>
-          <p:nvPr/>
-        </p:nvSpPr>
-        <p:spPr>
-          <a:xfrm>
-            <a:off x="6507328" y="1874520"/>
-            <a:ext cx="2019224" cy="822960"/>
-          </a:xfrm>
-          <a:prstGeom prst="rect">
-            <a:avLst/>
-          </a:prstGeom>
-          <a:noFill/>
-          <a:ln/>
-        </p:spPr>
-        <p:txBody>
-          <a:bodyPr wrap="square" lIns="0" tIns="0" rIns="0" bIns="0" rtlCol="0" anchor="t"/>
-          <a:lstStyle/>
-          <a:p>
-            <a:pPr indent="0" marL="0">
-              <a:buNone/>
-            </a:pPr>
-            <a:r>
-              <a:rPr lang="en-US" sz="4400" b="1" dirty="0">
-                <a:solidFill>
-                  <a:srgbClr val="0F766E"/>
-                </a:solidFill>
-                <a:latin typeface="Arial" pitchFamily="34" charset="0"/>
-                <a:ea typeface="Arial" pitchFamily="34" charset="-122"/>
-                <a:cs typeface="Arial" pitchFamily="34" charset="-120"/>
-              </a:rPr>
-              <a:t>600+</a:t>
-            </a:r>
-            <a:endParaRPr lang="en-US" sz="4400" dirty="0"/>
-          </a:p>
-        </p:txBody>
-      </p:sp>
-      <p:sp>
-        <p:nvSpPr>
-          <p:cNvPr id="16" name="Text 13"/>
-          <p:cNvSpPr/>
-          <p:nvPr/>
-        </p:nvSpPr>
-        <p:spPr>
-          <a:xfrm>
-            <a:off x="6507328" y="2743200"/>
-            <a:ext cx="2019224" cy="548640"/>
-          </a:xfrm>
-          <a:prstGeom prst="rect">
-            <a:avLst/>
-          </a:prstGeom>
-          <a:noFill/>
-          <a:ln/>
-        </p:spPr>
-        <p:txBody>
-          <a:bodyPr wrap="square" lIns="0" tIns="0" rIns="0" bIns="0" rtlCol="0" anchor="t"/>
-          <a:lstStyle/>
-          <a:p>
-            <a:pPr indent="0" marL="0">
-              <a:buNone/>
-            </a:pPr>
-            <a:r>
-              <a:rPr lang="en-US" sz="1400" b="1" dirty="0">
-                <a:solidFill>
-                  <a:srgbClr val="0F1B33"/>
-                </a:solidFill>
-                <a:latin typeface="Arial" pitchFamily="34" charset="0"/>
-                <a:ea typeface="Arial" pitchFamily="34" charset="-122"/>
-                <a:cs typeface="Arial" pitchFamily="34" charset="-120"/>
-              </a:rPr>
-              <a:t>automated tests</a:t>
-            </a:r>
-            <a:endParaRPr lang="en-US" sz="1400" dirty="0"/>
-          </a:p>
-        </p:txBody>
-      </p:sp>
-      <p:sp>
-        <p:nvSpPr>
-          <p:cNvPr id="17" name="Text 14"/>
-          <p:cNvSpPr/>
-          <p:nvPr/>
-        </p:nvSpPr>
-        <p:spPr>
-          <a:xfrm>
-            <a:off x="6507328" y="3310128"/>
-            <a:ext cx="2019224" cy="777240"/>
-          </a:xfrm>
-          <a:prstGeom prst="rect">
-            <a:avLst/>
-          </a:prstGeom>
-          <a:noFill/>
-          <a:ln/>
-        </p:spPr>
-        <p:txBody>
-          <a:bodyPr wrap="square" lIns="0" tIns="0" rIns="0" bIns="0" rtlCol="0" anchor="t"/>
-          <a:lstStyle/>
-          <a:p>
-            <a:pPr indent="0" marL="0">
-              <a:buNone/>
-            </a:pPr>
-            <a:r>
-              <a:rPr lang="en-US" sz="1200" dirty="0">
-                <a:solidFill>
-                  <a:srgbClr val="536079"/>
-                </a:solidFill>
-                <a:latin typeface="Calibri" pitchFamily="34" charset="0"/>
-                <a:ea typeface="Calibri" pitchFamily="34" charset="-122"/>
-                <a:cs typeface="Calibri" pitchFamily="34" charset="-120"/>
-              </a:rPr>
-              <a:t>Plus interface tests in three languages and two themes</a:t>
-            </a:r>
-            <a:endParaRPr lang="en-US" sz="1200" dirty="0"/>
-          </a:p>
-        </p:txBody>
-      </p:sp>
-      <p:sp>
-        <p:nvSpPr>
-          <p:cNvPr id="18" name="Shape 15"/>
-          <p:cNvSpPr/>
-          <p:nvPr/>
-        </p:nvSpPr>
-        <p:spPr>
-          <a:xfrm>
-            <a:off x="9075191" y="1691640"/>
-            <a:ext cx="2567864" cy="2514600"/>
-          </a:xfrm>
-          <a:prstGeom prst="roundRect">
-            <a:avLst>
-              <a:gd name="adj" fmla="val 4364"/>
-            </a:avLst>
-          </a:prstGeom>
-          <a:solidFill>
-            <a:srgbClr val="FFFFFF"/>
-          </a:solidFill>
-          <a:ln w="9525">
-            <a:solidFill>
-              <a:srgbClr val="DDE3EE"/>
-            </a:solidFill>
-            <a:prstDash val="solid"/>
-          </a:ln>
-          <a:effectLst>
-            <a:outerShdw sx="100000" sy="100000" kx="0" ky="0" algn="bl" rotWithShape="0" blurRad="177800" dist="38100" dir="5400000">
-              <a:srgbClr val="1F2A44">
-                <a:alpha val="12000"/>
-              </a:srgbClr>
-            </a:outerShdw>
-          </a:effectLst>
-        </p:spPr>
-      </p:sp>
-      <p:sp>
-        <p:nvSpPr>
-          <p:cNvPr id="19" name="Text 16"/>
-          <p:cNvSpPr/>
-          <p:nvPr/>
-        </p:nvSpPr>
-        <p:spPr>
-          <a:xfrm>
-            <a:off x="9349511" y="1874520"/>
-            <a:ext cx="2019224" cy="822960"/>
-          </a:xfrm>
-          <a:prstGeom prst="rect">
-            <a:avLst/>
-          </a:prstGeom>
-          <a:noFill/>
-          <a:ln/>
-        </p:spPr>
-        <p:txBody>
-          <a:bodyPr wrap="square" lIns="0" tIns="0" rIns="0" bIns="0" rtlCol="0" anchor="t"/>
-          <a:lstStyle/>
-          <a:p>
-            <a:pPr indent="0" marL="0">
-              <a:buNone/>
-            </a:pPr>
-            <a:r>
-              <a:rPr lang="en-US" sz="4400" b="1" dirty="0">
-                <a:solidFill>
-                  <a:srgbClr val="0F766E"/>
-                </a:solidFill>
-                <a:latin typeface="Arial" pitchFamily="34" charset="0"/>
-                <a:ea typeface="Arial" pitchFamily="34" charset="-122"/>
-                <a:cs typeface="Arial" pitchFamily="34" charset="-120"/>
-              </a:rPr>
-              <a:t>5.7 s</a:t>
-            </a:r>
-            <a:endParaRPr lang="en-US" sz="4400" dirty="0"/>
-          </a:p>
-        </p:txBody>
-      </p:sp>
-      <p:sp>
-        <p:nvSpPr>
-          <p:cNvPr id="20" name="Text 17"/>
-          <p:cNvSpPr/>
-          <p:nvPr/>
-        </p:nvSpPr>
-        <p:spPr>
-          <a:xfrm>
-            <a:off x="9349511" y="2743200"/>
-            <a:ext cx="2019224" cy="548640"/>
-          </a:xfrm>
-          <a:prstGeom prst="rect">
-            <a:avLst/>
-          </a:prstGeom>
-          <a:noFill/>
-          <a:ln/>
-        </p:spPr>
-        <p:txBody>
-          <a:bodyPr wrap="square" lIns="0" tIns="0" rIns="0" bIns="0" rtlCol="0" anchor="t"/>
-          <a:lstStyle/>
-          <a:p>
-            <a:pPr indent="0" marL="0">
-              <a:buNone/>
-            </a:pPr>
-            <a:r>
-              <a:rPr lang="en-US" sz="1400" b="1" dirty="0">
-                <a:solidFill>
-                  <a:srgbClr val="0F1B33"/>
-                </a:solidFill>
-                <a:latin typeface="Arial" pitchFamily="34" charset="0"/>
-                <a:ea typeface="Arial" pitchFamily="34" charset="-122"/>
-                <a:cs typeface="Arial" pitchFamily="34" charset="-120"/>
-              </a:rPr>
-              <a:t>to restore a million records</a:t>
-            </a:r>
-            <a:endParaRPr lang="en-US" sz="1400" dirty="0"/>
-          </a:p>
-        </p:txBody>
-      </p:sp>
-      <p:sp>
-        <p:nvSpPr>
-          <p:cNvPr id="21" name="Text 18"/>
-          <p:cNvSpPr/>
-          <p:nvPr/>
-        </p:nvSpPr>
-        <p:spPr>
-          <a:xfrm>
-            <a:off x="9349511" y="3310128"/>
-            <a:ext cx="2019224" cy="777240"/>
-          </a:xfrm>
-          <a:prstGeom prst="rect">
-            <a:avLst/>
-          </a:prstGeom>
-          <a:noFill/>
-          <a:ln/>
-        </p:spPr>
-        <p:txBody>
-          <a:bodyPr wrap="square" lIns="0" tIns="0" rIns="0" bIns="0" rtlCol="0" anchor="t"/>
-          <a:lstStyle/>
-          <a:p>
-            <a:pPr indent="0" marL="0">
-              <a:buNone/>
-            </a:pPr>
-            <a:r>
-              <a:rPr lang="en-US" sz="1200" dirty="0">
-                <a:solidFill>
-                  <a:srgbClr val="536079"/>
-                </a:solidFill>
-                <a:latin typeface="Calibri" pitchFamily="34" charset="0"/>
-                <a:ea typeface="Calibri" pitchFamily="34" charset="-122"/>
-                <a:cs typeface="Calibri" pitchFamily="34" charset="-120"/>
-              </a:rPr>
-              <a:t>Disaster-recovery drill, with tampering detected</a:t>
-            </a:r>
-            <a:endParaRPr lang="en-US" sz="1200" dirty="0"/>
-          </a:p>
-        </p:txBody>
-      </p:sp>
-      <p:sp>
-        <p:nvSpPr>
-          <p:cNvPr id="22" name="Shape 19"/>
-          <p:cNvSpPr/>
-          <p:nvPr/>
-        </p:nvSpPr>
-        <p:spPr>
-          <a:xfrm>
-            <a:off x="548640" y="4526280"/>
-            <a:ext cx="11094415" cy="1463040"/>
-          </a:xfrm>
-          <a:prstGeom prst="roundRect">
-            <a:avLst>
-              <a:gd name="adj" fmla="val 7500"/>
-            </a:avLst>
-          </a:prstGeom>
-          <a:solidFill>
-            <a:srgbClr val="F3F5FA"/>
-          </a:solidFill>
-          <a:ln w="9525">
-            <a:solidFill>
-              <a:srgbClr val="DDE3EE"/>
-            </a:solidFill>
-            <a:prstDash val="solid"/>
-          </a:ln>
-        </p:spPr>
-      </p:sp>
-      <p:sp>
-        <p:nvSpPr>
-          <p:cNvPr id="23" name="Shape 20"/>
-          <p:cNvSpPr/>
-          <p:nvPr/>
-        </p:nvSpPr>
-        <p:spPr>
-          <a:xfrm>
-            <a:off x="868680" y="4754880"/>
-            <a:ext cx="512064" cy="512064"/>
-          </a:xfrm>
-          <a:prstGeom prst="ellipse">
-            <a:avLst/>
-          </a:prstGeom>
-          <a:solidFill>
-            <a:srgbClr val="D97706"/>
-          </a:solidFill>
-          <a:ln w="12700">
-            <a:solidFill>
-              <a:srgbClr val="D97706"/>
-            </a:solidFill>
-            <a:prstDash val="solid"/>
-          </a:ln>
-        </p:spPr>
       </p:sp>
       <p:pic>
         <p:nvPicPr>
-          <p:cNvPr id="24" name="Image 0" descr="preencoded.png">    </p:cNvPr>
+          <p:cNvPr id="12" name="Image 0" descr="preencoded.png">    </p:cNvPr>
           <p:cNvPicPr>
             <a:picLocks noChangeAspect="1"/>
           </p:cNvPicPr>
@@ -10579,8 +10506,8 @@
         </p:blipFill>
         <p:spPr>
           <a:xfrm>
-            <a:off x="986455" y="4872655"/>
-            <a:ext cx="276515" cy="276515"/>
+            <a:off x="3840480" y="2459736"/>
+            <a:ext cx="292608" cy="292608"/>
           </a:xfrm>
           <a:prstGeom prst="rect">
             <a:avLst/>
@@ -10589,30 +10516,218 @@
       </p:pic>
       <p:sp>
         <p:nvSpPr>
-          <p:cNvPr id="25" name="Text 21"/>
-          <p:cNvSpPr/>
-          <p:nvPr/>
-        </p:nvSpPr>
-        <p:spPr>
-          <a:xfrm>
-            <a:off x="1554480" y="4754880"/>
-            <a:ext cx="3657600" cy="365760"/>
-          </a:xfrm>
-          <a:prstGeom prst="rect">
-            <a:avLst/>
-          </a:prstGeom>
-          <a:noFill/>
-          <a:ln/>
-        </p:spPr>
-        <p:txBody>
-          <a:bodyPr wrap="square" lIns="0" tIns="0" rIns="0" bIns="0" rtlCol="0" anchor="t"/>
-          <a:lstStyle/>
-          <a:p>
-            <a:pPr indent="0" marL="0">
-              <a:buNone/>
-            </a:pPr>
-            <a:r>
-              <a:rPr lang="en-US" sz="1700" b="1" dirty="0">
+          <p:cNvPr id="13" name="Text 9"/>
+          <p:cNvSpPr/>
+          <p:nvPr/>
+        </p:nvSpPr>
+        <p:spPr>
+          <a:xfrm>
+            <a:off x="4251960" y="2331720"/>
+            <a:ext cx="1808378" cy="548640"/>
+          </a:xfrm>
+          <a:prstGeom prst="rect">
+            <a:avLst/>
+          </a:prstGeom>
+          <a:noFill/>
+          <a:ln/>
+        </p:spPr>
+        <p:txBody>
+          <a:bodyPr wrap="square" lIns="0" tIns="0" rIns="0" bIns="0" rtlCol="0" anchor="ctr"/>
+          <a:lstStyle/>
+          <a:p>
+            <a:pPr indent="0" marL="0">
+              <a:buNone/>
+            </a:pPr>
+            <a:r>
+              <a:rPr lang="en-US" sz="1300" dirty="0">
+                <a:solidFill>
+                  <a:srgbClr val="536079"/>
+                </a:solidFill>
+                <a:latin typeface="Calibri" pitchFamily="34" charset="0"/>
+                <a:ea typeface="Calibri" pitchFamily="34" charset="-122"/>
+                <a:cs typeface="Calibri" pitchFamily="34" charset="-120"/>
+              </a:rPr>
+              <a:t>Phone calls and manual review</a:t>
+            </a:r>
+            <a:endParaRPr lang="en-US" sz="1300" dirty="0"/>
+          </a:p>
+        </p:txBody>
+      </p:sp>
+      <p:pic>
+        <p:nvPicPr>
+          <p:cNvPr id="14" name="Image 1" descr="preencoded.png">    </p:cNvPr>
+          <p:cNvPicPr>
+            <a:picLocks noChangeAspect="1"/>
+          </p:cNvPicPr>
+          <p:nvPr/>
+        </p:nvPicPr>
+        <p:blipFill>
+          <a:blip r:embed="rId2"/>
+          <a:stretch>
+            <a:fillRect/>
+          </a:stretch>
+        </p:blipFill>
+        <p:spPr>
+          <a:xfrm>
+            <a:off x="6517538" y="2459736"/>
+            <a:ext cx="292608" cy="292608"/>
+          </a:xfrm>
+          <a:prstGeom prst="rect">
+            <a:avLst/>
+          </a:prstGeom>
+        </p:spPr>
+      </p:pic>
+      <p:sp>
+        <p:nvSpPr>
+          <p:cNvPr id="15" name="Text 10"/>
+          <p:cNvSpPr/>
+          <p:nvPr/>
+        </p:nvSpPr>
+        <p:spPr>
+          <a:xfrm>
+            <a:off x="6929018" y="2331720"/>
+            <a:ext cx="1808378" cy="548640"/>
+          </a:xfrm>
+          <a:prstGeom prst="rect">
+            <a:avLst/>
+          </a:prstGeom>
+          <a:noFill/>
+          <a:ln/>
+        </p:spPr>
+        <p:txBody>
+          <a:bodyPr wrap="square" lIns="0" tIns="0" rIns="0" bIns="0" rtlCol="0" anchor="ctr"/>
+          <a:lstStyle/>
+          <a:p>
+            <a:pPr indent="0" marL="0">
+              <a:buNone/>
+            </a:pPr>
+            <a:r>
+              <a:rPr lang="en-US" sz="1300" dirty="0">
+                <a:solidFill>
+                  <a:srgbClr val="536079"/>
+                </a:solidFill>
+                <a:latin typeface="Calibri" pitchFamily="34" charset="0"/>
+                <a:ea typeface="Calibri" pitchFamily="34" charset="-122"/>
+                <a:cs typeface="Calibri" pitchFamily="34" charset="-120"/>
+              </a:rPr>
+              <a:t>Yes</a:t>
+            </a:r>
+            <a:endParaRPr lang="en-US" sz="1300" dirty="0"/>
+          </a:p>
+        </p:txBody>
+      </p:sp>
+      <p:pic>
+        <p:nvPicPr>
+          <p:cNvPr id="16" name="Image 2" descr="preencoded.png">    </p:cNvPr>
+          <p:cNvPicPr>
+            <a:picLocks noChangeAspect="1"/>
+          </p:cNvPicPr>
+          <p:nvPr/>
+        </p:nvPicPr>
+        <p:blipFill>
+          <a:blip r:embed="rId3"/>
+          <a:stretch>
+            <a:fillRect/>
+          </a:stretch>
+        </p:blipFill>
+        <p:spPr>
+          <a:xfrm>
+            <a:off x="9194597" y="2459736"/>
+            <a:ext cx="292608" cy="292608"/>
+          </a:xfrm>
+          <a:prstGeom prst="rect">
+            <a:avLst/>
+          </a:prstGeom>
+        </p:spPr>
+      </p:pic>
+      <p:sp>
+        <p:nvSpPr>
+          <p:cNvPr id="17" name="Text 11"/>
+          <p:cNvSpPr/>
+          <p:nvPr/>
+        </p:nvSpPr>
+        <p:spPr>
+          <a:xfrm>
+            <a:off x="9606077" y="2331720"/>
+            <a:ext cx="1808378" cy="548640"/>
+          </a:xfrm>
+          <a:prstGeom prst="rect">
+            <a:avLst/>
+          </a:prstGeom>
+          <a:noFill/>
+          <a:ln/>
+        </p:spPr>
+        <p:txBody>
+          <a:bodyPr wrap="square" lIns="0" tIns="0" rIns="0" bIns="0" rtlCol="0" anchor="ctr"/>
+          <a:lstStyle/>
+          <a:p>
+            <a:pPr indent="0" marL="0">
+              <a:buNone/>
+            </a:pPr>
+            <a:r>
+              <a:rPr lang="en-US" sz="1300" b="1" dirty="0">
+                <a:solidFill>
+                  <a:srgbClr val="0F1B33"/>
+                </a:solidFill>
+                <a:latin typeface="Calibri" pitchFamily="34" charset="0"/>
+                <a:ea typeface="Calibri" pitchFamily="34" charset="-122"/>
+                <a:cs typeface="Calibri" pitchFamily="34" charset="-120"/>
+              </a:rPr>
+              <a:t>One search, seconds</a:t>
+            </a:r>
+            <a:endParaRPr lang="en-US" sz="1300" dirty="0"/>
+          </a:p>
+        </p:txBody>
+      </p:sp>
+      <p:sp>
+        <p:nvSpPr>
+          <p:cNvPr id="18" name="Shape 12"/>
+          <p:cNvSpPr/>
+          <p:nvPr/>
+        </p:nvSpPr>
+        <p:spPr>
+          <a:xfrm>
+            <a:off x="548640" y="2971800"/>
+            <a:ext cx="11094415" cy="0"/>
+          </a:xfrm>
+          <a:prstGeom prst="line">
+            <a:avLst/>
+          </a:prstGeom>
+          <a:noFill/>
+          <a:ln w="9525">
+            <a:solidFill>
+              <a:srgbClr val="DDE3EE"/>
+            </a:solidFill>
+            <a:prstDash val="solid"/>
+          </a:ln>
+        </p:spPr>
+      </p:sp>
+      <p:sp>
+        <p:nvSpPr>
+          <p:cNvPr id="19" name="Text 13"/>
+          <p:cNvSpPr/>
+          <p:nvPr/>
+        </p:nvSpPr>
+        <p:spPr>
+          <a:xfrm>
+            <a:off x="548640" y="3081528"/>
+            <a:ext cx="2880360" cy="512064"/>
+          </a:xfrm>
+          <a:prstGeom prst="rect">
+            <a:avLst/>
+          </a:prstGeom>
+          <a:noFill/>
+          <a:ln/>
+        </p:spPr>
+        <p:txBody>
+          <a:bodyPr wrap="square" lIns="0" tIns="0" rIns="0" bIns="0" rtlCol="0" anchor="ctr"/>
+          <a:lstStyle/>
+          <a:p>
+            <a:pPr indent="0" marL="0">
+              <a:buNone/>
+            </a:pPr>
+            <a:r>
+              <a:rPr lang="en-US" sz="1400" b="1" dirty="0">
                 <a:solidFill>
                   <a:srgbClr val="0F1B33"/>
                 </a:solidFill>
@@ -10620,22 +10735,46 @@
                 <a:ea typeface="Arial" pitchFamily="34" charset="-122"/>
                 <a:cs typeface="Arial" pitchFamily="34" charset="-120"/>
               </a:rPr>
-              <a:t>Stated plainly</a:t>
-            </a:r>
-            <a:endParaRPr lang="en-US" sz="1700" dirty="0"/>
-          </a:p>
-        </p:txBody>
-      </p:sp>
-      <p:sp>
-        <p:nvSpPr>
-          <p:cNvPr id="26" name="Text 22"/>
-          <p:cNvSpPr/>
-          <p:nvPr/>
-        </p:nvSpPr>
-        <p:spPr>
-          <a:xfrm>
-            <a:off x="1554480" y="5166360"/>
-            <a:ext cx="4937760" cy="731520"/>
+              <a:t>Watchlist alerts statewide</a:t>
+            </a:r>
+            <a:endParaRPr lang="en-US" sz="1400" dirty="0"/>
+          </a:p>
+        </p:txBody>
+      </p:sp>
+      <p:pic>
+        <p:nvPicPr>
+          <p:cNvPr id="20" name="Image 3" descr="preencoded.png">    </p:cNvPr>
+          <p:cNvPicPr>
+            <a:picLocks noChangeAspect="1"/>
+          </p:cNvPicPr>
+          <p:nvPr/>
+        </p:nvPicPr>
+        <p:blipFill>
+          <a:blip r:embed="rId4"/>
+          <a:stretch>
+            <a:fillRect/>
+          </a:stretch>
+        </p:blipFill>
+        <p:spPr>
+          <a:xfrm>
+            <a:off x="3840480" y="3191256"/>
+            <a:ext cx="292608" cy="292608"/>
+          </a:xfrm>
+          <a:prstGeom prst="rect">
+            <a:avLst/>
+          </a:prstGeom>
+        </p:spPr>
+      </p:pic>
+      <p:sp>
+        <p:nvSpPr>
+          <p:cNvPr id="21" name="Text 14"/>
+          <p:cNvSpPr/>
+          <p:nvPr/>
+        </p:nvSpPr>
+        <p:spPr>
+          <a:xfrm>
+            <a:off x="4251960" y="3063240"/>
+            <a:ext cx="1808378" cy="548640"/>
           </a:xfrm>
           <a:prstGeom prst="rect">
             <a:avLst/>
@@ -10647,59 +10786,121 @@
           <a:bodyPr wrap="square" lIns="0" tIns="0" rIns="0" bIns="0" rtlCol="0" anchor="ctr"/>
           <a:lstStyle/>
           <a:p>
-            <a:pPr marL="177800" indent="-177800">
-              <a:spcAft>
-                <a:spcPts val="600"/>
-              </a:spcAft>
-              <a:buSzPct val="100000"/>
-              <a:buChar char="•"/>
-            </a:pPr>
-            <a:r>
-              <a:rPr lang="en-US" sz="1400" dirty="0">
-                <a:solidFill>
-                  <a:srgbClr val="0F1B33"/>
+            <a:pPr indent="0" marL="0">
+              <a:buNone/>
+            </a:pPr>
+            <a:r>
+              <a:rPr lang="en-US" sz="1300" dirty="0">
+                <a:solidFill>
+                  <a:srgbClr val="536079"/>
                 </a:solidFill>
                 <a:latin typeface="Calibri" pitchFamily="34" charset="0"/>
                 <a:ea typeface="Calibri" pitchFamily="34" charset="-122"/>
                 <a:cs typeface="Calibri" pitchFamily="34" charset="-120"/>
               </a:rPr>
-              <a:t>Plate accuracy is below our own 85% target</a:t>
-            </a:r>
-            <a:endParaRPr lang="en-US" sz="1400" dirty="0"/>
-          </a:p>
-          <a:p>
-            <a:pPr marL="177800" indent="-177800">
-              <a:spcAft>
-                <a:spcPts val="600"/>
-              </a:spcAft>
-              <a:buSzPct val="100000"/>
-              <a:buChar char="•"/>
-            </a:pPr>
-            <a:r>
-              <a:rPr lang="en-US" sz="1400" dirty="0">
-                <a:solidFill>
-                  <a:srgbClr val="0F1B33"/>
+              <a:t>Each system on its own</a:t>
+            </a:r>
+            <a:endParaRPr lang="en-US" sz="1300" dirty="0"/>
+          </a:p>
+        </p:txBody>
+      </p:sp>
+      <p:pic>
+        <p:nvPicPr>
+          <p:cNvPr id="22" name="Image 4" descr="preencoded.png">    </p:cNvPr>
+          <p:cNvPicPr>
+            <a:picLocks noChangeAspect="1"/>
+          </p:cNvPicPr>
+          <p:nvPr/>
+        </p:nvPicPr>
+        <p:blipFill>
+          <a:blip r:embed="rId5"/>
+          <a:stretch>
+            <a:fillRect/>
+          </a:stretch>
+        </p:blipFill>
+        <p:spPr>
+          <a:xfrm>
+            <a:off x="6517538" y="3191256"/>
+            <a:ext cx="292608" cy="292608"/>
+          </a:xfrm>
+          <a:prstGeom prst="rect">
+            <a:avLst/>
+          </a:prstGeom>
+        </p:spPr>
+      </p:pic>
+      <p:sp>
+        <p:nvSpPr>
+          <p:cNvPr id="23" name="Text 15"/>
+          <p:cNvSpPr/>
+          <p:nvPr/>
+        </p:nvSpPr>
+        <p:spPr>
+          <a:xfrm>
+            <a:off x="6929018" y="3063240"/>
+            <a:ext cx="1808378" cy="548640"/>
+          </a:xfrm>
+          <a:prstGeom prst="rect">
+            <a:avLst/>
+          </a:prstGeom>
+          <a:noFill/>
+          <a:ln/>
+        </p:spPr>
+        <p:txBody>
+          <a:bodyPr wrap="square" lIns="0" tIns="0" rIns="0" bIns="0" rtlCol="0" anchor="ctr"/>
+          <a:lstStyle/>
+          <a:p>
+            <a:pPr indent="0" marL="0">
+              <a:buNone/>
+            </a:pPr>
+            <a:r>
+              <a:rPr lang="en-US" sz="1300" dirty="0">
+                <a:solidFill>
+                  <a:srgbClr val="536079"/>
                 </a:solidFill>
                 <a:latin typeface="Calibri" pitchFamily="34" charset="0"/>
                 <a:ea typeface="Calibri" pitchFamily="34" charset="-122"/>
                 <a:cs typeface="Calibri" pitchFamily="34" charset="-120"/>
               </a:rPr>
-              <a:t>Statewide compute is sized from vendor benchmarks</a:t>
-            </a:r>
-            <a:endParaRPr lang="en-US" sz="1400" dirty="0"/>
-          </a:p>
-        </p:txBody>
-      </p:sp>
-      <p:sp>
-        <p:nvSpPr>
-          <p:cNvPr id="27" name="Text 23"/>
-          <p:cNvSpPr/>
-          <p:nvPr/>
-        </p:nvSpPr>
-        <p:spPr>
-          <a:xfrm>
-            <a:off x="6583680" y="5166360"/>
-            <a:ext cx="5120640" cy="731520"/>
+              <a:t>Yes</a:t>
+            </a:r>
+            <a:endParaRPr lang="en-US" sz="1300" dirty="0"/>
+          </a:p>
+        </p:txBody>
+      </p:sp>
+      <p:pic>
+        <p:nvPicPr>
+          <p:cNvPr id="24" name="Image 5" descr="preencoded.png">    </p:cNvPr>
+          <p:cNvPicPr>
+            <a:picLocks noChangeAspect="1"/>
+          </p:cNvPicPr>
+          <p:nvPr/>
+        </p:nvPicPr>
+        <p:blipFill>
+          <a:blip r:embed="rId6"/>
+          <a:stretch>
+            <a:fillRect/>
+          </a:stretch>
+        </p:blipFill>
+        <p:spPr>
+          <a:xfrm>
+            <a:off x="9194597" y="3191256"/>
+            <a:ext cx="292608" cy="292608"/>
+          </a:xfrm>
+          <a:prstGeom prst="rect">
+            <a:avLst/>
+          </a:prstGeom>
+        </p:spPr>
+      </p:pic>
+      <p:sp>
+        <p:nvSpPr>
+          <p:cNvPr id="25" name="Text 16"/>
+          <p:cNvSpPr/>
+          <p:nvPr/>
+        </p:nvSpPr>
+        <p:spPr>
+          <a:xfrm>
+            <a:off x="9606077" y="3063240"/>
+            <a:ext cx="1808378" cy="548640"/>
           </a:xfrm>
           <a:prstGeom prst="rect">
             <a:avLst/>
@@ -10711,15 +10912,11 @@
           <a:bodyPr wrap="square" lIns="0" tIns="0" rIns="0" bIns="0" rtlCol="0" anchor="ctr"/>
           <a:lstStyle/>
           <a:p>
-            <a:pPr marL="177800" indent="-177800">
-              <a:spcAft>
-                <a:spcPts val="600"/>
-              </a:spcAft>
-              <a:buSzPct val="100000"/>
-              <a:buChar char="•"/>
-            </a:pPr>
-            <a:r>
-              <a:rPr lang="en-US" sz="1400" dirty="0">
+            <a:pPr indent="0" marL="0">
+              <a:buNone/>
+            </a:pPr>
+            <a:r>
+              <a:rPr lang="en-US" sz="1300" b="1" dirty="0">
                 <a:solidFill>
                   <a:srgbClr val="0F1B33"/>
                 </a:solidFill>
@@ -10727,30 +10924,801 @@
                 <a:ea typeface="Calibri" pitchFamily="34" charset="-122"/>
                 <a:cs typeface="Calibri" pitchFamily="34" charset="-120"/>
               </a:rPr>
-              <a:t>Matching vehicles with no readable plate is designed, not built</a:t>
+              <a:t>Every read, automatically</a:t>
+            </a:r>
+            <a:endParaRPr lang="en-US" sz="1300" dirty="0"/>
+          </a:p>
+        </p:txBody>
+      </p:sp>
+      <p:sp>
+        <p:nvSpPr>
+          <p:cNvPr id="26" name="Shape 17"/>
+          <p:cNvSpPr/>
+          <p:nvPr/>
+        </p:nvSpPr>
+        <p:spPr>
+          <a:xfrm>
+            <a:off x="548640" y="3703320"/>
+            <a:ext cx="11094415" cy="0"/>
+          </a:xfrm>
+          <a:prstGeom prst="line">
+            <a:avLst/>
+          </a:prstGeom>
+          <a:noFill/>
+          <a:ln w="9525">
+            <a:solidFill>
+              <a:srgbClr val="DDE3EE"/>
+            </a:solidFill>
+            <a:prstDash val="solid"/>
+          </a:ln>
+        </p:spPr>
+      </p:sp>
+      <p:sp>
+        <p:nvSpPr>
+          <p:cNvPr id="27" name="Text 18"/>
+          <p:cNvSpPr/>
+          <p:nvPr/>
+        </p:nvSpPr>
+        <p:spPr>
+          <a:xfrm>
+            <a:off x="548640" y="3813048"/>
+            <a:ext cx="2880360" cy="512064"/>
+          </a:xfrm>
+          <a:prstGeom prst="rect">
+            <a:avLst/>
+          </a:prstGeom>
+          <a:noFill/>
+          <a:ln/>
+        </p:spPr>
+        <p:txBody>
+          <a:bodyPr wrap="square" lIns="0" tIns="0" rIns="0" bIns="0" rtlCol="0" anchor="ctr"/>
+          <a:lstStyle/>
+          <a:p>
+            <a:pPr indent="0" marL="0">
+              <a:buNone/>
+            </a:pPr>
+            <a:r>
+              <a:rPr lang="en-US" sz="1400" b="1" dirty="0">
+                <a:solidFill>
+                  <a:srgbClr val="0F1B33"/>
+                </a:solidFill>
+                <a:latin typeface="Arial" pitchFamily="34" charset="0"/>
+                <a:ea typeface="Arial" pitchFamily="34" charset="-122"/>
+                <a:cs typeface="Arial" pitchFamily="34" charset="-120"/>
+              </a:rPr>
+              <a:t>Departments’ systems left untouched</a:t>
             </a:r>
             <a:endParaRPr lang="en-US" sz="1400" dirty="0"/>
           </a:p>
-          <a:p>
-            <a:pPr marL="177800" indent="-177800">
-              <a:spcAft>
-                <a:spcPts val="600"/>
-              </a:spcAft>
-              <a:buSzPct val="100000"/>
-              <a:buChar char="•"/>
-            </a:pPr>
-            <a:r>
-              <a:rPr lang="en-US" sz="1400" dirty="0">
-                <a:solidFill>
-                  <a:srgbClr val="0F1B33"/>
+        </p:txBody>
+      </p:sp>
+      <p:pic>
+        <p:nvPicPr>
+          <p:cNvPr id="28" name="Image 6" descr="preencoded.png">    </p:cNvPr>
+          <p:cNvPicPr>
+            <a:picLocks noChangeAspect="1"/>
+          </p:cNvPicPr>
+          <p:nvPr/>
+        </p:nvPicPr>
+        <p:blipFill>
+          <a:blip r:embed="rId7"/>
+          <a:stretch>
+            <a:fillRect/>
+          </a:stretch>
+        </p:blipFill>
+        <p:spPr>
+          <a:xfrm>
+            <a:off x="3840480" y="3922776"/>
+            <a:ext cx="292608" cy="292608"/>
+          </a:xfrm>
+          <a:prstGeom prst="rect">
+            <a:avLst/>
+          </a:prstGeom>
+        </p:spPr>
+      </p:pic>
+      <p:sp>
+        <p:nvSpPr>
+          <p:cNvPr id="29" name="Text 19"/>
+          <p:cNvSpPr/>
+          <p:nvPr/>
+        </p:nvSpPr>
+        <p:spPr>
+          <a:xfrm>
+            <a:off x="4251960" y="3794760"/>
+            <a:ext cx="1808378" cy="548640"/>
+          </a:xfrm>
+          <a:prstGeom prst="rect">
+            <a:avLst/>
+          </a:prstGeom>
+          <a:noFill/>
+          <a:ln/>
+        </p:spPr>
+        <p:txBody>
+          <a:bodyPr wrap="square" lIns="0" tIns="0" rIns="0" bIns="0" rtlCol="0" anchor="ctr"/>
+          <a:lstStyle/>
+          <a:p>
+            <a:pPr indent="0" marL="0">
+              <a:buNone/>
+            </a:pPr>
+            <a:r>
+              <a:rPr lang="en-US" sz="1300" dirty="0">
+                <a:solidFill>
+                  <a:srgbClr val="536079"/>
                 </a:solidFill>
                 <a:latin typeface="Calibri" pitchFamily="34" charset="0"/>
                 <a:ea typeface="Calibri" pitchFamily="34" charset="-122"/>
                 <a:cs typeface="Calibri" pitchFamily="34" charset="-120"/>
               </a:rPr>
-              <a:t>The pilot replaces every estimate with a measurement</a:t>
+              <a:t>Untouched, but isolated</a:t>
+            </a:r>
+            <a:endParaRPr lang="en-US" sz="1300" dirty="0"/>
+          </a:p>
+        </p:txBody>
+      </p:sp>
+      <p:pic>
+        <p:nvPicPr>
+          <p:cNvPr id="30" name="Image 7" descr="preencoded.png">    </p:cNvPr>
+          <p:cNvPicPr>
+            <a:picLocks noChangeAspect="1"/>
+          </p:cNvPicPr>
+          <p:nvPr/>
+        </p:nvPicPr>
+        <p:blipFill>
+          <a:blip r:embed="rId8"/>
+          <a:stretch>
+            <a:fillRect/>
+          </a:stretch>
+        </p:blipFill>
+        <p:spPr>
+          <a:xfrm>
+            <a:off x="6517538" y="3922776"/>
+            <a:ext cx="292608" cy="292608"/>
+          </a:xfrm>
+          <a:prstGeom prst="rect">
+            <a:avLst/>
+          </a:prstGeom>
+        </p:spPr>
+      </p:pic>
+      <p:sp>
+        <p:nvSpPr>
+          <p:cNvPr id="31" name="Text 20"/>
+          <p:cNvSpPr/>
+          <p:nvPr/>
+        </p:nvSpPr>
+        <p:spPr>
+          <a:xfrm>
+            <a:off x="6929018" y="3794760"/>
+            <a:ext cx="1808378" cy="548640"/>
+          </a:xfrm>
+          <a:prstGeom prst="rect">
+            <a:avLst/>
+          </a:prstGeom>
+          <a:noFill/>
+          <a:ln/>
+        </p:spPr>
+        <p:txBody>
+          <a:bodyPr wrap="square" lIns="0" tIns="0" rIns="0" bIns="0" rtlCol="0" anchor="ctr"/>
+          <a:lstStyle/>
+          <a:p>
+            <a:pPr indent="0" marL="0">
+              <a:buNone/>
+            </a:pPr>
+            <a:r>
+              <a:rPr lang="en-US" sz="1300" dirty="0">
+                <a:solidFill>
+                  <a:srgbClr val="536079"/>
+                </a:solidFill>
+                <a:latin typeface="Calibri" pitchFamily="34" charset="0"/>
+                <a:ea typeface="Calibri" pitchFamily="34" charset="-122"/>
+                <a:cs typeface="Calibri" pitchFamily="34" charset="-120"/>
+              </a:rPr>
+              <a:t>All video re-routed centrally</a:t>
+            </a:r>
+            <a:endParaRPr lang="en-US" sz="1300" dirty="0"/>
+          </a:p>
+        </p:txBody>
+      </p:sp>
+      <p:pic>
+        <p:nvPicPr>
+          <p:cNvPr id="32" name="Image 8" descr="preencoded.png">    </p:cNvPr>
+          <p:cNvPicPr>
+            <a:picLocks noChangeAspect="1"/>
+          </p:cNvPicPr>
+          <p:nvPr/>
+        </p:nvPicPr>
+        <p:blipFill>
+          <a:blip r:embed="rId9"/>
+          <a:stretch>
+            <a:fillRect/>
+          </a:stretch>
+        </p:blipFill>
+        <p:spPr>
+          <a:xfrm>
+            <a:off x="9194597" y="3922776"/>
+            <a:ext cx="292608" cy="292608"/>
+          </a:xfrm>
+          <a:prstGeom prst="rect">
+            <a:avLst/>
+          </a:prstGeom>
+        </p:spPr>
+      </p:pic>
+      <p:sp>
+        <p:nvSpPr>
+          <p:cNvPr id="33" name="Text 21"/>
+          <p:cNvSpPr/>
+          <p:nvPr/>
+        </p:nvSpPr>
+        <p:spPr>
+          <a:xfrm>
+            <a:off x="9606077" y="3794760"/>
+            <a:ext cx="1808378" cy="548640"/>
+          </a:xfrm>
+          <a:prstGeom prst="rect">
+            <a:avLst/>
+          </a:prstGeom>
+          <a:noFill/>
+          <a:ln/>
+        </p:spPr>
+        <p:txBody>
+          <a:bodyPr wrap="square" lIns="0" tIns="0" rIns="0" bIns="0" rtlCol="0" anchor="ctr"/>
+          <a:lstStyle/>
+          <a:p>
+            <a:pPr indent="0" marL="0">
+              <a:buNone/>
+            </a:pPr>
+            <a:r>
+              <a:rPr lang="en-US" sz="1300" b="1" dirty="0">
+                <a:solidFill>
+                  <a:srgbClr val="0F1B33"/>
+                </a:solidFill>
+                <a:latin typeface="Calibri" pitchFamily="34" charset="0"/>
+                <a:ea typeface="Calibri" pitchFamily="34" charset="-122"/>
+                <a:cs typeface="Calibri" pitchFamily="34" charset="-120"/>
+              </a:rPr>
+              <a:t>Read-only access</a:t>
+            </a:r>
+            <a:endParaRPr lang="en-US" sz="1300" dirty="0"/>
+          </a:p>
+        </p:txBody>
+      </p:sp>
+      <p:sp>
+        <p:nvSpPr>
+          <p:cNvPr id="34" name="Shape 22"/>
+          <p:cNvSpPr/>
+          <p:nvPr/>
+        </p:nvSpPr>
+        <p:spPr>
+          <a:xfrm>
+            <a:off x="548640" y="4434840"/>
+            <a:ext cx="11094415" cy="0"/>
+          </a:xfrm>
+          <a:prstGeom prst="line">
+            <a:avLst/>
+          </a:prstGeom>
+          <a:noFill/>
+          <a:ln w="9525">
+            <a:solidFill>
+              <a:srgbClr val="DDE3EE"/>
+            </a:solidFill>
+            <a:prstDash val="solid"/>
+          </a:ln>
+        </p:spPr>
+      </p:sp>
+      <p:sp>
+        <p:nvSpPr>
+          <p:cNvPr id="35" name="Text 23"/>
+          <p:cNvSpPr/>
+          <p:nvPr/>
+        </p:nvSpPr>
+        <p:spPr>
+          <a:xfrm>
+            <a:off x="548640" y="4544568"/>
+            <a:ext cx="2880360" cy="512064"/>
+          </a:xfrm>
+          <a:prstGeom prst="rect">
+            <a:avLst/>
+          </a:prstGeom>
+          <a:noFill/>
+          <a:ln/>
+        </p:spPr>
+        <p:txBody>
+          <a:bodyPr wrap="square" lIns="0" tIns="0" rIns="0" bIns="0" rtlCol="0" anchor="ctr"/>
+          <a:lstStyle/>
+          <a:p>
+            <a:pPr indent="0" marL="0">
+              <a:buNone/>
+            </a:pPr>
+            <a:r>
+              <a:rPr lang="en-US" sz="1400" b="1" dirty="0">
+                <a:solidFill>
+                  <a:srgbClr val="0F1B33"/>
+                </a:solidFill>
+                <a:latin typeface="Arial" pitchFamily="34" charset="0"/>
+                <a:ea typeface="Arial" pitchFamily="34" charset="-122"/>
+                <a:cs typeface="Arial" pitchFamily="34" charset="-120"/>
+              </a:rPr>
+              <a:t>Network the State must provide</a:t>
             </a:r>
             <a:endParaRPr lang="en-US" sz="1400" dirty="0"/>
+          </a:p>
+        </p:txBody>
+      </p:sp>
+      <p:pic>
+        <p:nvPicPr>
+          <p:cNvPr id="36" name="Image 9" descr="preencoded.png">    </p:cNvPr>
+          <p:cNvPicPr>
+            <a:picLocks noChangeAspect="1"/>
+          </p:cNvPicPr>
+          <p:nvPr/>
+        </p:nvPicPr>
+        <p:blipFill>
+          <a:blip r:embed="rId10"/>
+          <a:stretch>
+            <a:fillRect/>
+          </a:stretch>
+        </p:blipFill>
+        <p:spPr>
+          <a:xfrm>
+            <a:off x="3840480" y="4654296"/>
+            <a:ext cx="292608" cy="292608"/>
+          </a:xfrm>
+          <a:prstGeom prst="rect">
+            <a:avLst/>
+          </a:prstGeom>
+        </p:spPr>
+      </p:pic>
+      <p:sp>
+        <p:nvSpPr>
+          <p:cNvPr id="37" name="Text 24"/>
+          <p:cNvSpPr/>
+          <p:nvPr/>
+        </p:nvSpPr>
+        <p:spPr>
+          <a:xfrm>
+            <a:off x="4251960" y="4526280"/>
+            <a:ext cx="1808378" cy="548640"/>
+          </a:xfrm>
+          <a:prstGeom prst="rect">
+            <a:avLst/>
+          </a:prstGeom>
+          <a:noFill/>
+          <a:ln/>
+        </p:spPr>
+        <p:txBody>
+          <a:bodyPr wrap="square" lIns="0" tIns="0" rIns="0" bIns="0" rtlCol="0" anchor="ctr"/>
+          <a:lstStyle/>
+          <a:p>
+            <a:pPr indent="0" marL="0">
+              <a:buNone/>
+            </a:pPr>
+            <a:r>
+              <a:rPr lang="en-US" sz="1300" dirty="0">
+                <a:solidFill>
+                  <a:srgbClr val="536079"/>
+                </a:solidFill>
+                <a:latin typeface="Calibri" pitchFamily="34" charset="0"/>
+                <a:ea typeface="Calibri" pitchFamily="34" charset="-122"/>
+                <a:cs typeface="Calibri" pitchFamily="34" charset="-120"/>
+              </a:rPr>
+              <a:t>Little — nothing is shared</a:t>
+            </a:r>
+            <a:endParaRPr lang="en-US" sz="1300" dirty="0"/>
+          </a:p>
+        </p:txBody>
+      </p:sp>
+      <p:pic>
+        <p:nvPicPr>
+          <p:cNvPr id="38" name="Image 10" descr="preencoded.png">    </p:cNvPr>
+          <p:cNvPicPr>
+            <a:picLocks noChangeAspect="1"/>
+          </p:cNvPicPr>
+          <p:nvPr/>
+        </p:nvPicPr>
+        <p:blipFill>
+          <a:blip r:embed="rId11"/>
+          <a:stretch>
+            <a:fillRect/>
+          </a:stretch>
+        </p:blipFill>
+        <p:spPr>
+          <a:xfrm>
+            <a:off x="6517538" y="4654296"/>
+            <a:ext cx="292608" cy="292608"/>
+          </a:xfrm>
+          <a:prstGeom prst="rect">
+            <a:avLst/>
+          </a:prstGeom>
+        </p:spPr>
+      </p:pic>
+      <p:sp>
+        <p:nvSpPr>
+          <p:cNvPr id="39" name="Text 25"/>
+          <p:cNvSpPr/>
+          <p:nvPr/>
+        </p:nvSpPr>
+        <p:spPr>
+          <a:xfrm>
+            <a:off x="6929018" y="4526280"/>
+            <a:ext cx="1808378" cy="548640"/>
+          </a:xfrm>
+          <a:prstGeom prst="rect">
+            <a:avLst/>
+          </a:prstGeom>
+          <a:noFill/>
+          <a:ln/>
+        </p:spPr>
+        <p:txBody>
+          <a:bodyPr wrap="square" lIns="0" tIns="0" rIns="0" bIns="0" rtlCol="0" anchor="ctr"/>
+          <a:lstStyle/>
+          <a:p>
+            <a:pPr indent="0" marL="0">
+              <a:buNone/>
+            </a:pPr>
+            <a:r>
+              <a:rPr lang="en-US" sz="1300" dirty="0">
+                <a:solidFill>
+                  <a:srgbClr val="536079"/>
+                </a:solidFill>
+                <a:latin typeface="Calibri" pitchFamily="34" charset="0"/>
+                <a:ea typeface="Calibri" pitchFamily="34" charset="-122"/>
+                <a:cs typeface="Calibri" pitchFamily="34" charset="-120"/>
+              </a:rPr>
+              <a:t>≈160 Gbps, sustained</a:t>
+            </a:r>
+            <a:endParaRPr lang="en-US" sz="1300" dirty="0"/>
+          </a:p>
+        </p:txBody>
+      </p:sp>
+      <p:pic>
+        <p:nvPicPr>
+          <p:cNvPr id="40" name="Image 11" descr="preencoded.png">    </p:cNvPr>
+          <p:cNvPicPr>
+            <a:picLocks noChangeAspect="1"/>
+          </p:cNvPicPr>
+          <p:nvPr/>
+        </p:nvPicPr>
+        <p:blipFill>
+          <a:blip r:embed="rId12"/>
+          <a:stretch>
+            <a:fillRect/>
+          </a:stretch>
+        </p:blipFill>
+        <p:spPr>
+          <a:xfrm>
+            <a:off x="9194597" y="4654296"/>
+            <a:ext cx="292608" cy="292608"/>
+          </a:xfrm>
+          <a:prstGeom prst="rect">
+            <a:avLst/>
+          </a:prstGeom>
+        </p:spPr>
+      </p:pic>
+      <p:sp>
+        <p:nvSpPr>
+          <p:cNvPr id="41" name="Text 26"/>
+          <p:cNvSpPr/>
+          <p:nvPr/>
+        </p:nvSpPr>
+        <p:spPr>
+          <a:xfrm>
+            <a:off x="9606077" y="4526280"/>
+            <a:ext cx="1808378" cy="548640"/>
+          </a:xfrm>
+          <a:prstGeom prst="rect">
+            <a:avLst/>
+          </a:prstGeom>
+          <a:noFill/>
+          <a:ln/>
+        </p:spPr>
+        <p:txBody>
+          <a:bodyPr wrap="square" lIns="0" tIns="0" rIns="0" bIns="0" rtlCol="0" anchor="ctr"/>
+          <a:lstStyle/>
+          <a:p>
+            <a:pPr indent="0" marL="0">
+              <a:buNone/>
+            </a:pPr>
+            <a:r>
+              <a:rPr lang="en-US" sz="1300" b="1" dirty="0">
+                <a:solidFill>
+                  <a:srgbClr val="0F1B33"/>
+                </a:solidFill>
+                <a:latin typeface="Calibri" pitchFamily="34" charset="0"/>
+                <a:ea typeface="Calibri" pitchFamily="34" charset="-122"/>
+                <a:cs typeface="Calibri" pitchFamily="34" charset="-120"/>
+              </a:rPr>
+              <a:t>≈140 Mbps</a:t>
+            </a:r>
+            <a:endParaRPr lang="en-US" sz="1300" dirty="0"/>
+          </a:p>
+        </p:txBody>
+      </p:sp>
+      <p:sp>
+        <p:nvSpPr>
+          <p:cNvPr id="42" name="Shape 27"/>
+          <p:cNvSpPr/>
+          <p:nvPr/>
+        </p:nvSpPr>
+        <p:spPr>
+          <a:xfrm>
+            <a:off x="548640" y="5166360"/>
+            <a:ext cx="11094415" cy="0"/>
+          </a:xfrm>
+          <a:prstGeom prst="line">
+            <a:avLst/>
+          </a:prstGeom>
+          <a:noFill/>
+          <a:ln w="9525">
+            <a:solidFill>
+              <a:srgbClr val="DDE3EE"/>
+            </a:solidFill>
+            <a:prstDash val="solid"/>
+          </a:ln>
+        </p:spPr>
+      </p:sp>
+      <p:sp>
+        <p:nvSpPr>
+          <p:cNvPr id="43" name="Text 28"/>
+          <p:cNvSpPr/>
+          <p:nvPr/>
+        </p:nvSpPr>
+        <p:spPr>
+          <a:xfrm>
+            <a:off x="548640" y="5276088"/>
+            <a:ext cx="2880360" cy="512064"/>
+          </a:xfrm>
+          <a:prstGeom prst="rect">
+            <a:avLst/>
+          </a:prstGeom>
+          <a:noFill/>
+          <a:ln/>
+        </p:spPr>
+        <p:txBody>
+          <a:bodyPr wrap="square" lIns="0" tIns="0" rIns="0" bIns="0" rtlCol="0" anchor="ctr"/>
+          <a:lstStyle/>
+          <a:p>
+            <a:pPr indent="0" marL="0">
+              <a:buNone/>
+            </a:pPr>
+            <a:r>
+              <a:rPr lang="en-US" sz="1400" b="1" dirty="0">
+                <a:solidFill>
+                  <a:srgbClr val="0F1B33"/>
+                </a:solidFill>
+                <a:latin typeface="Arial" pitchFamily="34" charset="0"/>
+                <a:ea typeface="Arial" pitchFamily="34" charset="-122"/>
+                <a:cs typeface="Arial" pitchFamily="34" charset="-120"/>
+              </a:rPr>
+              <a:t>When a district’s link drops</a:t>
+            </a:r>
+            <a:endParaRPr lang="en-US" sz="1400" dirty="0"/>
+          </a:p>
+        </p:txBody>
+      </p:sp>
+      <p:pic>
+        <p:nvPicPr>
+          <p:cNvPr id="44" name="Image 12" descr="preencoded.png">    </p:cNvPr>
+          <p:cNvPicPr>
+            <a:picLocks noChangeAspect="1"/>
+          </p:cNvPicPr>
+          <p:nvPr/>
+        </p:nvPicPr>
+        <p:blipFill>
+          <a:blip r:embed="rId13"/>
+          <a:stretch>
+            <a:fillRect/>
+          </a:stretch>
+        </p:blipFill>
+        <p:spPr>
+          <a:xfrm>
+            <a:off x="3840480" y="5385816"/>
+            <a:ext cx="292608" cy="292608"/>
+          </a:xfrm>
+          <a:prstGeom prst="rect">
+            <a:avLst/>
+          </a:prstGeom>
+        </p:spPr>
+      </p:pic>
+      <p:sp>
+        <p:nvSpPr>
+          <p:cNvPr id="45" name="Text 29"/>
+          <p:cNvSpPr/>
+          <p:nvPr/>
+        </p:nvSpPr>
+        <p:spPr>
+          <a:xfrm>
+            <a:off x="4251960" y="5257800"/>
+            <a:ext cx="1808378" cy="548640"/>
+          </a:xfrm>
+          <a:prstGeom prst="rect">
+            <a:avLst/>
+          </a:prstGeom>
+          <a:noFill/>
+          <a:ln/>
+        </p:spPr>
+        <p:txBody>
+          <a:bodyPr wrap="square" lIns="0" tIns="0" rIns="0" bIns="0" rtlCol="0" anchor="ctr"/>
+          <a:lstStyle/>
+          <a:p>
+            <a:pPr indent="0" marL="0">
+              <a:buNone/>
+            </a:pPr>
+            <a:r>
+              <a:rPr lang="en-US" sz="1300" dirty="0">
+                <a:solidFill>
+                  <a:srgbClr val="536079"/>
+                </a:solidFill>
+                <a:latin typeface="Calibri" pitchFamily="34" charset="0"/>
+                <a:ea typeface="Calibri" pitchFamily="34" charset="-122"/>
+                <a:cs typeface="Calibri" pitchFamily="34" charset="-120"/>
+              </a:rPr>
+              <a:t>Works locally, still isolated</a:t>
+            </a:r>
+            <a:endParaRPr lang="en-US" sz="1300" dirty="0"/>
+          </a:p>
+        </p:txBody>
+      </p:sp>
+      <p:pic>
+        <p:nvPicPr>
+          <p:cNvPr id="46" name="Image 13" descr="preencoded.png">    </p:cNvPr>
+          <p:cNvPicPr>
+            <a:picLocks noChangeAspect="1"/>
+          </p:cNvPicPr>
+          <p:nvPr/>
+        </p:nvPicPr>
+        <p:blipFill>
+          <a:blip r:embed="rId14"/>
+          <a:stretch>
+            <a:fillRect/>
+          </a:stretch>
+        </p:blipFill>
+        <p:spPr>
+          <a:xfrm>
+            <a:off x="6517538" y="5385816"/>
+            <a:ext cx="292608" cy="292608"/>
+          </a:xfrm>
+          <a:prstGeom prst="rect">
+            <a:avLst/>
+          </a:prstGeom>
+        </p:spPr>
+      </p:pic>
+      <p:sp>
+        <p:nvSpPr>
+          <p:cNvPr id="47" name="Text 30"/>
+          <p:cNvSpPr/>
+          <p:nvPr/>
+        </p:nvSpPr>
+        <p:spPr>
+          <a:xfrm>
+            <a:off x="6929018" y="5257800"/>
+            <a:ext cx="1808378" cy="548640"/>
+          </a:xfrm>
+          <a:prstGeom prst="rect">
+            <a:avLst/>
+          </a:prstGeom>
+          <a:noFill/>
+          <a:ln/>
+        </p:spPr>
+        <p:txBody>
+          <a:bodyPr wrap="square" lIns="0" tIns="0" rIns="0" bIns="0" rtlCol="0" anchor="ctr"/>
+          <a:lstStyle/>
+          <a:p>
+            <a:pPr indent="0" marL="0">
+              <a:buNone/>
+            </a:pPr>
+            <a:r>
+              <a:rPr lang="en-US" sz="1300" dirty="0">
+                <a:solidFill>
+                  <a:srgbClr val="536079"/>
+                </a:solidFill>
+                <a:latin typeface="Calibri" pitchFamily="34" charset="0"/>
+                <a:ea typeface="Calibri" pitchFamily="34" charset="-122"/>
+                <a:cs typeface="Calibri" pitchFamily="34" charset="-120"/>
+              </a:rPr>
+              <a:t>Analysis stops</a:t>
+            </a:r>
+            <a:endParaRPr lang="en-US" sz="1300" dirty="0"/>
+          </a:p>
+        </p:txBody>
+      </p:sp>
+      <p:pic>
+        <p:nvPicPr>
+          <p:cNvPr id="48" name="Image 14" descr="preencoded.png">    </p:cNvPr>
+          <p:cNvPicPr>
+            <a:picLocks noChangeAspect="1"/>
+          </p:cNvPicPr>
+          <p:nvPr/>
+        </p:nvPicPr>
+        <p:blipFill>
+          <a:blip r:embed="rId15"/>
+          <a:stretch>
+            <a:fillRect/>
+          </a:stretch>
+        </p:blipFill>
+        <p:spPr>
+          <a:xfrm>
+            <a:off x="9194597" y="5385816"/>
+            <a:ext cx="292608" cy="292608"/>
+          </a:xfrm>
+          <a:prstGeom prst="rect">
+            <a:avLst/>
+          </a:prstGeom>
+        </p:spPr>
+      </p:pic>
+      <p:sp>
+        <p:nvSpPr>
+          <p:cNvPr id="49" name="Text 31"/>
+          <p:cNvSpPr/>
+          <p:nvPr/>
+        </p:nvSpPr>
+        <p:spPr>
+          <a:xfrm>
+            <a:off x="9606077" y="5257800"/>
+            <a:ext cx="1808378" cy="548640"/>
+          </a:xfrm>
+          <a:prstGeom prst="rect">
+            <a:avLst/>
+          </a:prstGeom>
+          <a:noFill/>
+          <a:ln/>
+        </p:spPr>
+        <p:txBody>
+          <a:bodyPr wrap="square" lIns="0" tIns="0" rIns="0" bIns="0" rtlCol="0" anchor="ctr"/>
+          <a:lstStyle/>
+          <a:p>
+            <a:pPr indent="0" marL="0">
+              <a:buNone/>
+            </a:pPr>
+            <a:r>
+              <a:rPr lang="en-US" sz="1300" b="1" dirty="0">
+                <a:solidFill>
+                  <a:srgbClr val="0F1B33"/>
+                </a:solidFill>
+                <a:latin typeface="Calibri" pitchFamily="34" charset="0"/>
+                <a:ea typeface="Calibri" pitchFamily="34" charset="-122"/>
+                <a:cs typeface="Calibri" pitchFamily="34" charset="-120"/>
+              </a:rPr>
+              <a:t>Keeps reading and alerting</a:t>
+            </a:r>
+            <a:endParaRPr lang="en-US" sz="1300" dirty="0"/>
+          </a:p>
+        </p:txBody>
+      </p:sp>
+      <p:sp>
+        <p:nvSpPr>
+          <p:cNvPr id="50" name="Text 32"/>
+          <p:cNvSpPr/>
+          <p:nvPr/>
+        </p:nvSpPr>
+        <p:spPr>
+          <a:xfrm>
+            <a:off x="548640" y="6172200"/>
+            <a:ext cx="11094415" cy="274320"/>
+          </a:xfrm>
+          <a:prstGeom prst="rect">
+            <a:avLst/>
+          </a:prstGeom>
+          <a:noFill/>
+          <a:ln/>
+        </p:spPr>
+        <p:txBody>
+          <a:bodyPr wrap="square" lIns="0" tIns="0" rIns="0" bIns="0" rtlCol="0" anchor="t"/>
+          <a:lstStyle/>
+          <a:p>
+            <a:pPr indent="0" marL="0">
+              <a:buNone/>
+            </a:pPr>
+            <a:r>
+              <a:rPr lang="en-US" sz="1100" i="1" dirty="0">
+                <a:solidFill>
+                  <a:srgbClr val="536079"/>
+                </a:solidFill>
+                <a:latin typeface="Calibri" pitchFamily="34" charset="0"/>
+                <a:ea typeface="Calibri" pitchFamily="34" charset="-122"/>
+                <a:cs typeface="Calibri" pitchFamily="34" charset="-120"/>
+              </a:rPr>
+              <a:t>Approaches compared, not named products. Network figures are for ~80,000 cameras, from our scale plan.</a:t>
+            </a:r>
+            <a:endParaRPr lang="en-US" sz="1100" dirty="0"/>
           </a:p>
         </p:txBody>
       </p:sp>
@@ -10819,7 +11787,7 @@
                 <a:ea typeface="Arial" pitchFamily="34" charset="-122"/>
                 <a:cs typeface="Arial" pitchFamily="34" charset="-120"/>
               </a:rPr>
-              <a:t>PATH TO STATEWIDE</a:t>
+              <a:t>PROVEN, NOT PROMISED</a:t>
             </a:r>
             <a:endParaRPr lang="en-US" sz="1100" dirty="0"/>
           </a:p>
@@ -10858,7 +11826,7 @@
                 <a:ea typeface="Arial" pitchFamily="34" charset="-122"/>
                 <a:cs typeface="Arial" pitchFamily="34" charset="-120"/>
               </a:rPr>
-              <a:t>Useful from the first district. No big-bang switch-over.</a:t>
+              <a:t>Measured on real government footage</a:t>
             </a:r>
             <a:endParaRPr lang="en-US" sz="3200" dirty="0"/>
           </a:p>
@@ -10911,346 +11879,12 @@
         </p:nvSpPr>
         <p:spPr>
           <a:xfrm>
-            <a:off x="832104" y="1938528"/>
-            <a:ext cx="10527487" cy="0"/>
-          </a:xfrm>
-          <a:prstGeom prst="line">
-            <a:avLst/>
-          </a:prstGeom>
-          <a:noFill/>
-          <a:ln w="25400">
-            <a:solidFill>
-              <a:srgbClr val="DDE3EE"/>
-            </a:solidFill>
-            <a:prstDash val="solid"/>
-          </a:ln>
-        </p:spPr>
-      </p:sp>
-      <p:sp>
-        <p:nvSpPr>
-          <p:cNvPr id="7" name="Shape 4"/>
-          <p:cNvSpPr/>
-          <p:nvPr/>
-        </p:nvSpPr>
-        <p:spPr>
-          <a:xfrm>
-            <a:off x="685800" y="1792224"/>
-            <a:ext cx="292608" cy="292608"/>
-          </a:xfrm>
-          <a:prstGeom prst="ellipse">
-            <a:avLst/>
-          </a:prstGeom>
-          <a:solidFill>
-            <a:srgbClr val="D97706"/>
-          </a:solidFill>
-          <a:ln w="38100">
-            <a:solidFill>
-              <a:srgbClr val="FFFFFF"/>
-            </a:solidFill>
-            <a:prstDash val="solid"/>
-          </a:ln>
-        </p:spPr>
-      </p:sp>
-      <p:sp>
-        <p:nvSpPr>
-          <p:cNvPr id="8" name="Text 5"/>
-          <p:cNvSpPr/>
-          <p:nvPr/>
-        </p:nvSpPr>
-        <p:spPr>
-          <a:xfrm>
-            <a:off x="548640" y="2240280"/>
-            <a:ext cx="2567864" cy="274320"/>
-          </a:xfrm>
-          <a:prstGeom prst="rect">
-            <a:avLst/>
-          </a:prstGeom>
-          <a:noFill/>
-          <a:ln/>
-        </p:spPr>
-        <p:txBody>
-          <a:bodyPr wrap="square" lIns="0" tIns="0" rIns="0" bIns="0" rtlCol="0" anchor="t"/>
-          <a:lstStyle/>
-          <a:p>
-            <a:pPr indent="0" marL="0">
-              <a:buNone/>
-            </a:pPr>
-            <a:r>
-              <a:rPr lang="en-US" sz="1200" b="1" dirty="0">
-                <a:solidFill>
-                  <a:srgbClr val="B45309"/>
-                </a:solidFill>
-                <a:latin typeface="Arial" pitchFamily="34" charset="0"/>
-                <a:ea typeface="Arial" pitchFamily="34" charset="-122"/>
-                <a:cs typeface="Arial" pitchFamily="34" charset="-120"/>
-              </a:rPr>
-              <a:t>Pilot  ·  0–3 months</a:t>
-            </a:r>
-            <a:endParaRPr lang="en-US" sz="1200" dirty="0"/>
-          </a:p>
-        </p:txBody>
-      </p:sp>
-      <p:sp>
-        <p:nvSpPr>
-          <p:cNvPr id="9" name="Shape 6"/>
-          <p:cNvSpPr/>
-          <p:nvPr/>
-        </p:nvSpPr>
-        <p:spPr>
-          <a:xfrm>
-            <a:off x="548640" y="2651760"/>
-            <a:ext cx="2567864" cy="3246120"/>
+            <a:off x="548640" y="1691640"/>
+            <a:ext cx="2567864" cy="2514600"/>
           </a:xfrm>
           <a:prstGeom prst="roundRect">
             <a:avLst>
-              <a:gd name="adj" fmla="val 4273"/>
-            </a:avLst>
-          </a:prstGeom>
-          <a:solidFill>
-            <a:srgbClr val="EAF0FD"/>
-          </a:solidFill>
-          <a:ln w="9525">
-            <a:solidFill>
-              <a:srgbClr val="C9D7F7"/>
-            </a:solidFill>
-            <a:prstDash val="solid"/>
-          </a:ln>
-        </p:spPr>
-      </p:sp>
-      <p:sp>
-        <p:nvSpPr>
-          <p:cNvPr id="10" name="Text 7"/>
-          <p:cNvSpPr/>
-          <p:nvPr/>
-        </p:nvSpPr>
-        <p:spPr>
-          <a:xfrm>
-            <a:off x="822960" y="2834640"/>
-            <a:ext cx="2019224" cy="685800"/>
-          </a:xfrm>
-          <a:prstGeom prst="rect">
-            <a:avLst/>
-          </a:prstGeom>
-          <a:noFill/>
-          <a:ln/>
-        </p:spPr>
-        <p:txBody>
-          <a:bodyPr wrap="square" lIns="0" tIns="0" rIns="0" bIns="0" rtlCol="0" anchor="t"/>
-          <a:lstStyle/>
-          <a:p>
-            <a:pPr indent="0" marL="0">
-              <a:buNone/>
-            </a:pPr>
-            <a:r>
-              <a:rPr lang="en-US" sz="3600" b="1" dirty="0">
-                <a:solidFill>
-                  <a:srgbClr val="0F1B33"/>
-                </a:solidFill>
-                <a:latin typeface="Arial" pitchFamily="34" charset="0"/>
-                <a:ea typeface="Arial" pitchFamily="34" charset="-122"/>
-                <a:cs typeface="Arial" pitchFamily="34" charset="-120"/>
-              </a:rPr>
-              <a:t>~500</a:t>
-            </a:r>
-            <a:endParaRPr lang="en-US" sz="3600" dirty="0"/>
-          </a:p>
-        </p:txBody>
-      </p:sp>
-      <p:sp>
-        <p:nvSpPr>
-          <p:cNvPr id="11" name="Text 8"/>
-          <p:cNvSpPr/>
-          <p:nvPr/>
-        </p:nvSpPr>
-        <p:spPr>
-          <a:xfrm>
-            <a:off x="822960" y="3493008"/>
-            <a:ext cx="2019224" cy="274320"/>
-          </a:xfrm>
-          <a:prstGeom prst="rect">
-            <a:avLst/>
-          </a:prstGeom>
-          <a:noFill/>
-          <a:ln/>
-        </p:spPr>
-        <p:txBody>
-          <a:bodyPr wrap="square" lIns="0" tIns="0" rIns="0" bIns="0" rtlCol="0" anchor="t"/>
-          <a:lstStyle/>
-          <a:p>
-            <a:pPr indent="0" marL="0">
-              <a:buNone/>
-            </a:pPr>
-            <a:r>
-              <a:rPr lang="en-US" sz="1300" dirty="0">
-                <a:solidFill>
-                  <a:srgbClr val="536079"/>
-                </a:solidFill>
-                <a:latin typeface="Calibri" pitchFamily="34" charset="0"/>
-                <a:ea typeface="Calibri" pitchFamily="34" charset="-122"/>
-                <a:cs typeface="Calibri" pitchFamily="34" charset="-120"/>
-              </a:rPr>
-              <a:t>cameras</a:t>
-            </a:r>
-            <a:endParaRPr lang="en-US" sz="1300" dirty="0"/>
-          </a:p>
-        </p:txBody>
-      </p:sp>
-      <p:sp>
-        <p:nvSpPr>
-          <p:cNvPr id="12" name="Text 9"/>
-          <p:cNvSpPr/>
-          <p:nvPr/>
-        </p:nvSpPr>
-        <p:spPr>
-          <a:xfrm>
-            <a:off x="822960" y="3931920"/>
-            <a:ext cx="2019224" cy="548640"/>
-          </a:xfrm>
-          <a:prstGeom prst="rect">
-            <a:avLst/>
-          </a:prstGeom>
-          <a:noFill/>
-          <a:ln/>
-        </p:spPr>
-        <p:txBody>
-          <a:bodyPr wrap="square" lIns="0" tIns="0" rIns="0" bIns="0" rtlCol="0" anchor="t"/>
-          <a:lstStyle/>
-          <a:p>
-            <a:pPr indent="0" marL="0">
-              <a:buNone/>
-            </a:pPr>
-            <a:r>
-              <a:rPr lang="en-US" sz="1400" b="1" dirty="0">
-                <a:solidFill>
-                  <a:srgbClr val="0F1B33"/>
-                </a:solidFill>
-                <a:latin typeface="Arial" pitchFamily="34" charset="0"/>
-                <a:ea typeface="Arial" pitchFamily="34" charset="-122"/>
-                <a:cs typeface="Arial" pitchFamily="34" charset="-120"/>
-              </a:rPr>
-              <a:t>1 district, 2 departments</a:t>
-            </a:r>
-            <a:endParaRPr lang="en-US" sz="1400" dirty="0"/>
-          </a:p>
-        </p:txBody>
-      </p:sp>
-      <p:sp>
-        <p:nvSpPr>
-          <p:cNvPr id="13" name="Text 10"/>
-          <p:cNvSpPr/>
-          <p:nvPr/>
-        </p:nvSpPr>
-        <p:spPr>
-          <a:xfrm>
-            <a:off x="822960" y="4526280"/>
-            <a:ext cx="2019224" cy="1188720"/>
-          </a:xfrm>
-          <a:prstGeom prst="rect">
-            <a:avLst/>
-          </a:prstGeom>
-          <a:noFill/>
-          <a:ln/>
-        </p:spPr>
-        <p:txBody>
-          <a:bodyPr wrap="square" lIns="0" tIns="0" rIns="0" bIns="0" rtlCol="0" anchor="t"/>
-          <a:lstStyle/>
-          <a:p>
-            <a:pPr indent="0" marL="0">
-              <a:buNone/>
-            </a:pPr>
-            <a:r>
-              <a:rPr lang="en-US" sz="1300" dirty="0">
-                <a:solidFill>
-                  <a:srgbClr val="536079"/>
-                </a:solidFill>
-                <a:latin typeface="Calibri" pitchFamily="34" charset="0"/>
-                <a:ea typeface="Calibri" pitchFamily="34" charset="-122"/>
-                <a:cs typeface="Calibri" pitchFamily="34" charset="-120"/>
-              </a:rPr>
-              <a:t>Plate reading validated on live feeds; operators sign off</a:t>
-            </a:r>
-            <a:endParaRPr lang="en-US" sz="1300" dirty="0"/>
-          </a:p>
-        </p:txBody>
-      </p:sp>
-      <p:sp>
-        <p:nvSpPr>
-          <p:cNvPr id="14" name="Shape 11"/>
-          <p:cNvSpPr/>
-          <p:nvPr/>
-        </p:nvSpPr>
-        <p:spPr>
-          <a:xfrm>
-            <a:off x="3527984" y="1792224"/>
-            <a:ext cx="292608" cy="292608"/>
-          </a:xfrm>
-          <a:prstGeom prst="ellipse">
-            <a:avLst/>
-          </a:prstGeom>
-          <a:solidFill>
-            <a:srgbClr val="2456D6"/>
-          </a:solidFill>
-          <a:ln w="38100">
-            <a:solidFill>
-              <a:srgbClr val="FFFFFF"/>
-            </a:solidFill>
-            <a:prstDash val="solid"/>
-          </a:ln>
-        </p:spPr>
-      </p:sp>
-      <p:sp>
-        <p:nvSpPr>
-          <p:cNvPr id="15" name="Text 12"/>
-          <p:cNvSpPr/>
-          <p:nvPr/>
-        </p:nvSpPr>
-        <p:spPr>
-          <a:xfrm>
-            <a:off x="3390824" y="2240280"/>
-            <a:ext cx="2567864" cy="274320"/>
-          </a:xfrm>
-          <a:prstGeom prst="rect">
-            <a:avLst/>
-          </a:prstGeom>
-          <a:noFill/>
-          <a:ln/>
-        </p:spPr>
-        <p:txBody>
-          <a:bodyPr wrap="square" lIns="0" tIns="0" rIns="0" bIns="0" rtlCol="0" anchor="t"/>
-          <a:lstStyle/>
-          <a:p>
-            <a:pPr indent="0" marL="0">
-              <a:buNone/>
-            </a:pPr>
-            <a:r>
-              <a:rPr lang="en-US" sz="1200" b="1" dirty="0">
-                <a:solidFill>
-                  <a:srgbClr val="2456D6"/>
-                </a:solidFill>
-                <a:latin typeface="Arial" pitchFamily="34" charset="0"/>
-                <a:ea typeface="Arial" pitchFamily="34" charset="-122"/>
-                <a:cs typeface="Arial" pitchFamily="34" charset="-120"/>
-              </a:rPr>
-              <a:t>Expand  ·  3–9 months</a:t>
-            </a:r>
-            <a:endParaRPr lang="en-US" sz="1200" dirty="0"/>
-          </a:p>
-        </p:txBody>
-      </p:sp>
-      <p:sp>
-        <p:nvSpPr>
-          <p:cNvPr id="16" name="Shape 13"/>
-          <p:cNvSpPr/>
-          <p:nvPr/>
-        </p:nvSpPr>
-        <p:spPr>
-          <a:xfrm>
-            <a:off x="3390824" y="2651760"/>
-            <a:ext cx="2567864" cy="3246120"/>
-          </a:xfrm>
-          <a:prstGeom prst="roundRect">
-            <a:avLst>
-              <a:gd name="adj" fmla="val 4273"/>
+              <a:gd name="adj" fmla="val 4364"/>
             </a:avLst>
           </a:prstGeom>
           <a:solidFill>
@@ -11273,14 +11907,14 @@
       </p:sp>
       <p:sp>
         <p:nvSpPr>
-          <p:cNvPr id="17" name="Text 14"/>
-          <p:cNvSpPr/>
-          <p:nvPr/>
-        </p:nvSpPr>
-        <p:spPr>
-          <a:xfrm>
-            <a:off x="3665144" y="2834640"/>
-            <a:ext cx="2019224" cy="685800"/>
+          <p:cNvPr id="7" name="Text 4"/>
+          <p:cNvSpPr/>
+          <p:nvPr/>
+        </p:nvSpPr>
+        <p:spPr>
+          <a:xfrm>
+            <a:off x="822960" y="1874520"/>
+            <a:ext cx="2019224" cy="822960"/>
           </a:xfrm>
           <a:prstGeom prst="rect">
             <a:avLst/>
@@ -11296,30 +11930,30 @@
               <a:buNone/>
             </a:pPr>
             <a:r>
-              <a:rPr lang="en-US" sz="3600" b="1" dirty="0">
-                <a:solidFill>
-                  <a:srgbClr val="0F1B33"/>
+              <a:rPr lang="en-US" sz="4400" b="1" dirty="0">
+                <a:solidFill>
+                  <a:srgbClr val="0F766E"/>
                 </a:solidFill>
                 <a:latin typeface="Arial" pitchFamily="34" charset="0"/>
                 <a:ea typeface="Arial" pitchFamily="34" charset="-122"/>
                 <a:cs typeface="Arial" pitchFamily="34" charset="-120"/>
               </a:rPr>
-              <a:t>~5,000</a:t>
-            </a:r>
-            <a:endParaRPr lang="en-US" sz="3600" dirty="0"/>
-          </a:p>
-        </p:txBody>
-      </p:sp>
-      <p:sp>
-        <p:nvSpPr>
-          <p:cNvPr id="18" name="Text 15"/>
-          <p:cNvSpPr/>
-          <p:nvPr/>
-        </p:nvSpPr>
-        <p:spPr>
-          <a:xfrm>
-            <a:off x="3665144" y="3493008"/>
-            <a:ext cx="2019224" cy="274320"/>
+              <a:t>78%</a:t>
+            </a:r>
+            <a:endParaRPr lang="en-US" sz="4400" dirty="0"/>
+          </a:p>
+        </p:txBody>
+      </p:sp>
+      <p:sp>
+        <p:nvSpPr>
+          <p:cNvPr id="8" name="Text 5"/>
+          <p:cNvSpPr/>
+          <p:nvPr/>
+        </p:nvSpPr>
+        <p:spPr>
+          <a:xfrm>
+            <a:off x="822960" y="2743200"/>
+            <a:ext cx="2019224" cy="548640"/>
           </a:xfrm>
           <a:prstGeom prst="rect">
             <a:avLst/>
@@ -11335,7 +11969,46 @@
               <a:buNone/>
             </a:pPr>
             <a:r>
-              <a:rPr lang="en-US" sz="1300" dirty="0">
+              <a:rPr lang="en-US" sz="1400" b="1" dirty="0">
+                <a:solidFill>
+                  <a:srgbClr val="0F1B33"/>
+                </a:solidFill>
+                <a:latin typeface="Arial" pitchFamily="34" charset="0"/>
+                <a:ea typeface="Arial" pitchFamily="34" charset="-122"/>
+                <a:cs typeface="Arial" pitchFamily="34" charset="-120"/>
+              </a:rPr>
+              <a:t>plates read exactly</a:t>
+            </a:r>
+            <a:endParaRPr lang="en-US" sz="1400" dirty="0"/>
+          </a:p>
+        </p:txBody>
+      </p:sp>
+      <p:sp>
+        <p:nvSpPr>
+          <p:cNvPr id="9" name="Text 6"/>
+          <p:cNvSpPr/>
+          <p:nvPr/>
+        </p:nvSpPr>
+        <p:spPr>
+          <a:xfrm>
+            <a:off x="822960" y="3310128"/>
+            <a:ext cx="2019224" cy="777240"/>
+          </a:xfrm>
+          <a:prstGeom prst="rect">
+            <a:avLst/>
+          </a:prstGeom>
+          <a:noFill/>
+          <a:ln/>
+        </p:spPr>
+        <p:txBody>
+          <a:bodyPr wrap="square" lIns="0" tIns="0" rIns="0" bIns="0" rtlCol="0" anchor="t"/>
+          <a:lstStyle/>
+          <a:p>
+            <a:pPr indent="0" marL="0">
+              <a:buNone/>
+            </a:pPr>
+            <a:r>
+              <a:rPr lang="en-US" sz="1200" dirty="0">
                 <a:solidFill>
                   <a:srgbClr val="536079"/>
                 </a:solidFill>
@@ -11343,149 +12016,7 @@
                 <a:ea typeface="Calibri" pitchFamily="34" charset="-122"/>
                 <a:cs typeface="Calibri" pitchFamily="34" charset="-120"/>
               </a:rPr>
-              <a:t>cameras</a:t>
-            </a:r>
-            <a:endParaRPr lang="en-US" sz="1300" dirty="0"/>
-          </a:p>
-        </p:txBody>
-      </p:sp>
-      <p:sp>
-        <p:nvSpPr>
-          <p:cNvPr id="19" name="Text 16"/>
-          <p:cNvSpPr/>
-          <p:nvPr/>
-        </p:nvSpPr>
-        <p:spPr>
-          <a:xfrm>
-            <a:off x="3665144" y="3931920"/>
-            <a:ext cx="2019224" cy="548640"/>
-          </a:xfrm>
-          <a:prstGeom prst="rect">
-            <a:avLst/>
-          </a:prstGeom>
-          <a:noFill/>
-          <a:ln/>
-        </p:spPr>
-        <p:txBody>
-          <a:bodyPr wrap="square" lIns="0" tIns="0" rIns="0" bIns="0" rtlCol="0" anchor="t"/>
-          <a:lstStyle/>
-          <a:p>
-            <a:pPr indent="0" marL="0">
-              <a:buNone/>
-            </a:pPr>
-            <a:r>
-              <a:rPr lang="en-US" sz="1400" b="1" dirty="0">
-                <a:solidFill>
-                  <a:srgbClr val="0F1B33"/>
-                </a:solidFill>
-                <a:latin typeface="Arial" pitchFamily="34" charset="0"/>
-                <a:ea typeface="Arial" pitchFamily="34" charset="-122"/>
-                <a:cs typeface="Arial" pitchFamily="34" charset="-120"/>
-              </a:rPr>
-              <a:t>4 districts, 6 departments</a:t>
-            </a:r>
-            <a:endParaRPr lang="en-US" sz="1400" dirty="0"/>
-          </a:p>
-        </p:txBody>
-      </p:sp>
-      <p:sp>
-        <p:nvSpPr>
-          <p:cNvPr id="20" name="Text 17"/>
-          <p:cNvSpPr/>
-          <p:nvPr/>
-        </p:nvSpPr>
-        <p:spPr>
-          <a:xfrm>
-            <a:off x="3665144" y="4526280"/>
-            <a:ext cx="2019224" cy="1188720"/>
-          </a:xfrm>
-          <a:prstGeom prst="rect">
-            <a:avLst/>
-          </a:prstGeom>
-          <a:noFill/>
-          <a:ln/>
-        </p:spPr>
-        <p:txBody>
-          <a:bodyPr wrap="square" lIns="0" tIns="0" rIns="0" bIns="0" rtlCol="0" anchor="t"/>
-          <a:lstStyle/>
-          <a:p>
-            <a:pPr indent="0" marL="0">
-              <a:buNone/>
-            </a:pPr>
-            <a:r>
-              <a:rPr lang="en-US" sz="1300" dirty="0">
-                <a:solidFill>
-                  <a:srgbClr val="536079"/>
-                </a:solidFill>
-                <a:latin typeface="Calibri" pitchFamily="34" charset="0"/>
-                <a:ea typeface="Calibri" pitchFamily="34" charset="-122"/>
-                <a:cs typeface="Calibri" pitchFamily="34" charset="-120"/>
-              </a:rPr>
-              <a:t>Main VMS vendors connected; VAHAN and eGujCop live</a:t>
-            </a:r>
-            <a:endParaRPr lang="en-US" sz="1300" dirty="0"/>
-          </a:p>
-        </p:txBody>
-      </p:sp>
-      <p:sp>
-        <p:nvSpPr>
-          <p:cNvPr id="21" name="Shape 18"/>
-          <p:cNvSpPr/>
-          <p:nvPr/>
-        </p:nvSpPr>
-        <p:spPr>
-          <a:xfrm>
-            <a:off x="6370168" y="1792224"/>
-            <a:ext cx="292608" cy="292608"/>
-          </a:xfrm>
-          <a:prstGeom prst="ellipse">
-            <a:avLst/>
-          </a:prstGeom>
-          <a:solidFill>
-            <a:srgbClr val="2456D6"/>
-          </a:solidFill>
-          <a:ln w="38100">
-            <a:solidFill>
-              <a:srgbClr val="FFFFFF"/>
-            </a:solidFill>
-            <a:prstDash val="solid"/>
-          </a:ln>
-        </p:spPr>
-      </p:sp>
-      <p:sp>
-        <p:nvSpPr>
-          <p:cNvPr id="22" name="Text 19"/>
-          <p:cNvSpPr/>
-          <p:nvPr/>
-        </p:nvSpPr>
-        <p:spPr>
-          <a:xfrm>
-            <a:off x="6233008" y="2240280"/>
-            <a:ext cx="2567864" cy="274320"/>
-          </a:xfrm>
-          <a:prstGeom prst="rect">
-            <a:avLst/>
-          </a:prstGeom>
-          <a:noFill/>
-          <a:ln/>
-        </p:spPr>
-        <p:txBody>
-          <a:bodyPr wrap="square" lIns="0" tIns="0" rIns="0" bIns="0" rtlCol="0" anchor="t"/>
-          <a:lstStyle/>
-          <a:p>
-            <a:pPr indent="0" marL="0">
-              <a:buNone/>
-            </a:pPr>
-            <a:r>
-              <a:rPr lang="en-US" sz="1200" b="1" dirty="0">
-                <a:solidFill>
-                  <a:srgbClr val="2456D6"/>
-                </a:solidFill>
-                <a:latin typeface="Arial" pitchFamily="34" charset="0"/>
-                <a:ea typeface="Arial" pitchFamily="34" charset="-122"/>
-                <a:cs typeface="Arial" pitchFamily="34" charset="-120"/>
-              </a:rPr>
-              <a:t>Statewide  ·  9–21 months</a:t>
+              <a:t>On 81 hand-checked real government plates; 88% of characters correct</a:t>
             </a:r>
             <a:endParaRPr lang="en-US" sz="1200" dirty="0"/>
           </a:p>
@@ -11493,18 +12024,18 @@
       </p:sp>
       <p:sp>
         <p:nvSpPr>
-          <p:cNvPr id="23" name="Shape 20"/>
-          <p:cNvSpPr/>
-          <p:nvPr/>
-        </p:nvSpPr>
-        <p:spPr>
-          <a:xfrm>
-            <a:off x="6233008" y="2651760"/>
-            <a:ext cx="2567864" cy="3246120"/>
+          <p:cNvPr id="10" name="Shape 7"/>
+          <p:cNvSpPr/>
+          <p:nvPr/>
+        </p:nvSpPr>
+        <p:spPr>
+          <a:xfrm>
+            <a:off x="3390824" y="1691640"/>
+            <a:ext cx="2567864" cy="2514600"/>
           </a:xfrm>
           <a:prstGeom prst="roundRect">
             <a:avLst>
-              <a:gd name="adj" fmla="val 4273"/>
+              <a:gd name="adj" fmla="val 4364"/>
             </a:avLst>
           </a:prstGeom>
           <a:solidFill>
@@ -11527,14 +12058,14 @@
       </p:sp>
       <p:sp>
         <p:nvSpPr>
-          <p:cNvPr id="24" name="Text 21"/>
-          <p:cNvSpPr/>
-          <p:nvPr/>
-        </p:nvSpPr>
-        <p:spPr>
-          <a:xfrm>
-            <a:off x="6507328" y="2834640"/>
-            <a:ext cx="2019224" cy="685800"/>
+          <p:cNvPr id="11" name="Text 8"/>
+          <p:cNvSpPr/>
+          <p:nvPr/>
+        </p:nvSpPr>
+        <p:spPr>
+          <a:xfrm>
+            <a:off x="3665144" y="1874520"/>
+            <a:ext cx="2019224" cy="822960"/>
           </a:xfrm>
           <a:prstGeom prst="rect">
             <a:avLst/>
@@ -11550,30 +12081,30 @@
               <a:buNone/>
             </a:pPr>
             <a:r>
-              <a:rPr lang="en-US" sz="3600" b="1" dirty="0">
-                <a:solidFill>
-                  <a:srgbClr val="0F1B33"/>
+              <a:rPr lang="en-US" sz="4400" b="1" dirty="0">
+                <a:solidFill>
+                  <a:srgbClr val="0F766E"/>
                 </a:solidFill>
                 <a:latin typeface="Arial" pitchFamily="34" charset="0"/>
                 <a:ea typeface="Arial" pitchFamily="34" charset="-122"/>
                 <a:cs typeface="Arial" pitchFamily="34" charset="-120"/>
               </a:rPr>
-              <a:t>~30,000</a:t>
-            </a:r>
-            <a:endParaRPr lang="en-US" sz="3600" dirty="0"/>
-          </a:p>
-        </p:txBody>
-      </p:sp>
-      <p:sp>
-        <p:nvSpPr>
-          <p:cNvPr id="25" name="Text 22"/>
-          <p:cNvSpPr/>
-          <p:nvPr/>
-        </p:nvSpPr>
-        <p:spPr>
-          <a:xfrm>
-            <a:off x="6507328" y="3493008"/>
-            <a:ext cx="2019224" cy="274320"/>
+              <a:t>16</a:t>
+            </a:r>
+            <a:endParaRPr lang="en-US" sz="4400" dirty="0"/>
+          </a:p>
+        </p:txBody>
+      </p:sp>
+      <p:sp>
+        <p:nvSpPr>
+          <p:cNvPr id="12" name="Text 9"/>
+          <p:cNvSpPr/>
+          <p:nvPr/>
+        </p:nvSpPr>
+        <p:spPr>
+          <a:xfrm>
+            <a:off x="3665144" y="2743200"/>
+            <a:ext cx="2019224" cy="548640"/>
           </a:xfrm>
           <a:prstGeom prst="rect">
             <a:avLst/>
@@ -11589,7 +12120,46 @@
               <a:buNone/>
             </a:pPr>
             <a:r>
-              <a:rPr lang="en-US" sz="1300" dirty="0">
+              <a:rPr lang="en-US" sz="1400" b="1" dirty="0">
+                <a:solidFill>
+                  <a:srgbClr val="0F1B33"/>
+                </a:solidFill>
+                <a:latin typeface="Arial" pitchFamily="34" charset="0"/>
+                <a:ea typeface="Arial" pitchFamily="34" charset="-122"/>
+                <a:cs typeface="Arial" pitchFamily="34" charset="-120"/>
+              </a:rPr>
+              <a:t>frames a second, on one laptop</a:t>
+            </a:r>
+            <a:endParaRPr lang="en-US" sz="1400" dirty="0"/>
+          </a:p>
+        </p:txBody>
+      </p:sp>
+      <p:sp>
+        <p:nvSpPr>
+          <p:cNvPr id="13" name="Text 10"/>
+          <p:cNvSpPr/>
+          <p:nvPr/>
+        </p:nvSpPr>
+        <p:spPr>
+          <a:xfrm>
+            <a:off x="3665144" y="3310128"/>
+            <a:ext cx="2019224" cy="777240"/>
+          </a:xfrm>
+          <a:prstGeom prst="rect">
+            <a:avLst/>
+          </a:prstGeom>
+          <a:noFill/>
+          <a:ln/>
+        </p:spPr>
+        <p:txBody>
+          <a:bodyPr wrap="square" lIns="0" tIns="0" rIns="0" bIns="0" rtlCol="0" anchor="t"/>
+          <a:lstStyle/>
+          <a:p>
+            <a:pPr indent="0" marL="0">
+              <a:buNone/>
+            </a:pPr>
+            <a:r>
+              <a:rPr lang="en-US" sz="1200" dirty="0">
                 <a:solidFill>
                   <a:srgbClr val="536079"/>
                 </a:solidFill>
@@ -11597,149 +12167,7 @@
                 <a:ea typeface="Calibri" pitchFamily="34" charset="-122"/>
                 <a:cs typeface="Calibri" pitchFamily="34" charset="-120"/>
               </a:rPr>
-              <a:t>cameras</a:t>
-            </a:r>
-            <a:endParaRPr lang="en-US" sz="1300" dirty="0"/>
-          </a:p>
-        </p:txBody>
-      </p:sp>
-      <p:sp>
-        <p:nvSpPr>
-          <p:cNvPr id="26" name="Text 23"/>
-          <p:cNvSpPr/>
-          <p:nvPr/>
-        </p:nvSpPr>
-        <p:spPr>
-          <a:xfrm>
-            <a:off x="6507328" y="3931920"/>
-            <a:ext cx="2019224" cy="548640"/>
-          </a:xfrm>
-          <a:prstGeom prst="rect">
-            <a:avLst/>
-          </a:prstGeom>
-          <a:noFill/>
-          <a:ln/>
-        </p:spPr>
-        <p:txBody>
-          <a:bodyPr wrap="square" lIns="0" tIns="0" rIns="0" bIns="0" rtlCol="0" anchor="t"/>
-          <a:lstStyle/>
-          <a:p>
-            <a:pPr indent="0" marL="0">
-              <a:buNone/>
-            </a:pPr>
-            <a:r>
-              <a:rPr lang="en-US" sz="1400" b="1" dirty="0">
-                <a:solidFill>
-                  <a:srgbClr val="0F1B33"/>
-                </a:solidFill>
-                <a:latin typeface="Arial" pitchFamily="34" charset="0"/>
-                <a:ea typeface="Arial" pitchFamily="34" charset="-122"/>
-                <a:cs typeface="Arial" pitchFamily="34" charset="-120"/>
-              </a:rPr>
-              <a:t>All 34 districts</a:t>
-            </a:r>
-            <a:endParaRPr lang="en-US" sz="1400" dirty="0"/>
-          </a:p>
-        </p:txBody>
-      </p:sp>
-      <p:sp>
-        <p:nvSpPr>
-          <p:cNvPr id="27" name="Text 24"/>
-          <p:cNvSpPr/>
-          <p:nvPr/>
-        </p:nvSpPr>
-        <p:spPr>
-          <a:xfrm>
-            <a:off x="6507328" y="4526280"/>
-            <a:ext cx="2019224" cy="1188720"/>
-          </a:xfrm>
-          <a:prstGeom prst="rect">
-            <a:avLst/>
-          </a:prstGeom>
-          <a:noFill/>
-          <a:ln/>
-        </p:spPr>
-        <p:txBody>
-          <a:bodyPr wrap="square" lIns="0" tIns="0" rIns="0" bIns="0" rtlCol="0" anchor="t"/>
-          <a:lstStyle/>
-          <a:p>
-            <a:pPr indent="0" marL="0">
-              <a:buNone/>
-            </a:pPr>
-            <a:r>
-              <a:rPr lang="en-US" sz="1300" dirty="0">
-                <a:solidFill>
-                  <a:srgbClr val="536079"/>
-                </a:solidFill>
-                <a:latin typeface="Calibri" pitchFamily="34" charset="0"/>
-                <a:ea typeface="Calibri" pitchFamily="34" charset="-122"/>
-                <a:cs typeface="Calibri" pitchFamily="34" charset="-120"/>
-              </a:rPr>
-              <a:t>Statewide vehicle tracking; operations centre in place</a:t>
-            </a:r>
-            <a:endParaRPr lang="en-US" sz="1300" dirty="0"/>
-          </a:p>
-        </p:txBody>
-      </p:sp>
-      <p:sp>
-        <p:nvSpPr>
-          <p:cNvPr id="28" name="Shape 25"/>
-          <p:cNvSpPr/>
-          <p:nvPr/>
-        </p:nvSpPr>
-        <p:spPr>
-          <a:xfrm>
-            <a:off x="9212351" y="1792224"/>
-            <a:ext cx="292608" cy="292608"/>
-          </a:xfrm>
-          <a:prstGeom prst="ellipse">
-            <a:avLst/>
-          </a:prstGeom>
-          <a:solidFill>
-            <a:srgbClr val="2456D6"/>
-          </a:solidFill>
-          <a:ln w="38100">
-            <a:solidFill>
-              <a:srgbClr val="FFFFFF"/>
-            </a:solidFill>
-            <a:prstDash val="solid"/>
-          </a:ln>
-        </p:spPr>
-      </p:sp>
-      <p:sp>
-        <p:nvSpPr>
-          <p:cNvPr id="29" name="Text 26"/>
-          <p:cNvSpPr/>
-          <p:nvPr/>
-        </p:nvSpPr>
-        <p:spPr>
-          <a:xfrm>
-            <a:off x="9075191" y="2240280"/>
-            <a:ext cx="2567864" cy="274320"/>
-          </a:xfrm>
-          <a:prstGeom prst="rect">
-            <a:avLst/>
-          </a:prstGeom>
-          <a:noFill/>
-          <a:ln/>
-        </p:spPr>
-        <p:txBody>
-          <a:bodyPr wrap="square" lIns="0" tIns="0" rIns="0" bIns="0" rtlCol="0" anchor="t"/>
-          <a:lstStyle/>
-          <a:p>
-            <a:pPr indent="0" marL="0">
-              <a:buNone/>
-            </a:pPr>
-            <a:r>
-              <a:rPr lang="en-US" sz="1200" b="1" dirty="0">
-                <a:solidFill>
-                  <a:srgbClr val="2456D6"/>
-                </a:solidFill>
-                <a:latin typeface="Arial" pitchFamily="34" charset="0"/>
-                <a:ea typeface="Arial" pitchFamily="34" charset="-122"/>
-                <a:cs typeface="Arial" pitchFamily="34" charset="-120"/>
-              </a:rPr>
-              <a:t>Complete  ·  21–36 months</a:t>
+              <a:t>End-to-end live analysis on a CPU — the on-site set-up</a:t>
             </a:r>
             <a:endParaRPr lang="en-US" sz="1200" dirty="0"/>
           </a:p>
@@ -11747,18 +12175,18 @@
       </p:sp>
       <p:sp>
         <p:nvSpPr>
-          <p:cNvPr id="30" name="Shape 27"/>
-          <p:cNvSpPr/>
-          <p:nvPr/>
-        </p:nvSpPr>
-        <p:spPr>
-          <a:xfrm>
-            <a:off x="9075191" y="2651760"/>
-            <a:ext cx="2567864" cy="3246120"/>
+          <p:cNvPr id="14" name="Shape 11"/>
+          <p:cNvSpPr/>
+          <p:nvPr/>
+        </p:nvSpPr>
+        <p:spPr>
+          <a:xfrm>
+            <a:off x="6233008" y="1691640"/>
+            <a:ext cx="2567864" cy="2514600"/>
           </a:xfrm>
           <a:prstGeom prst="roundRect">
             <a:avLst>
-              <a:gd name="adj" fmla="val 4273"/>
+              <a:gd name="adj" fmla="val 4364"/>
             </a:avLst>
           </a:prstGeom>
           <a:solidFill>
@@ -11781,14 +12209,14 @@
       </p:sp>
       <p:sp>
         <p:nvSpPr>
-          <p:cNvPr id="31" name="Text 28"/>
-          <p:cNvSpPr/>
-          <p:nvPr/>
-        </p:nvSpPr>
-        <p:spPr>
-          <a:xfrm>
-            <a:off x="9349511" y="2834640"/>
-            <a:ext cx="2019224" cy="685800"/>
+          <p:cNvPr id="15" name="Text 12"/>
+          <p:cNvSpPr/>
+          <p:nvPr/>
+        </p:nvSpPr>
+        <p:spPr>
+          <a:xfrm>
+            <a:off x="6507328" y="1874520"/>
+            <a:ext cx="2019224" cy="822960"/>
           </a:xfrm>
           <a:prstGeom prst="rect">
             <a:avLst/>
@@ -11804,30 +12232,30 @@
               <a:buNone/>
             </a:pPr>
             <a:r>
-              <a:rPr lang="en-US" sz="3600" b="1" dirty="0">
-                <a:solidFill>
-                  <a:srgbClr val="0F1B33"/>
+              <a:rPr lang="en-US" sz="4400" b="1" dirty="0">
+                <a:solidFill>
+                  <a:srgbClr val="0F766E"/>
                 </a:solidFill>
                 <a:latin typeface="Arial" pitchFamily="34" charset="0"/>
                 <a:ea typeface="Arial" pitchFamily="34" charset="-122"/>
                 <a:cs typeface="Arial" pitchFamily="34" charset="-120"/>
               </a:rPr>
-              <a:t>80,000</a:t>
-            </a:r>
-            <a:endParaRPr lang="en-US" sz="3600" dirty="0"/>
-          </a:p>
-        </p:txBody>
-      </p:sp>
-      <p:sp>
-        <p:nvSpPr>
-          <p:cNvPr id="32" name="Text 29"/>
-          <p:cNvSpPr/>
-          <p:nvPr/>
-        </p:nvSpPr>
-        <p:spPr>
-          <a:xfrm>
-            <a:off x="9349511" y="3493008"/>
-            <a:ext cx="2019224" cy="274320"/>
+              <a:t>600+</a:t>
+            </a:r>
+            <a:endParaRPr lang="en-US" sz="4400" dirty="0"/>
+          </a:p>
+        </p:txBody>
+      </p:sp>
+      <p:sp>
+        <p:nvSpPr>
+          <p:cNvPr id="16" name="Text 13"/>
+          <p:cNvSpPr/>
+          <p:nvPr/>
+        </p:nvSpPr>
+        <p:spPr>
+          <a:xfrm>
+            <a:off x="6507328" y="2743200"/>
+            <a:ext cx="2019224" cy="548640"/>
           </a:xfrm>
           <a:prstGeom prst="rect">
             <a:avLst/>
@@ -11843,7 +12271,46 @@
               <a:buNone/>
             </a:pPr>
             <a:r>
-              <a:rPr lang="en-US" sz="1300" dirty="0">
+              <a:rPr lang="en-US" sz="1400" b="1" dirty="0">
+                <a:solidFill>
+                  <a:srgbClr val="0F1B33"/>
+                </a:solidFill>
+                <a:latin typeface="Arial" pitchFamily="34" charset="0"/>
+                <a:ea typeface="Arial" pitchFamily="34" charset="-122"/>
+                <a:cs typeface="Arial" pitchFamily="34" charset="-120"/>
+              </a:rPr>
+              <a:t>automated tests</a:t>
+            </a:r>
+            <a:endParaRPr lang="en-US" sz="1400" dirty="0"/>
+          </a:p>
+        </p:txBody>
+      </p:sp>
+      <p:sp>
+        <p:nvSpPr>
+          <p:cNvPr id="17" name="Text 14"/>
+          <p:cNvSpPr/>
+          <p:nvPr/>
+        </p:nvSpPr>
+        <p:spPr>
+          <a:xfrm>
+            <a:off x="6507328" y="3310128"/>
+            <a:ext cx="2019224" cy="777240"/>
+          </a:xfrm>
+          <a:prstGeom prst="rect">
+            <a:avLst/>
+          </a:prstGeom>
+          <a:noFill/>
+          <a:ln/>
+        </p:spPr>
+        <p:txBody>
+          <a:bodyPr wrap="square" lIns="0" tIns="0" rIns="0" bIns="0" rtlCol="0" anchor="t"/>
+          <a:lstStyle/>
+          <a:p>
+            <a:pPr indent="0" marL="0">
+              <a:buNone/>
+            </a:pPr>
+            <a:r>
+              <a:rPr lang="en-US" sz="1200" dirty="0">
                 <a:solidFill>
                   <a:srgbClr val="536079"/>
                 </a:solidFill>
@@ -11851,22 +12318,56 @@
                 <a:ea typeface="Calibri" pitchFamily="34" charset="-122"/>
                 <a:cs typeface="Calibri" pitchFamily="34" charset="-120"/>
               </a:rPr>
-              <a:t>cameras</a:t>
-            </a:r>
-            <a:endParaRPr lang="en-US" sz="1300" dirty="0"/>
-          </a:p>
-        </p:txBody>
-      </p:sp>
-      <p:sp>
-        <p:nvSpPr>
-          <p:cNvPr id="33" name="Text 30"/>
-          <p:cNvSpPr/>
-          <p:nvPr/>
-        </p:nvSpPr>
-        <p:spPr>
-          <a:xfrm>
-            <a:off x="9349511" y="3931920"/>
-            <a:ext cx="2019224" cy="548640"/>
+              <a:t>Plus interface tests in three languages and two themes</a:t>
+            </a:r>
+            <a:endParaRPr lang="en-US" sz="1200" dirty="0"/>
+          </a:p>
+        </p:txBody>
+      </p:sp>
+      <p:sp>
+        <p:nvSpPr>
+          <p:cNvPr id="18" name="Shape 15"/>
+          <p:cNvSpPr/>
+          <p:nvPr/>
+        </p:nvSpPr>
+        <p:spPr>
+          <a:xfrm>
+            <a:off x="9075191" y="1691640"/>
+            <a:ext cx="2567864" cy="2514600"/>
+          </a:xfrm>
+          <a:prstGeom prst="roundRect">
+            <a:avLst>
+              <a:gd name="adj" fmla="val 4364"/>
+            </a:avLst>
+          </a:prstGeom>
+          <a:solidFill>
+            <a:srgbClr val="FFFFFF"/>
+          </a:solidFill>
+          <a:ln w="9525">
+            <a:solidFill>
+              <a:srgbClr val="DDE3EE"/>
+            </a:solidFill>
+            <a:prstDash val="solid"/>
+          </a:ln>
+          <a:effectLst>
+            <a:outerShdw sx="100000" sy="100000" kx="0" ky="0" algn="bl" rotWithShape="0" blurRad="177800" dist="38100" dir="5400000">
+              <a:srgbClr val="1F2A44">
+                <a:alpha val="12000"/>
+              </a:srgbClr>
+            </a:outerShdw>
+          </a:effectLst>
+        </p:spPr>
+      </p:sp>
+      <p:sp>
+        <p:nvSpPr>
+          <p:cNvPr id="19" name="Text 16"/>
+          <p:cNvSpPr/>
+          <p:nvPr/>
+        </p:nvSpPr>
+        <p:spPr>
+          <a:xfrm>
+            <a:off x="9349511" y="1874520"/>
+            <a:ext cx="2019224" cy="822960"/>
           </a:xfrm>
           <a:prstGeom prst="rect">
             <a:avLst/>
@@ -11882,15 +12383,54 @@
               <a:buNone/>
             </a:pPr>
             <a:r>
-              <a:rPr lang="en-US" sz="1400" b="1" dirty="0">
-                <a:solidFill>
-                  <a:srgbClr val="0F1B33"/>
+              <a:rPr lang="en-US" sz="4400" b="1" dirty="0">
+                <a:solidFill>
+                  <a:srgbClr val="0F766E"/>
                 </a:solidFill>
                 <a:latin typeface="Arial" pitchFamily="34" charset="0"/>
                 <a:ea typeface="Arial" pitchFamily="34" charset="-122"/>
                 <a:cs typeface="Arial" pitchFamily="34" charset="-120"/>
               </a:rPr>
-              <a:t>Plus consented private cameras</a:t>
+              <a:t>5.7 s</a:t>
+            </a:r>
+            <a:endParaRPr lang="en-US" sz="4400" dirty="0"/>
+          </a:p>
+        </p:txBody>
+      </p:sp>
+      <p:sp>
+        <p:nvSpPr>
+          <p:cNvPr id="20" name="Text 17"/>
+          <p:cNvSpPr/>
+          <p:nvPr/>
+        </p:nvSpPr>
+        <p:spPr>
+          <a:xfrm>
+            <a:off x="9349511" y="2743200"/>
+            <a:ext cx="2019224" cy="548640"/>
+          </a:xfrm>
+          <a:prstGeom prst="rect">
+            <a:avLst/>
+          </a:prstGeom>
+          <a:noFill/>
+          <a:ln/>
+        </p:spPr>
+        <p:txBody>
+          <a:bodyPr wrap="square" lIns="0" tIns="0" rIns="0" bIns="0" rtlCol="0" anchor="t"/>
+          <a:lstStyle/>
+          <a:p>
+            <a:pPr indent="0" marL="0">
+              <a:buNone/>
+            </a:pPr>
+            <a:r>
+              <a:rPr lang="en-US" sz="1400" b="1" dirty="0">
+                <a:solidFill>
+                  <a:srgbClr val="0F1B33"/>
+                </a:solidFill>
+                <a:latin typeface="Arial" pitchFamily="34" charset="0"/>
+                <a:ea typeface="Arial" pitchFamily="34" charset="-122"/>
+                <a:cs typeface="Arial" pitchFamily="34" charset="-120"/>
+              </a:rPr>
+              <a:t>to restore a million records</a:t>
             </a:r>
             <a:endParaRPr lang="en-US" sz="1400" dirty="0"/>
           </a:p>
@@ -11898,14 +12438,14 @@
       </p:sp>
       <p:sp>
         <p:nvSpPr>
-          <p:cNvPr id="34" name="Text 31"/>
-          <p:cNvSpPr/>
-          <p:nvPr/>
-        </p:nvSpPr>
-        <p:spPr>
-          <a:xfrm>
-            <a:off x="9349511" y="4526280"/>
-            <a:ext cx="2019224" cy="1188720"/>
+          <p:cNvPr id="21" name="Text 18"/>
+          <p:cNvSpPr/>
+          <p:nvPr/>
+        </p:nvSpPr>
+        <p:spPr>
+          <a:xfrm>
+            <a:off x="9349511" y="3310128"/>
+            <a:ext cx="2019224" cy="777240"/>
           </a:xfrm>
           <a:prstGeom prst="rect">
             <a:avLst/>
@@ -11921,7 +12461,7 @@
               <a:buNone/>
             </a:pPr>
             <a:r>
-              <a:rPr lang="en-US" sz="1300" dirty="0">
+              <a:rPr lang="en-US" sz="1200" dirty="0">
                 <a:solidFill>
                   <a:srgbClr val="536079"/>
                 </a:solidFill>
@@ -11929,9 +12469,252 @@
                 <a:ea typeface="Calibri" pitchFamily="34" charset="-122"/>
                 <a:cs typeface="Calibri" pitchFamily="34" charset="-120"/>
               </a:rPr>
-              <a:t>Full coverage, with policy and audit established</a:t>
-            </a:r>
-            <a:endParaRPr lang="en-US" sz="1300" dirty="0"/>
+              <a:t>Disaster-recovery drill, with tampering detected</a:t>
+            </a:r>
+            <a:endParaRPr lang="en-US" sz="1200" dirty="0"/>
+          </a:p>
+        </p:txBody>
+      </p:sp>
+      <p:sp>
+        <p:nvSpPr>
+          <p:cNvPr id="22" name="Shape 19"/>
+          <p:cNvSpPr/>
+          <p:nvPr/>
+        </p:nvSpPr>
+        <p:spPr>
+          <a:xfrm>
+            <a:off x="548640" y="4526280"/>
+            <a:ext cx="11094415" cy="1463040"/>
+          </a:xfrm>
+          <a:prstGeom prst="roundRect">
+            <a:avLst>
+              <a:gd name="adj" fmla="val 7500"/>
+            </a:avLst>
+          </a:prstGeom>
+          <a:solidFill>
+            <a:srgbClr val="F3F5FA"/>
+          </a:solidFill>
+          <a:ln w="9525">
+            <a:solidFill>
+              <a:srgbClr val="DDE3EE"/>
+            </a:solidFill>
+            <a:prstDash val="solid"/>
+          </a:ln>
+        </p:spPr>
+      </p:sp>
+      <p:sp>
+        <p:nvSpPr>
+          <p:cNvPr id="23" name="Shape 20"/>
+          <p:cNvSpPr/>
+          <p:nvPr/>
+        </p:nvSpPr>
+        <p:spPr>
+          <a:xfrm>
+            <a:off x="868680" y="4754880"/>
+            <a:ext cx="512064" cy="512064"/>
+          </a:xfrm>
+          <a:prstGeom prst="ellipse">
+            <a:avLst/>
+          </a:prstGeom>
+          <a:solidFill>
+            <a:srgbClr val="D97706"/>
+          </a:solidFill>
+          <a:ln w="12700">
+            <a:solidFill>
+              <a:srgbClr val="D97706"/>
+            </a:solidFill>
+            <a:prstDash val="solid"/>
+          </a:ln>
+        </p:spPr>
+      </p:sp>
+      <p:pic>
+        <p:nvPicPr>
+          <p:cNvPr id="24" name="Image 0" descr="preencoded.png">    </p:cNvPr>
+          <p:cNvPicPr>
+            <a:picLocks noChangeAspect="1"/>
+          </p:cNvPicPr>
+          <p:nvPr/>
+        </p:nvPicPr>
+        <p:blipFill>
+          <a:blip r:embed="rId1"/>
+          <a:stretch>
+            <a:fillRect/>
+          </a:stretch>
+        </p:blipFill>
+        <p:spPr>
+          <a:xfrm>
+            <a:off x="986455" y="4872655"/>
+            <a:ext cx="276515" cy="276515"/>
+          </a:xfrm>
+          <a:prstGeom prst="rect">
+            <a:avLst/>
+          </a:prstGeom>
+        </p:spPr>
+      </p:pic>
+      <p:sp>
+        <p:nvSpPr>
+          <p:cNvPr id="25" name="Text 21"/>
+          <p:cNvSpPr/>
+          <p:nvPr/>
+        </p:nvSpPr>
+        <p:spPr>
+          <a:xfrm>
+            <a:off x="1554480" y="4754880"/>
+            <a:ext cx="3657600" cy="365760"/>
+          </a:xfrm>
+          <a:prstGeom prst="rect">
+            <a:avLst/>
+          </a:prstGeom>
+          <a:noFill/>
+          <a:ln/>
+        </p:spPr>
+        <p:txBody>
+          <a:bodyPr wrap="square" lIns="0" tIns="0" rIns="0" bIns="0" rtlCol="0" anchor="t"/>
+          <a:lstStyle/>
+          <a:p>
+            <a:pPr indent="0" marL="0">
+              <a:buNone/>
+            </a:pPr>
+            <a:r>
+              <a:rPr lang="en-US" sz="1700" b="1" dirty="0">
+                <a:solidFill>
+                  <a:srgbClr val="0F1B33"/>
+                </a:solidFill>
+                <a:latin typeface="Arial" pitchFamily="34" charset="0"/>
+                <a:ea typeface="Arial" pitchFamily="34" charset="-122"/>
+                <a:cs typeface="Arial" pitchFamily="34" charset="-120"/>
+              </a:rPr>
+              <a:t>Stated plainly</a:t>
+            </a:r>
+            <a:endParaRPr lang="en-US" sz="1700" dirty="0"/>
+          </a:p>
+        </p:txBody>
+      </p:sp>
+      <p:sp>
+        <p:nvSpPr>
+          <p:cNvPr id="26" name="Text 22"/>
+          <p:cNvSpPr/>
+          <p:nvPr/>
+        </p:nvSpPr>
+        <p:spPr>
+          <a:xfrm>
+            <a:off x="1554480" y="5166360"/>
+            <a:ext cx="4937760" cy="731520"/>
+          </a:xfrm>
+          <a:prstGeom prst="rect">
+            <a:avLst/>
+          </a:prstGeom>
+          <a:noFill/>
+          <a:ln/>
+        </p:spPr>
+        <p:txBody>
+          <a:bodyPr wrap="square" lIns="0" tIns="0" rIns="0" bIns="0" rtlCol="0" anchor="ctr"/>
+          <a:lstStyle/>
+          <a:p>
+            <a:pPr marL="177800" indent="-177800">
+              <a:spcAft>
+                <a:spcPts val="600"/>
+              </a:spcAft>
+              <a:buSzPct val="100000"/>
+              <a:buChar char="•"/>
+            </a:pPr>
+            <a:r>
+              <a:rPr lang="en-US" sz="1400" dirty="0">
+                <a:solidFill>
+                  <a:srgbClr val="0F1B33"/>
+                </a:solidFill>
+                <a:latin typeface="Calibri" pitchFamily="34" charset="0"/>
+                <a:ea typeface="Calibri" pitchFamily="34" charset="-122"/>
+                <a:cs typeface="Calibri" pitchFamily="34" charset="-120"/>
+              </a:rPr>
+              <a:t>Plate accuracy is below our own 85% target</a:t>
+            </a:r>
+            <a:endParaRPr lang="en-US" sz="1400" dirty="0"/>
+          </a:p>
+          <a:p>
+            <a:pPr marL="177800" indent="-177800">
+              <a:spcAft>
+                <a:spcPts val="600"/>
+              </a:spcAft>
+              <a:buSzPct val="100000"/>
+              <a:buChar char="•"/>
+            </a:pPr>
+            <a:r>
+              <a:rPr lang="en-US" sz="1400" dirty="0">
+                <a:solidFill>
+                  <a:srgbClr val="0F1B33"/>
+                </a:solidFill>
+                <a:latin typeface="Calibri" pitchFamily="34" charset="0"/>
+                <a:ea typeface="Calibri" pitchFamily="34" charset="-122"/>
+                <a:cs typeface="Calibri" pitchFamily="34" charset="-120"/>
+              </a:rPr>
+              <a:t>Statewide compute is sized from vendor benchmarks</a:t>
+            </a:r>
+            <a:endParaRPr lang="en-US" sz="1400" dirty="0"/>
+          </a:p>
+        </p:txBody>
+      </p:sp>
+      <p:sp>
+        <p:nvSpPr>
+          <p:cNvPr id="27" name="Text 23"/>
+          <p:cNvSpPr/>
+          <p:nvPr/>
+        </p:nvSpPr>
+        <p:spPr>
+          <a:xfrm>
+            <a:off x="6583680" y="5166360"/>
+            <a:ext cx="5120640" cy="731520"/>
+          </a:xfrm>
+          <a:prstGeom prst="rect">
+            <a:avLst/>
+          </a:prstGeom>
+          <a:noFill/>
+          <a:ln/>
+        </p:spPr>
+        <p:txBody>
+          <a:bodyPr wrap="square" lIns="0" tIns="0" rIns="0" bIns="0" rtlCol="0" anchor="ctr"/>
+          <a:lstStyle/>
+          <a:p>
+            <a:pPr marL="177800" indent="-177800">
+              <a:spcAft>
+                <a:spcPts val="600"/>
+              </a:spcAft>
+              <a:buSzPct val="100000"/>
+              <a:buChar char="•"/>
+            </a:pPr>
+            <a:r>
+              <a:rPr lang="en-US" sz="1400" dirty="0">
+                <a:solidFill>
+                  <a:srgbClr val="0F1B33"/>
+                </a:solidFill>
+                <a:latin typeface="Calibri" pitchFamily="34" charset="0"/>
+                <a:ea typeface="Calibri" pitchFamily="34" charset="-122"/>
+                <a:cs typeface="Calibri" pitchFamily="34" charset="-120"/>
+              </a:rPr>
+              <a:t>Matching vehicles with no readable plate is designed, not built</a:t>
+            </a:r>
+            <a:endParaRPr lang="en-US" sz="1400" dirty="0"/>
+          </a:p>
+          <a:p>
+            <a:pPr marL="177800" indent="-177800">
+              <a:spcAft>
+                <a:spcPts val="600"/>
+              </a:spcAft>
+              <a:buSzPct val="100000"/>
+              <a:buChar char="•"/>
+            </a:pPr>
+            <a:r>
+              <a:rPr lang="en-US" sz="1400" dirty="0">
+                <a:solidFill>
+                  <a:srgbClr val="0F1B33"/>
+                </a:solidFill>
+                <a:latin typeface="Calibri" pitchFamily="34" charset="0"/>
+                <a:ea typeface="Calibri" pitchFamily="34" charset="-122"/>
+                <a:cs typeface="Calibri" pitchFamily="34" charset="-120"/>
+              </a:rPr>
+              <a:t>The pilot replaces every estimate with a measurement</a:t>
+            </a:r>
+            <a:endParaRPr lang="en-US" sz="1400" dirty="0"/>
           </a:p>
         </p:txBody>
       </p:sp>
@@ -11946,6 +12729,1187 @@
 <file path=ppt/slides/slide18.xml><?xml version="1.0" encoding="utf-8"?>
 <p:sld xmlns:a="http://schemas.openxmlformats.org/drawingml/2006/main" xmlns:r="http://schemas.openxmlformats.org/officeDocument/2006/relationships" xmlns:p="http://schemas.openxmlformats.org/presentationml/2006/main">
   <p:cSld name="Slide 18">
+    <p:bg>
+      <p:bgPr>
+        <a:solidFill>
+          <a:srgbClr val="FFFFFF"/>
+        </a:solidFill>
+      </p:bgPr>
+    </p:bg>
+    <p:spTree>
+      <p:nvGrpSpPr>
+        <p:cNvPr id="1" name=""/>
+        <p:cNvGrpSpPr/>
+        <p:nvPr/>
+      </p:nvGrpSpPr>
+      <p:grpSpPr>
+        <a:xfrm>
+          <a:off x="0" y="0"/>
+          <a:ext cx="0" cy="0"/>
+          <a:chOff x="0" y="0"/>
+          <a:chExt cx="0" cy="0"/>
+        </a:xfrm>
+      </p:grpSpPr>
+      <p:sp>
+        <p:nvSpPr>
+          <p:cNvPr id="2" name="Text 0"/>
+          <p:cNvSpPr/>
+          <p:nvPr/>
+        </p:nvSpPr>
+        <p:spPr>
+          <a:xfrm>
+            <a:off x="548640" y="384048"/>
+            <a:ext cx="11094415" cy="274320"/>
+          </a:xfrm>
+          <a:prstGeom prst="rect">
+            <a:avLst/>
+          </a:prstGeom>
+          <a:noFill/>
+          <a:ln/>
+        </p:spPr>
+        <p:txBody>
+          <a:bodyPr wrap="square" lIns="0" tIns="0" rIns="0" bIns="0" rtlCol="0" anchor="ctr"/>
+          <a:lstStyle/>
+          <a:p>
+            <a:pPr indent="0" marL="0">
+              <a:buNone/>
+            </a:pPr>
+            <a:r>
+              <a:rPr lang="en-US" sz="1100" b="1" spc="300" kern="0" dirty="0">
+                <a:solidFill>
+                  <a:srgbClr val="B45309"/>
+                </a:solidFill>
+                <a:latin typeface="Arial" pitchFamily="34" charset="0"/>
+                <a:ea typeface="Arial" pitchFamily="34" charset="-122"/>
+                <a:cs typeface="Arial" pitchFamily="34" charset="-120"/>
+              </a:rPr>
+              <a:t>PATH TO STATEWIDE</a:t>
+            </a:r>
+            <a:endParaRPr lang="en-US" sz="1100" dirty="0"/>
+          </a:p>
+        </p:txBody>
+      </p:sp>
+      <p:sp>
+        <p:nvSpPr>
+          <p:cNvPr id="3" name="Text 1"/>
+          <p:cNvSpPr/>
+          <p:nvPr/>
+        </p:nvSpPr>
+        <p:spPr>
+          <a:xfrm>
+            <a:off x="548640" y="676656"/>
+            <a:ext cx="11094415" cy="731520"/>
+          </a:xfrm>
+          <a:prstGeom prst="rect">
+            <a:avLst/>
+          </a:prstGeom>
+          <a:noFill/>
+          <a:ln/>
+        </p:spPr>
+        <p:txBody>
+          <a:bodyPr wrap="square" lIns="0" tIns="0" rIns="0" bIns="0" rtlCol="0" anchor="t"/>
+          <a:lstStyle/>
+          <a:p>
+            <a:pPr indent="0" marL="0">
+              <a:buNone/>
+            </a:pPr>
+            <a:r>
+              <a:rPr lang="en-US" sz="3200" b="1" dirty="0">
+                <a:solidFill>
+                  <a:srgbClr val="0F1B33"/>
+                </a:solidFill>
+                <a:latin typeface="Arial" pitchFamily="34" charset="0"/>
+                <a:ea typeface="Arial" pitchFamily="34" charset="-122"/>
+                <a:cs typeface="Arial" pitchFamily="34" charset="-120"/>
+              </a:rPr>
+              <a:t>Useful from the first district. No big-bang switch-over.</a:t>
+            </a:r>
+            <a:endParaRPr lang="en-US" sz="3200" dirty="0"/>
+          </a:p>
+        </p:txBody>
+      </p:sp>
+      <p:sp>
+        <p:nvSpPr>
+          <p:cNvPr id="4" name="Text 2"/>
+          <p:cNvSpPr/>
+          <p:nvPr/>
+        </p:nvSpPr>
+        <p:spPr>
+          <a:xfrm>
+            <a:off x="11094415" y="6446520"/>
+            <a:ext cx="548640" cy="228600"/>
+          </a:xfrm>
+          <a:prstGeom prst="rect">
+            <a:avLst/>
+          </a:prstGeom>
+          <a:noFill/>
+          <a:ln/>
+        </p:spPr>
+        <p:txBody>
+          <a:bodyPr wrap="square" lIns="0" tIns="0" rIns="0" bIns="0" rtlCol="0" anchor="ctr"/>
+          <a:lstStyle/>
+          <a:p>
+            <a:pPr algn="r" indent="0" marL="0">
+              <a:buNone/>
+            </a:pPr>
+            <a:r>
+              <a:rPr lang="en-US" sz="900" dirty="0">
+                <a:solidFill>
+                  <a:srgbClr val="536079"/>
+                </a:solidFill>
+                <a:latin typeface="Arial" pitchFamily="34" charset="0"/>
+                <a:ea typeface="Arial" pitchFamily="34" charset="-122"/>
+                <a:cs typeface="Arial" pitchFamily="34" charset="-120"/>
+              </a:rPr>
+              <a:t>18</a:t>
+            </a:r>
+            <a:endParaRPr lang="en-US" sz="900" dirty="0"/>
+          </a:p>
+        </p:txBody>
+      </p:sp>
+      <p:sp>
+        <p:nvSpPr>
+          <p:cNvPr id="6" name="Shape 3"/>
+          <p:cNvSpPr/>
+          <p:nvPr/>
+        </p:nvSpPr>
+        <p:spPr>
+          <a:xfrm>
+            <a:off x="832104" y="1938528"/>
+            <a:ext cx="10527487" cy="0"/>
+          </a:xfrm>
+          <a:prstGeom prst="line">
+            <a:avLst/>
+          </a:prstGeom>
+          <a:noFill/>
+          <a:ln w="25400">
+            <a:solidFill>
+              <a:srgbClr val="DDE3EE"/>
+            </a:solidFill>
+            <a:prstDash val="solid"/>
+          </a:ln>
+        </p:spPr>
+      </p:sp>
+      <p:sp>
+        <p:nvSpPr>
+          <p:cNvPr id="7" name="Shape 4"/>
+          <p:cNvSpPr/>
+          <p:nvPr/>
+        </p:nvSpPr>
+        <p:spPr>
+          <a:xfrm>
+            <a:off x="685800" y="1792224"/>
+            <a:ext cx="292608" cy="292608"/>
+          </a:xfrm>
+          <a:prstGeom prst="ellipse">
+            <a:avLst/>
+          </a:prstGeom>
+          <a:solidFill>
+            <a:srgbClr val="D97706"/>
+          </a:solidFill>
+          <a:ln w="38100">
+            <a:solidFill>
+              <a:srgbClr val="FFFFFF"/>
+            </a:solidFill>
+            <a:prstDash val="solid"/>
+          </a:ln>
+        </p:spPr>
+      </p:sp>
+      <p:sp>
+        <p:nvSpPr>
+          <p:cNvPr id="8" name="Text 5"/>
+          <p:cNvSpPr/>
+          <p:nvPr/>
+        </p:nvSpPr>
+        <p:spPr>
+          <a:xfrm>
+            <a:off x="548640" y="2240280"/>
+            <a:ext cx="2567864" cy="274320"/>
+          </a:xfrm>
+          <a:prstGeom prst="rect">
+            <a:avLst/>
+          </a:prstGeom>
+          <a:noFill/>
+          <a:ln/>
+        </p:spPr>
+        <p:txBody>
+          <a:bodyPr wrap="square" lIns="0" tIns="0" rIns="0" bIns="0" rtlCol="0" anchor="t"/>
+          <a:lstStyle/>
+          <a:p>
+            <a:pPr indent="0" marL="0">
+              <a:buNone/>
+            </a:pPr>
+            <a:r>
+              <a:rPr lang="en-US" sz="1200" b="1" dirty="0">
+                <a:solidFill>
+                  <a:srgbClr val="B45309"/>
+                </a:solidFill>
+                <a:latin typeface="Arial" pitchFamily="34" charset="0"/>
+                <a:ea typeface="Arial" pitchFamily="34" charset="-122"/>
+                <a:cs typeface="Arial" pitchFamily="34" charset="-120"/>
+              </a:rPr>
+              <a:t>Pilot  ·  0–3 months</a:t>
+            </a:r>
+            <a:endParaRPr lang="en-US" sz="1200" dirty="0"/>
+          </a:p>
+        </p:txBody>
+      </p:sp>
+      <p:sp>
+        <p:nvSpPr>
+          <p:cNvPr id="9" name="Shape 6"/>
+          <p:cNvSpPr/>
+          <p:nvPr/>
+        </p:nvSpPr>
+        <p:spPr>
+          <a:xfrm>
+            <a:off x="548640" y="2651760"/>
+            <a:ext cx="2567864" cy="3246120"/>
+          </a:xfrm>
+          <a:prstGeom prst="roundRect">
+            <a:avLst>
+              <a:gd name="adj" fmla="val 4273"/>
+            </a:avLst>
+          </a:prstGeom>
+          <a:solidFill>
+            <a:srgbClr val="EAF0FD"/>
+          </a:solidFill>
+          <a:ln w="9525">
+            <a:solidFill>
+              <a:srgbClr val="C9D7F7"/>
+            </a:solidFill>
+            <a:prstDash val="solid"/>
+          </a:ln>
+        </p:spPr>
+      </p:sp>
+      <p:sp>
+        <p:nvSpPr>
+          <p:cNvPr id="10" name="Text 7"/>
+          <p:cNvSpPr/>
+          <p:nvPr/>
+        </p:nvSpPr>
+        <p:spPr>
+          <a:xfrm>
+            <a:off x="822960" y="2834640"/>
+            <a:ext cx="2019224" cy="685800"/>
+          </a:xfrm>
+          <a:prstGeom prst="rect">
+            <a:avLst/>
+          </a:prstGeom>
+          <a:noFill/>
+          <a:ln/>
+        </p:spPr>
+        <p:txBody>
+          <a:bodyPr wrap="square" lIns="0" tIns="0" rIns="0" bIns="0" rtlCol="0" anchor="t"/>
+          <a:lstStyle/>
+          <a:p>
+            <a:pPr indent="0" marL="0">
+              <a:buNone/>
+            </a:pPr>
+            <a:r>
+              <a:rPr lang="en-US" sz="3600" b="1" dirty="0">
+                <a:solidFill>
+                  <a:srgbClr val="0F1B33"/>
+                </a:solidFill>
+                <a:latin typeface="Arial" pitchFamily="34" charset="0"/>
+                <a:ea typeface="Arial" pitchFamily="34" charset="-122"/>
+                <a:cs typeface="Arial" pitchFamily="34" charset="-120"/>
+              </a:rPr>
+              <a:t>~500</a:t>
+            </a:r>
+            <a:endParaRPr lang="en-US" sz="3600" dirty="0"/>
+          </a:p>
+        </p:txBody>
+      </p:sp>
+      <p:sp>
+        <p:nvSpPr>
+          <p:cNvPr id="11" name="Text 8"/>
+          <p:cNvSpPr/>
+          <p:nvPr/>
+        </p:nvSpPr>
+        <p:spPr>
+          <a:xfrm>
+            <a:off x="822960" y="3493008"/>
+            <a:ext cx="2019224" cy="274320"/>
+          </a:xfrm>
+          <a:prstGeom prst="rect">
+            <a:avLst/>
+          </a:prstGeom>
+          <a:noFill/>
+          <a:ln/>
+        </p:spPr>
+        <p:txBody>
+          <a:bodyPr wrap="square" lIns="0" tIns="0" rIns="0" bIns="0" rtlCol="0" anchor="t"/>
+          <a:lstStyle/>
+          <a:p>
+            <a:pPr indent="0" marL="0">
+              <a:buNone/>
+            </a:pPr>
+            <a:r>
+              <a:rPr lang="en-US" sz="1300" dirty="0">
+                <a:solidFill>
+                  <a:srgbClr val="536079"/>
+                </a:solidFill>
+                <a:latin typeface="Calibri" pitchFamily="34" charset="0"/>
+                <a:ea typeface="Calibri" pitchFamily="34" charset="-122"/>
+                <a:cs typeface="Calibri" pitchFamily="34" charset="-120"/>
+              </a:rPr>
+              <a:t>cameras</a:t>
+            </a:r>
+            <a:endParaRPr lang="en-US" sz="1300" dirty="0"/>
+          </a:p>
+        </p:txBody>
+      </p:sp>
+      <p:sp>
+        <p:nvSpPr>
+          <p:cNvPr id="12" name="Text 9"/>
+          <p:cNvSpPr/>
+          <p:nvPr/>
+        </p:nvSpPr>
+        <p:spPr>
+          <a:xfrm>
+            <a:off x="822960" y="3931920"/>
+            <a:ext cx="2019224" cy="548640"/>
+          </a:xfrm>
+          <a:prstGeom prst="rect">
+            <a:avLst/>
+          </a:prstGeom>
+          <a:noFill/>
+          <a:ln/>
+        </p:spPr>
+        <p:txBody>
+          <a:bodyPr wrap="square" lIns="0" tIns="0" rIns="0" bIns="0" rtlCol="0" anchor="t"/>
+          <a:lstStyle/>
+          <a:p>
+            <a:pPr indent="0" marL="0">
+              <a:buNone/>
+            </a:pPr>
+            <a:r>
+              <a:rPr lang="en-US" sz="1400" b="1" dirty="0">
+                <a:solidFill>
+                  <a:srgbClr val="0F1B33"/>
+                </a:solidFill>
+                <a:latin typeface="Arial" pitchFamily="34" charset="0"/>
+                <a:ea typeface="Arial" pitchFamily="34" charset="-122"/>
+                <a:cs typeface="Arial" pitchFamily="34" charset="-120"/>
+              </a:rPr>
+              <a:t>1 district, 2 departments</a:t>
+            </a:r>
+            <a:endParaRPr lang="en-US" sz="1400" dirty="0"/>
+          </a:p>
+        </p:txBody>
+      </p:sp>
+      <p:sp>
+        <p:nvSpPr>
+          <p:cNvPr id="13" name="Text 10"/>
+          <p:cNvSpPr/>
+          <p:nvPr/>
+        </p:nvSpPr>
+        <p:spPr>
+          <a:xfrm>
+            <a:off x="822960" y="4526280"/>
+            <a:ext cx="2019224" cy="1188720"/>
+          </a:xfrm>
+          <a:prstGeom prst="rect">
+            <a:avLst/>
+          </a:prstGeom>
+          <a:noFill/>
+          <a:ln/>
+        </p:spPr>
+        <p:txBody>
+          <a:bodyPr wrap="square" lIns="0" tIns="0" rIns="0" bIns="0" rtlCol="0" anchor="t"/>
+          <a:lstStyle/>
+          <a:p>
+            <a:pPr indent="0" marL="0">
+              <a:buNone/>
+            </a:pPr>
+            <a:r>
+              <a:rPr lang="en-US" sz="1300" dirty="0">
+                <a:solidFill>
+                  <a:srgbClr val="536079"/>
+                </a:solidFill>
+                <a:latin typeface="Calibri" pitchFamily="34" charset="0"/>
+                <a:ea typeface="Calibri" pitchFamily="34" charset="-122"/>
+                <a:cs typeface="Calibri" pitchFamily="34" charset="-120"/>
+              </a:rPr>
+              <a:t>Plate reading validated on live feeds; operators sign off</a:t>
+            </a:r>
+            <a:endParaRPr lang="en-US" sz="1300" dirty="0"/>
+          </a:p>
+        </p:txBody>
+      </p:sp>
+      <p:sp>
+        <p:nvSpPr>
+          <p:cNvPr id="14" name="Shape 11"/>
+          <p:cNvSpPr/>
+          <p:nvPr/>
+        </p:nvSpPr>
+        <p:spPr>
+          <a:xfrm>
+            <a:off x="3527984" y="1792224"/>
+            <a:ext cx="292608" cy="292608"/>
+          </a:xfrm>
+          <a:prstGeom prst="ellipse">
+            <a:avLst/>
+          </a:prstGeom>
+          <a:solidFill>
+            <a:srgbClr val="2456D6"/>
+          </a:solidFill>
+          <a:ln w="38100">
+            <a:solidFill>
+              <a:srgbClr val="FFFFFF"/>
+            </a:solidFill>
+            <a:prstDash val="solid"/>
+          </a:ln>
+        </p:spPr>
+      </p:sp>
+      <p:sp>
+        <p:nvSpPr>
+          <p:cNvPr id="15" name="Text 12"/>
+          <p:cNvSpPr/>
+          <p:nvPr/>
+        </p:nvSpPr>
+        <p:spPr>
+          <a:xfrm>
+            <a:off x="3390824" y="2240280"/>
+            <a:ext cx="2567864" cy="274320"/>
+          </a:xfrm>
+          <a:prstGeom prst="rect">
+            <a:avLst/>
+          </a:prstGeom>
+          <a:noFill/>
+          <a:ln/>
+        </p:spPr>
+        <p:txBody>
+          <a:bodyPr wrap="square" lIns="0" tIns="0" rIns="0" bIns="0" rtlCol="0" anchor="t"/>
+          <a:lstStyle/>
+          <a:p>
+            <a:pPr indent="0" marL="0">
+              <a:buNone/>
+            </a:pPr>
+            <a:r>
+              <a:rPr lang="en-US" sz="1200" b="1" dirty="0">
+                <a:solidFill>
+                  <a:srgbClr val="2456D6"/>
+                </a:solidFill>
+                <a:latin typeface="Arial" pitchFamily="34" charset="0"/>
+                <a:ea typeface="Arial" pitchFamily="34" charset="-122"/>
+                <a:cs typeface="Arial" pitchFamily="34" charset="-120"/>
+              </a:rPr>
+              <a:t>Expand  ·  3–9 months</a:t>
+            </a:r>
+            <a:endParaRPr lang="en-US" sz="1200" dirty="0"/>
+          </a:p>
+        </p:txBody>
+      </p:sp>
+      <p:sp>
+        <p:nvSpPr>
+          <p:cNvPr id="16" name="Shape 13"/>
+          <p:cNvSpPr/>
+          <p:nvPr/>
+        </p:nvSpPr>
+        <p:spPr>
+          <a:xfrm>
+            <a:off x="3390824" y="2651760"/>
+            <a:ext cx="2567864" cy="3246120"/>
+          </a:xfrm>
+          <a:prstGeom prst="roundRect">
+            <a:avLst>
+              <a:gd name="adj" fmla="val 4273"/>
+            </a:avLst>
+          </a:prstGeom>
+          <a:solidFill>
+            <a:srgbClr val="FFFFFF"/>
+          </a:solidFill>
+          <a:ln w="9525">
+            <a:solidFill>
+              <a:srgbClr val="DDE3EE"/>
+            </a:solidFill>
+            <a:prstDash val="solid"/>
+          </a:ln>
+          <a:effectLst>
+            <a:outerShdw sx="100000" sy="100000" kx="0" ky="0" algn="bl" rotWithShape="0" blurRad="177800" dist="38100" dir="5400000">
+              <a:srgbClr val="1F2A44">
+                <a:alpha val="12000"/>
+              </a:srgbClr>
+            </a:outerShdw>
+          </a:effectLst>
+        </p:spPr>
+      </p:sp>
+      <p:sp>
+        <p:nvSpPr>
+          <p:cNvPr id="17" name="Text 14"/>
+          <p:cNvSpPr/>
+          <p:nvPr/>
+        </p:nvSpPr>
+        <p:spPr>
+          <a:xfrm>
+            <a:off x="3665144" y="2834640"/>
+            <a:ext cx="2019224" cy="685800"/>
+          </a:xfrm>
+          <a:prstGeom prst="rect">
+            <a:avLst/>
+          </a:prstGeom>
+          <a:noFill/>
+          <a:ln/>
+        </p:spPr>
+        <p:txBody>
+          <a:bodyPr wrap="square" lIns="0" tIns="0" rIns="0" bIns="0" rtlCol="0" anchor="t"/>
+          <a:lstStyle/>
+          <a:p>
+            <a:pPr indent="0" marL="0">
+              <a:buNone/>
+            </a:pPr>
+            <a:r>
+              <a:rPr lang="en-US" sz="3600" b="1" dirty="0">
+                <a:solidFill>
+                  <a:srgbClr val="0F1B33"/>
+                </a:solidFill>
+                <a:latin typeface="Arial" pitchFamily="34" charset="0"/>
+                <a:ea typeface="Arial" pitchFamily="34" charset="-122"/>
+                <a:cs typeface="Arial" pitchFamily="34" charset="-120"/>
+              </a:rPr>
+              <a:t>~5,000</a:t>
+            </a:r>
+            <a:endParaRPr lang="en-US" sz="3600" dirty="0"/>
+          </a:p>
+        </p:txBody>
+      </p:sp>
+      <p:sp>
+        <p:nvSpPr>
+          <p:cNvPr id="18" name="Text 15"/>
+          <p:cNvSpPr/>
+          <p:nvPr/>
+        </p:nvSpPr>
+        <p:spPr>
+          <a:xfrm>
+            <a:off x="3665144" y="3493008"/>
+            <a:ext cx="2019224" cy="274320"/>
+          </a:xfrm>
+          <a:prstGeom prst="rect">
+            <a:avLst/>
+          </a:prstGeom>
+          <a:noFill/>
+          <a:ln/>
+        </p:spPr>
+        <p:txBody>
+          <a:bodyPr wrap="square" lIns="0" tIns="0" rIns="0" bIns="0" rtlCol="0" anchor="t"/>
+          <a:lstStyle/>
+          <a:p>
+            <a:pPr indent="0" marL="0">
+              <a:buNone/>
+            </a:pPr>
+            <a:r>
+              <a:rPr lang="en-US" sz="1300" dirty="0">
+                <a:solidFill>
+                  <a:srgbClr val="536079"/>
+                </a:solidFill>
+                <a:latin typeface="Calibri" pitchFamily="34" charset="0"/>
+                <a:ea typeface="Calibri" pitchFamily="34" charset="-122"/>
+                <a:cs typeface="Calibri" pitchFamily="34" charset="-120"/>
+              </a:rPr>
+              <a:t>cameras</a:t>
+            </a:r>
+            <a:endParaRPr lang="en-US" sz="1300" dirty="0"/>
+          </a:p>
+        </p:txBody>
+      </p:sp>
+      <p:sp>
+        <p:nvSpPr>
+          <p:cNvPr id="19" name="Text 16"/>
+          <p:cNvSpPr/>
+          <p:nvPr/>
+        </p:nvSpPr>
+        <p:spPr>
+          <a:xfrm>
+            <a:off x="3665144" y="3931920"/>
+            <a:ext cx="2019224" cy="548640"/>
+          </a:xfrm>
+          <a:prstGeom prst="rect">
+            <a:avLst/>
+          </a:prstGeom>
+          <a:noFill/>
+          <a:ln/>
+        </p:spPr>
+        <p:txBody>
+          <a:bodyPr wrap="square" lIns="0" tIns="0" rIns="0" bIns="0" rtlCol="0" anchor="t"/>
+          <a:lstStyle/>
+          <a:p>
+            <a:pPr indent="0" marL="0">
+              <a:buNone/>
+            </a:pPr>
+            <a:r>
+              <a:rPr lang="en-US" sz="1400" b="1" dirty="0">
+                <a:solidFill>
+                  <a:srgbClr val="0F1B33"/>
+                </a:solidFill>
+                <a:latin typeface="Arial" pitchFamily="34" charset="0"/>
+                <a:ea typeface="Arial" pitchFamily="34" charset="-122"/>
+                <a:cs typeface="Arial" pitchFamily="34" charset="-120"/>
+              </a:rPr>
+              <a:t>4 districts, 6 departments</a:t>
+            </a:r>
+            <a:endParaRPr lang="en-US" sz="1400" dirty="0"/>
+          </a:p>
+        </p:txBody>
+      </p:sp>
+      <p:sp>
+        <p:nvSpPr>
+          <p:cNvPr id="20" name="Text 17"/>
+          <p:cNvSpPr/>
+          <p:nvPr/>
+        </p:nvSpPr>
+        <p:spPr>
+          <a:xfrm>
+            <a:off x="3665144" y="4526280"/>
+            <a:ext cx="2019224" cy="1188720"/>
+          </a:xfrm>
+          <a:prstGeom prst="rect">
+            <a:avLst/>
+          </a:prstGeom>
+          <a:noFill/>
+          <a:ln/>
+        </p:spPr>
+        <p:txBody>
+          <a:bodyPr wrap="square" lIns="0" tIns="0" rIns="0" bIns="0" rtlCol="0" anchor="t"/>
+          <a:lstStyle/>
+          <a:p>
+            <a:pPr indent="0" marL="0">
+              <a:buNone/>
+            </a:pPr>
+            <a:r>
+              <a:rPr lang="en-US" sz="1300" dirty="0">
+                <a:solidFill>
+                  <a:srgbClr val="536079"/>
+                </a:solidFill>
+                <a:latin typeface="Calibri" pitchFamily="34" charset="0"/>
+                <a:ea typeface="Calibri" pitchFamily="34" charset="-122"/>
+                <a:cs typeface="Calibri" pitchFamily="34" charset="-120"/>
+              </a:rPr>
+              <a:t>Main VMS vendors connected; VAHAN and eGujCop live</a:t>
+            </a:r>
+            <a:endParaRPr lang="en-US" sz="1300" dirty="0"/>
+          </a:p>
+        </p:txBody>
+      </p:sp>
+      <p:sp>
+        <p:nvSpPr>
+          <p:cNvPr id="21" name="Shape 18"/>
+          <p:cNvSpPr/>
+          <p:nvPr/>
+        </p:nvSpPr>
+        <p:spPr>
+          <a:xfrm>
+            <a:off x="6370168" y="1792224"/>
+            <a:ext cx="292608" cy="292608"/>
+          </a:xfrm>
+          <a:prstGeom prst="ellipse">
+            <a:avLst/>
+          </a:prstGeom>
+          <a:solidFill>
+            <a:srgbClr val="2456D6"/>
+          </a:solidFill>
+          <a:ln w="38100">
+            <a:solidFill>
+              <a:srgbClr val="FFFFFF"/>
+            </a:solidFill>
+            <a:prstDash val="solid"/>
+          </a:ln>
+        </p:spPr>
+      </p:sp>
+      <p:sp>
+        <p:nvSpPr>
+          <p:cNvPr id="22" name="Text 19"/>
+          <p:cNvSpPr/>
+          <p:nvPr/>
+        </p:nvSpPr>
+        <p:spPr>
+          <a:xfrm>
+            <a:off x="6233008" y="2240280"/>
+            <a:ext cx="2567864" cy="274320"/>
+          </a:xfrm>
+          <a:prstGeom prst="rect">
+            <a:avLst/>
+          </a:prstGeom>
+          <a:noFill/>
+          <a:ln/>
+        </p:spPr>
+        <p:txBody>
+          <a:bodyPr wrap="square" lIns="0" tIns="0" rIns="0" bIns="0" rtlCol="0" anchor="t"/>
+          <a:lstStyle/>
+          <a:p>
+            <a:pPr indent="0" marL="0">
+              <a:buNone/>
+            </a:pPr>
+            <a:r>
+              <a:rPr lang="en-US" sz="1200" b="1" dirty="0">
+                <a:solidFill>
+                  <a:srgbClr val="2456D6"/>
+                </a:solidFill>
+                <a:latin typeface="Arial" pitchFamily="34" charset="0"/>
+                <a:ea typeface="Arial" pitchFamily="34" charset="-122"/>
+                <a:cs typeface="Arial" pitchFamily="34" charset="-120"/>
+              </a:rPr>
+              <a:t>Statewide  ·  9–21 months</a:t>
+            </a:r>
+            <a:endParaRPr lang="en-US" sz="1200" dirty="0"/>
+          </a:p>
+        </p:txBody>
+      </p:sp>
+      <p:sp>
+        <p:nvSpPr>
+          <p:cNvPr id="23" name="Shape 20"/>
+          <p:cNvSpPr/>
+          <p:nvPr/>
+        </p:nvSpPr>
+        <p:spPr>
+          <a:xfrm>
+            <a:off x="6233008" y="2651760"/>
+            <a:ext cx="2567864" cy="3246120"/>
+          </a:xfrm>
+          <a:prstGeom prst="roundRect">
+            <a:avLst>
+              <a:gd name="adj" fmla="val 4273"/>
+            </a:avLst>
+          </a:prstGeom>
+          <a:solidFill>
+            <a:srgbClr val="FFFFFF"/>
+          </a:solidFill>
+          <a:ln w="9525">
+            <a:solidFill>
+              <a:srgbClr val="DDE3EE"/>
+            </a:solidFill>
+            <a:prstDash val="solid"/>
+          </a:ln>
+          <a:effectLst>
+            <a:outerShdw sx="100000" sy="100000" kx="0" ky="0" algn="bl" rotWithShape="0" blurRad="177800" dist="38100" dir="5400000">
+              <a:srgbClr val="1F2A44">
+                <a:alpha val="12000"/>
+              </a:srgbClr>
+            </a:outerShdw>
+          </a:effectLst>
+        </p:spPr>
+      </p:sp>
+      <p:sp>
+        <p:nvSpPr>
+          <p:cNvPr id="24" name="Text 21"/>
+          <p:cNvSpPr/>
+          <p:nvPr/>
+        </p:nvSpPr>
+        <p:spPr>
+          <a:xfrm>
+            <a:off x="6507328" y="2834640"/>
+            <a:ext cx="2019224" cy="685800"/>
+          </a:xfrm>
+          <a:prstGeom prst="rect">
+            <a:avLst/>
+          </a:prstGeom>
+          <a:noFill/>
+          <a:ln/>
+        </p:spPr>
+        <p:txBody>
+          <a:bodyPr wrap="square" lIns="0" tIns="0" rIns="0" bIns="0" rtlCol="0" anchor="t"/>
+          <a:lstStyle/>
+          <a:p>
+            <a:pPr indent="0" marL="0">
+              <a:buNone/>
+            </a:pPr>
+            <a:r>
+              <a:rPr lang="en-US" sz="3600" b="1" dirty="0">
+                <a:solidFill>
+                  <a:srgbClr val="0F1B33"/>
+                </a:solidFill>
+                <a:latin typeface="Arial" pitchFamily="34" charset="0"/>
+                <a:ea typeface="Arial" pitchFamily="34" charset="-122"/>
+                <a:cs typeface="Arial" pitchFamily="34" charset="-120"/>
+              </a:rPr>
+              <a:t>~30,000</a:t>
+            </a:r>
+            <a:endParaRPr lang="en-US" sz="3600" dirty="0"/>
+          </a:p>
+        </p:txBody>
+      </p:sp>
+      <p:sp>
+        <p:nvSpPr>
+          <p:cNvPr id="25" name="Text 22"/>
+          <p:cNvSpPr/>
+          <p:nvPr/>
+        </p:nvSpPr>
+        <p:spPr>
+          <a:xfrm>
+            <a:off x="6507328" y="3493008"/>
+            <a:ext cx="2019224" cy="274320"/>
+          </a:xfrm>
+          <a:prstGeom prst="rect">
+            <a:avLst/>
+          </a:prstGeom>
+          <a:noFill/>
+          <a:ln/>
+        </p:spPr>
+        <p:txBody>
+          <a:bodyPr wrap="square" lIns="0" tIns="0" rIns="0" bIns="0" rtlCol="0" anchor="t"/>
+          <a:lstStyle/>
+          <a:p>
+            <a:pPr indent="0" marL="0">
+              <a:buNone/>
+            </a:pPr>
+            <a:r>
+              <a:rPr lang="en-US" sz="1300" dirty="0">
+                <a:solidFill>
+                  <a:srgbClr val="536079"/>
+                </a:solidFill>
+                <a:latin typeface="Calibri" pitchFamily="34" charset="0"/>
+                <a:ea typeface="Calibri" pitchFamily="34" charset="-122"/>
+                <a:cs typeface="Calibri" pitchFamily="34" charset="-120"/>
+              </a:rPr>
+              <a:t>cameras</a:t>
+            </a:r>
+            <a:endParaRPr lang="en-US" sz="1300" dirty="0"/>
+          </a:p>
+        </p:txBody>
+      </p:sp>
+      <p:sp>
+        <p:nvSpPr>
+          <p:cNvPr id="26" name="Text 23"/>
+          <p:cNvSpPr/>
+          <p:nvPr/>
+        </p:nvSpPr>
+        <p:spPr>
+          <a:xfrm>
+            <a:off x="6507328" y="3931920"/>
+            <a:ext cx="2019224" cy="548640"/>
+          </a:xfrm>
+          <a:prstGeom prst="rect">
+            <a:avLst/>
+          </a:prstGeom>
+          <a:noFill/>
+          <a:ln/>
+        </p:spPr>
+        <p:txBody>
+          <a:bodyPr wrap="square" lIns="0" tIns="0" rIns="0" bIns="0" rtlCol="0" anchor="t"/>
+          <a:lstStyle/>
+          <a:p>
+            <a:pPr indent="0" marL="0">
+              <a:buNone/>
+            </a:pPr>
+            <a:r>
+              <a:rPr lang="en-US" sz="1400" b="1" dirty="0">
+                <a:solidFill>
+                  <a:srgbClr val="0F1B33"/>
+                </a:solidFill>
+                <a:latin typeface="Arial" pitchFamily="34" charset="0"/>
+                <a:ea typeface="Arial" pitchFamily="34" charset="-122"/>
+                <a:cs typeface="Arial" pitchFamily="34" charset="-120"/>
+              </a:rPr>
+              <a:t>All 34 districts</a:t>
+            </a:r>
+            <a:endParaRPr lang="en-US" sz="1400" dirty="0"/>
+          </a:p>
+        </p:txBody>
+      </p:sp>
+      <p:sp>
+        <p:nvSpPr>
+          <p:cNvPr id="27" name="Text 24"/>
+          <p:cNvSpPr/>
+          <p:nvPr/>
+        </p:nvSpPr>
+        <p:spPr>
+          <a:xfrm>
+            <a:off x="6507328" y="4526280"/>
+            <a:ext cx="2019224" cy="1188720"/>
+          </a:xfrm>
+          <a:prstGeom prst="rect">
+            <a:avLst/>
+          </a:prstGeom>
+          <a:noFill/>
+          <a:ln/>
+        </p:spPr>
+        <p:txBody>
+          <a:bodyPr wrap="square" lIns="0" tIns="0" rIns="0" bIns="0" rtlCol="0" anchor="t"/>
+          <a:lstStyle/>
+          <a:p>
+            <a:pPr indent="0" marL="0">
+              <a:buNone/>
+            </a:pPr>
+            <a:r>
+              <a:rPr lang="en-US" sz="1300" dirty="0">
+                <a:solidFill>
+                  <a:srgbClr val="536079"/>
+                </a:solidFill>
+                <a:latin typeface="Calibri" pitchFamily="34" charset="0"/>
+                <a:ea typeface="Calibri" pitchFamily="34" charset="-122"/>
+                <a:cs typeface="Calibri" pitchFamily="34" charset="-120"/>
+              </a:rPr>
+              <a:t>Statewide vehicle tracking; operations centre in place</a:t>
+            </a:r>
+            <a:endParaRPr lang="en-US" sz="1300" dirty="0"/>
+          </a:p>
+        </p:txBody>
+      </p:sp>
+      <p:sp>
+        <p:nvSpPr>
+          <p:cNvPr id="28" name="Shape 25"/>
+          <p:cNvSpPr/>
+          <p:nvPr/>
+        </p:nvSpPr>
+        <p:spPr>
+          <a:xfrm>
+            <a:off x="9212351" y="1792224"/>
+            <a:ext cx="292608" cy="292608"/>
+          </a:xfrm>
+          <a:prstGeom prst="ellipse">
+            <a:avLst/>
+          </a:prstGeom>
+          <a:solidFill>
+            <a:srgbClr val="2456D6"/>
+          </a:solidFill>
+          <a:ln w="38100">
+            <a:solidFill>
+              <a:srgbClr val="FFFFFF"/>
+            </a:solidFill>
+            <a:prstDash val="solid"/>
+          </a:ln>
+        </p:spPr>
+      </p:sp>
+      <p:sp>
+        <p:nvSpPr>
+          <p:cNvPr id="29" name="Text 26"/>
+          <p:cNvSpPr/>
+          <p:nvPr/>
+        </p:nvSpPr>
+        <p:spPr>
+          <a:xfrm>
+            <a:off x="9075191" y="2240280"/>
+            <a:ext cx="2567864" cy="274320"/>
+          </a:xfrm>
+          <a:prstGeom prst="rect">
+            <a:avLst/>
+          </a:prstGeom>
+          <a:noFill/>
+          <a:ln/>
+        </p:spPr>
+        <p:txBody>
+          <a:bodyPr wrap="square" lIns="0" tIns="0" rIns="0" bIns="0" rtlCol="0" anchor="t"/>
+          <a:lstStyle/>
+          <a:p>
+            <a:pPr indent="0" marL="0">
+              <a:buNone/>
+            </a:pPr>
+            <a:r>
+              <a:rPr lang="en-US" sz="1200" b="1" dirty="0">
+                <a:solidFill>
+                  <a:srgbClr val="2456D6"/>
+                </a:solidFill>
+                <a:latin typeface="Arial" pitchFamily="34" charset="0"/>
+                <a:ea typeface="Arial" pitchFamily="34" charset="-122"/>
+                <a:cs typeface="Arial" pitchFamily="34" charset="-120"/>
+              </a:rPr>
+              <a:t>Complete  ·  21–36 months</a:t>
+            </a:r>
+            <a:endParaRPr lang="en-US" sz="1200" dirty="0"/>
+          </a:p>
+        </p:txBody>
+      </p:sp>
+      <p:sp>
+        <p:nvSpPr>
+          <p:cNvPr id="30" name="Shape 27"/>
+          <p:cNvSpPr/>
+          <p:nvPr/>
+        </p:nvSpPr>
+        <p:spPr>
+          <a:xfrm>
+            <a:off x="9075191" y="2651760"/>
+            <a:ext cx="2567864" cy="3246120"/>
+          </a:xfrm>
+          <a:prstGeom prst="roundRect">
+            <a:avLst>
+              <a:gd name="adj" fmla="val 4273"/>
+            </a:avLst>
+          </a:prstGeom>
+          <a:solidFill>
+            <a:srgbClr val="FFFFFF"/>
+          </a:solidFill>
+          <a:ln w="9525">
+            <a:solidFill>
+              <a:srgbClr val="DDE3EE"/>
+            </a:solidFill>
+            <a:prstDash val="solid"/>
+          </a:ln>
+          <a:effectLst>
+            <a:outerShdw sx="100000" sy="100000" kx="0" ky="0" algn="bl" rotWithShape="0" blurRad="177800" dist="38100" dir="5400000">
+              <a:srgbClr val="1F2A44">
+                <a:alpha val="12000"/>
+              </a:srgbClr>
+            </a:outerShdw>
+          </a:effectLst>
+        </p:spPr>
+      </p:sp>
+      <p:sp>
+        <p:nvSpPr>
+          <p:cNvPr id="31" name="Text 28"/>
+          <p:cNvSpPr/>
+          <p:nvPr/>
+        </p:nvSpPr>
+        <p:spPr>
+          <a:xfrm>
+            <a:off x="9349511" y="2834640"/>
+            <a:ext cx="2019224" cy="685800"/>
+          </a:xfrm>
+          <a:prstGeom prst="rect">
+            <a:avLst/>
+          </a:prstGeom>
+          <a:noFill/>
+          <a:ln/>
+        </p:spPr>
+        <p:txBody>
+          <a:bodyPr wrap="square" lIns="0" tIns="0" rIns="0" bIns="0" rtlCol="0" anchor="t"/>
+          <a:lstStyle/>
+          <a:p>
+            <a:pPr indent="0" marL="0">
+              <a:buNone/>
+            </a:pPr>
+            <a:r>
+              <a:rPr lang="en-US" sz="3600" b="1" dirty="0">
+                <a:solidFill>
+                  <a:srgbClr val="0F1B33"/>
+                </a:solidFill>
+                <a:latin typeface="Arial" pitchFamily="34" charset="0"/>
+                <a:ea typeface="Arial" pitchFamily="34" charset="-122"/>
+                <a:cs typeface="Arial" pitchFamily="34" charset="-120"/>
+              </a:rPr>
+              <a:t>80,000</a:t>
+            </a:r>
+            <a:endParaRPr lang="en-US" sz="3600" dirty="0"/>
+          </a:p>
+        </p:txBody>
+      </p:sp>
+      <p:sp>
+        <p:nvSpPr>
+          <p:cNvPr id="32" name="Text 29"/>
+          <p:cNvSpPr/>
+          <p:nvPr/>
+        </p:nvSpPr>
+        <p:spPr>
+          <a:xfrm>
+            <a:off x="9349511" y="3493008"/>
+            <a:ext cx="2019224" cy="274320"/>
+          </a:xfrm>
+          <a:prstGeom prst="rect">
+            <a:avLst/>
+          </a:prstGeom>
+          <a:noFill/>
+          <a:ln/>
+        </p:spPr>
+        <p:txBody>
+          <a:bodyPr wrap="square" lIns="0" tIns="0" rIns="0" bIns="0" rtlCol="0" anchor="t"/>
+          <a:lstStyle/>
+          <a:p>
+            <a:pPr indent="0" marL="0">
+              <a:buNone/>
+            </a:pPr>
+            <a:r>
+              <a:rPr lang="en-US" sz="1300" dirty="0">
+                <a:solidFill>
+                  <a:srgbClr val="536079"/>
+                </a:solidFill>
+                <a:latin typeface="Calibri" pitchFamily="34" charset="0"/>
+                <a:ea typeface="Calibri" pitchFamily="34" charset="-122"/>
+                <a:cs typeface="Calibri" pitchFamily="34" charset="-120"/>
+              </a:rPr>
+              <a:t>cameras</a:t>
+            </a:r>
+            <a:endParaRPr lang="en-US" sz="1300" dirty="0"/>
+          </a:p>
+        </p:txBody>
+      </p:sp>
+      <p:sp>
+        <p:nvSpPr>
+          <p:cNvPr id="33" name="Text 30"/>
+          <p:cNvSpPr/>
+          <p:nvPr/>
+        </p:nvSpPr>
+        <p:spPr>
+          <a:xfrm>
+            <a:off x="9349511" y="3931920"/>
+            <a:ext cx="2019224" cy="548640"/>
+          </a:xfrm>
+          <a:prstGeom prst="rect">
+            <a:avLst/>
+          </a:prstGeom>
+          <a:noFill/>
+          <a:ln/>
+        </p:spPr>
+        <p:txBody>
+          <a:bodyPr wrap="square" lIns="0" tIns="0" rIns="0" bIns="0" rtlCol="0" anchor="t"/>
+          <a:lstStyle/>
+          <a:p>
+            <a:pPr indent="0" marL="0">
+              <a:buNone/>
+            </a:pPr>
+            <a:r>
+              <a:rPr lang="en-US" sz="1400" b="1" dirty="0">
+                <a:solidFill>
+                  <a:srgbClr val="0F1B33"/>
+                </a:solidFill>
+                <a:latin typeface="Arial" pitchFamily="34" charset="0"/>
+                <a:ea typeface="Arial" pitchFamily="34" charset="-122"/>
+                <a:cs typeface="Arial" pitchFamily="34" charset="-120"/>
+              </a:rPr>
+              <a:t>Plus consented private cameras</a:t>
+            </a:r>
+            <a:endParaRPr lang="en-US" sz="1400" dirty="0"/>
+          </a:p>
+        </p:txBody>
+      </p:sp>
+      <p:sp>
+        <p:nvSpPr>
+          <p:cNvPr id="34" name="Text 31"/>
+          <p:cNvSpPr/>
+          <p:nvPr/>
+        </p:nvSpPr>
+        <p:spPr>
+          <a:xfrm>
+            <a:off x="9349511" y="4526280"/>
+            <a:ext cx="2019224" cy="1188720"/>
+          </a:xfrm>
+          <a:prstGeom prst="rect">
+            <a:avLst/>
+          </a:prstGeom>
+          <a:noFill/>
+          <a:ln/>
+        </p:spPr>
+        <p:txBody>
+          <a:bodyPr wrap="square" lIns="0" tIns="0" rIns="0" bIns="0" rtlCol="0" anchor="t"/>
+          <a:lstStyle/>
+          <a:p>
+            <a:pPr indent="0" marL="0">
+              <a:buNone/>
+            </a:pPr>
+            <a:r>
+              <a:rPr lang="en-US" sz="1300" dirty="0">
+                <a:solidFill>
+                  <a:srgbClr val="536079"/>
+                </a:solidFill>
+                <a:latin typeface="Calibri" pitchFamily="34" charset="0"/>
+                <a:ea typeface="Calibri" pitchFamily="34" charset="-122"/>
+                <a:cs typeface="Calibri" pitchFamily="34" charset="-120"/>
+              </a:rPr>
+              <a:t>Full coverage, with policy and audit established</a:t>
+            </a:r>
+            <a:endParaRPr lang="en-US" sz="1300" dirty="0"/>
+          </a:p>
+        </p:txBody>
+      </p:sp>
+    </p:spTree>
+  </p:cSld>
+  <p:clrMapOvr>
+    <a:masterClrMapping/>
+  </p:clrMapOvr>
+</p:sld>
+</file>
+
+<file path=ppt/slides/slide19.xml><?xml version="1.0" encoding="utf-8"?>
+<p:sld xmlns:a="http://schemas.openxmlformats.org/drawingml/2006/main" xmlns:r="http://schemas.openxmlformats.org/officeDocument/2006/relationships" xmlns:p="http://schemas.openxmlformats.org/presentationml/2006/main">
+  <p:cSld name="Slide 19">
     <p:bg>
       <p:bgPr>
         <a:solidFill>
@@ -12639,7 +14603,7 @@
                 <a:ea typeface="Arial" pitchFamily="34" charset="-122"/>
                 <a:cs typeface="Arial" pitchFamily="34" charset="-120"/>
               </a:rPr>
-              <a:t>18</a:t>
+              <a:t>19</a:t>
             </a:r>
             <a:endParaRPr lang="en-US" sz="900" dirty="0"/>
           </a:p>

--- a/docs/Sentinel-Finale-Pitch.pptx
+++ b/docs/Sentinel-Finale-Pitch.pptx
@@ -1683,7 +1683,7 @@
           <a:p>
             <a:r>
               <a:rPr lang="en-US" dirty="0"/>
-              <a:t>A highway check-post and a ration-shop godown are different jobs. About one camera in eight reads plates continuously; a quarter are view-only. The tier is a setting each department controls and can change live — a camera goes to continuous for a bandobast and back afterwards. That is what makes eighty thousand cameras tractable.</a:t>
+              <a:t>A highway check-post and a ration-shop godown are different jobs. About one camera in eight reads plates continuously; a quarter are view-only. The tier is a setting each department controls and can change live — a camera goes to continuous for a bandobast and back afterwards. That is what makes eighty thousand cameras tractable. Be clear that the split is our planning assumption: the brief gives the eighty thousand total and how departments use their cameras, not a breakdown. The GPU count and the server cost follow from it, and each department’s inventory replaces it in the pilot.</a:t>
             </a:r>
             <a:endParaRPr lang="en-US" dirty="0"/>
           </a:p>
@@ -11666,6 +11666,45 @@
           </a:p>
         </p:txBody>
       </p:sp>
+      <p:sp>
+        <p:nvSpPr>
+          <p:cNvPr id="33" name="Text 28"/>
+          <p:cNvSpPr/>
+          <p:nvPr/>
+        </p:nvSpPr>
+        <p:spPr>
+          <a:xfrm>
+            <a:off x="548640" y="6172200"/>
+            <a:ext cx="10362895" cy="411480"/>
+          </a:xfrm>
+          <a:prstGeom prst="rect">
+            <a:avLst/>
+          </a:prstGeom>
+          <a:noFill/>
+          <a:ln/>
+        </p:spPr>
+        <p:txBody>
+          <a:bodyPr wrap="square" lIns="0" tIns="0" rIns="0" bIns="0" rtlCol="0" anchor="t"/>
+          <a:lstStyle/>
+          <a:p>
+            <a:pPr indent="0" marL="0">
+              <a:buNone/>
+            </a:pPr>
+            <a:r>
+              <a:rPr lang="en-US" sz="1000" i="1" dirty="0">
+                <a:solidFill>
+                  <a:srgbClr val="536079"/>
+                </a:solidFill>
+                <a:latin typeface="Calibri" pitchFamily="34" charset="0"/>
+                <a:ea typeface="Calibri" pitchFamily="34" charset="-122"/>
+                <a:cs typeface="Calibri" pitchFamily="34" charset="-120"/>
+              </a:rPr>
+              <a:t>Planning assumption, not a survey: the ~80,000 total is from the brief; the split is our estimate from how departments use their cameras. Compute and cost are sized from it; department inventories replace it in the pilot.</a:t>
+            </a:r>
+            <a:endParaRPr lang="en-US" sz="1000" dirty="0"/>
+          </a:p>
+        </p:txBody>
+      </p:sp>
     </p:spTree>
   </p:cSld>
   <p:clrMapOvr>

--- a/docs/Sentinel-Finale-Pitch.pptx
+++ b/docs/Sentinel-Finale-Pitch.pptx
@@ -2651,7 +2651,7 @@
           <a:p>
             <a:r>
               <a:rPr lang="en-US" dirty="0"/>
-              <a:t>This is the slide for both halves of the room. For the officers: the time in the report is the time printed on the camera’s own frame, and if it cannot be read we say “time unknown” rather than guess — a record that holds up under cross-examination. Every search, export and reveal is logged in a hash chain; change one entry and verification fails. For the professors: the clock reading is accepted only when a second reading agrees, and exports carry a SHA-256 manifest. And we do no face recognition at all — faces are detected only to be blurred. If time allows, show Admin, then Audit, then Verify chain.</a:t>
+              <a:t>This is the slide for both halves of the room. For the officers: the time in the report is the time printed on the camera’s own frame, and if it cannot be read we say “time unknown” rather than guess — a record that holds up under cross-examination. Every search, export and reveal is logged in a hash chain; change one entry and verification fails. For the professors: the clock reading is accepted only when a second reading agrees, and exports carry a SHA-256 manifest. And we do no face recognition at all — faces are detected only to be blurred. If time allows, show Admin, then Audit, then Verify integrity.</a:t>
             </a:r>
             <a:endParaRPr lang="en-US" dirty="0"/>
           </a:p>
@@ -3321,12 +3321,12 @@
         </p:nvSpPr>
         <p:spPr>
           <a:xfrm>
-            <a:off x="6473952" y="1946770"/>
-            <a:ext cx="5385816" cy="2964461"/>
+            <a:off x="6473952" y="2080117"/>
+            <a:ext cx="5385816" cy="2697766"/>
           </a:xfrm>
           <a:prstGeom prst="roundRect">
             <a:avLst>
-              <a:gd name="adj" fmla="val 3085"/>
+              <a:gd name="adj" fmla="val 3389"/>
             </a:avLst>
           </a:prstGeom>
           <a:solidFill>
@@ -3363,8 +3363,8 @@
         </p:blipFill>
         <p:spPr>
           <a:xfrm>
-            <a:off x="6537960" y="2010778"/>
-            <a:ext cx="5257800" cy="2836445"/>
+            <a:off x="6537960" y="2144125"/>
+            <a:ext cx="5257800" cy="2569750"/>
           </a:xfrm>
           <a:prstGeom prst="rect">
             <a:avLst/>
@@ -3379,7 +3379,7 @@
         </p:nvSpPr>
         <p:spPr>
           <a:xfrm>
-            <a:off x="5897880" y="1645018"/>
+            <a:off x="5897880" y="1778365"/>
             <a:ext cx="2834640" cy="566928"/>
           </a:xfrm>
           <a:prstGeom prst="roundRect">
@@ -3413,7 +3413,7 @@
         </p:nvSpPr>
         <p:spPr>
           <a:xfrm>
-            <a:off x="6025896" y="1754746"/>
+            <a:off x="6025896" y="1888093"/>
             <a:ext cx="347472" cy="347472"/>
           </a:xfrm>
           <a:prstGeom prst="ellipse">
@@ -3446,7 +3446,7 @@
         </p:blipFill>
         <p:spPr>
           <a:xfrm>
-            <a:off x="6105815" y="1834664"/>
+            <a:off x="6105815" y="1968012"/>
             <a:ext cx="187635" cy="187635"/>
           </a:xfrm>
           <a:prstGeom prst="rect">
@@ -3462,7 +3462,7 @@
         </p:nvSpPr>
         <p:spPr>
           <a:xfrm>
-            <a:off x="6464808" y="1754746"/>
+            <a:off x="6464808" y="1888093"/>
             <a:ext cx="2176272" cy="347472"/>
           </a:xfrm>
           <a:prstGeom prst="rect">
@@ -3501,7 +3501,7 @@
         </p:nvSpPr>
         <p:spPr>
           <a:xfrm>
-            <a:off x="9128455" y="4618622"/>
+            <a:off x="9128455" y="4485275"/>
             <a:ext cx="2560320" cy="566928"/>
           </a:xfrm>
           <a:prstGeom prst="roundRect">
@@ -3535,7 +3535,7 @@
         </p:nvSpPr>
         <p:spPr>
           <a:xfrm>
-            <a:off x="9256471" y="4728350"/>
+            <a:off x="9256471" y="4595003"/>
             <a:ext cx="347472" cy="347472"/>
           </a:xfrm>
           <a:prstGeom prst="ellipse">
@@ -3568,7 +3568,7 @@
         </p:blipFill>
         <p:spPr>
           <a:xfrm>
-            <a:off x="9336390" y="4808269"/>
+            <a:off x="9336390" y="4674921"/>
             <a:ext cx="187635" cy="187635"/>
           </a:xfrm>
           <a:prstGeom prst="rect">
@@ -3584,7 +3584,7 @@
         </p:nvSpPr>
         <p:spPr>
           <a:xfrm>
-            <a:off x="9695383" y="4728350"/>
+            <a:off x="9695383" y="4595003"/>
             <a:ext cx="1901952" cy="347472"/>
           </a:xfrm>
           <a:prstGeom prst="rect">
@@ -10679,11 +10679,11 @@
         <p:spPr>
           <a:xfrm>
             <a:off x="548640" y="1673352"/>
-            <a:ext cx="6437376" cy="3892424"/>
+            <a:ext cx="6437376" cy="3593721"/>
           </a:xfrm>
           <a:prstGeom prst="roundRect">
             <a:avLst>
-              <a:gd name="adj" fmla="val 2349"/>
+              <a:gd name="adj" fmla="val 2544"/>
             </a:avLst>
           </a:prstGeom>
           <a:solidFill>
@@ -10721,7 +10721,7 @@
         <p:spPr>
           <a:xfrm>
             <a:off x="612648" y="1737360"/>
-            <a:ext cx="6309360" cy="3764408"/>
+            <a:ext cx="6309360" cy="3465705"/>
           </a:xfrm>
           <a:prstGeom prst="rect">
             <a:avLst/>
@@ -11433,11 +11433,11 @@
         <p:spPr>
           <a:xfrm>
             <a:off x="548640" y="1581912"/>
-            <a:ext cx="6986016" cy="3827727"/>
+            <a:ext cx="6986016" cy="3479864"/>
           </a:xfrm>
           <a:prstGeom prst="roundRect">
             <a:avLst>
-              <a:gd name="adj" fmla="val 2389"/>
+              <a:gd name="adj" fmla="val 2628"/>
             </a:avLst>
           </a:prstGeom>
           <a:solidFill>
@@ -11475,7 +11475,7 @@
         <p:spPr>
           <a:xfrm>
             <a:off x="612648" y="1645920"/>
-            <a:ext cx="6858000" cy="3699711"/>
+            <a:ext cx="6858000" cy="3351848"/>
           </a:xfrm>
           <a:prstGeom prst="rect">
             <a:avLst/>
@@ -11871,7 +11871,7 @@
         </p:nvSpPr>
         <p:spPr>
           <a:xfrm>
-            <a:off x="548640" y="5546799"/>
+            <a:off x="548640" y="5198936"/>
             <a:ext cx="6949440" cy="411480"/>
           </a:xfrm>
           <a:prstGeom prst="rect">
@@ -11896,7 +11896,7 @@
                 <a:ea typeface="Calibri" pitchFamily="34" charset="-122"/>
                 <a:cs typeface="Calibri" pitchFamily="34" charset="-120"/>
               </a:rPr>
-              <a:t>The real console on recorded government footage: GJ39C8018 at Gandhidham, 8 Aug 2026, 21:10 — the time printed on the frame.</a:t>
+              <a:t>The real console on recorded government footage: GJ11S7924 at Timbavadi Gate, Junagadh, 17 Jun 2026, 18:01 — the time printed on the frame.</a:t>
             </a:r>
             <a:endParaRPr lang="en-US" sz="1100" dirty="0"/>
           </a:p>
@@ -12099,11 +12099,11 @@
         <p:spPr>
           <a:xfrm>
             <a:off x="548640" y="1627632"/>
-            <a:ext cx="5248656" cy="3627314"/>
+            <a:ext cx="5248656" cy="3639312"/>
           </a:xfrm>
           <a:prstGeom prst="roundRect">
             <a:avLst>
-              <a:gd name="adj" fmla="val 2521"/>
+              <a:gd name="adj" fmla="val 2513"/>
             </a:avLst>
           </a:prstGeom>
           <a:solidFill>
@@ -12141,7 +12141,7 @@
         <p:spPr>
           <a:xfrm>
             <a:off x="612648" y="1691640"/>
-            <a:ext cx="5120640" cy="3499298"/>
+            <a:ext cx="5120640" cy="3511296"/>
           </a:xfrm>
           <a:prstGeom prst="rect">
             <a:avLst/>
@@ -24252,11 +24252,11 @@
         <p:spPr>
           <a:xfrm>
             <a:off x="6839712" y="1673352"/>
-            <a:ext cx="4821631" cy="3318447"/>
+            <a:ext cx="4821631" cy="2852242"/>
           </a:xfrm>
           <a:prstGeom prst="roundRect">
             <a:avLst>
-              <a:gd name="adj" fmla="val 2756"/>
+              <a:gd name="adj" fmla="val 3206"/>
             </a:avLst>
           </a:prstGeom>
           <a:solidFill>
@@ -24294,7 +24294,7 @@
         <p:spPr>
           <a:xfrm>
             <a:off x="6903720" y="1737360"/>
-            <a:ext cx="4693615" cy="3190431"/>
+            <a:ext cx="4693615" cy="2724226"/>
           </a:xfrm>
           <a:prstGeom prst="rect">
             <a:avLst/>

--- a/docs/Sentinel-Finale-Pitch.pptx
+++ b/docs/Sentinel-Finale-Pitch.pptx
@@ -1255,8 +1255,8 @@
             <a:r>
               <a:rPr lang="en-US" dirty="0"/>
               <a:t>[11:00–12:30] Say “we measured that” for each row, and read the right-hand panel aloud — the professors will respect it, and the officers will trust the rest more for it.
-Plate accuracy: 78% of 41 vehicles read exactly, on hand-labelled government footage; it started at 8.6% and the measurement drove the fixes. Clock reading: 97.7% exact on 87 frames with a legible clock, with no wrong times. Capacity: on one base M2 laptop, four cameras analysed at 4 frames a second kept up; eight cameras’ worth did not. Latency: median 27–40 s from the moment in the footage to the stored sighting, p90 67–87 s, across two evidence runs — mostly the multi-frame vote, bought on purpose. DR: a million detections restored in 5.7 s, and a tampered audit row caught. 698 backend and 65 browser tests.
-If asked “why 78%?”: the cameras are wide-angle; half of all plate crops were unreadable even to a person. Fine-tuning on Gujarat plates and choosing cameras by plate yield are the pilot’s first work items.</a:t>
+Plate accuracy: 80.5% of 41 vehicles (33) read exactly, re-measured 12 October, on hand-labelled government footage; it started at 8.6% and the measurement drove the fixes. Clock reading: 97.7% exact on 87 frames with a legible clock, with no wrong times. Capacity: on one base M2 laptop, four cameras analysed at 4 frames a second kept up; eight cameras’ worth did not. Latency: median 27–40 s from the moment in the footage to the stored sighting, p90 67–87 s, across two evidence runs — mostly the multi-frame vote, bought on purpose. DR: a million detections restored in 5.7 s, and a tampered audit row caught. 698 backend and 65 browser tests.
+If asked “why 80.5%?”: the cameras are wide-angle; half of all plate crops were unreadable even to a person. Fine-tuning on Gujarat plates and choosing cameras by plate yield are the pilot’s first work items.</a:t>
             </a:r>
             <a:endParaRPr lang="en-US" dirty="0"/>
           </a:p>
@@ -2955,7 +2955,7 @@
               <a:rPr lang="en-US" dirty="0"/>
               <a:t>Backup for live step 2, and the slide for the professors. One real frame from the government grid, the four things the edge does to it.
 1 Detect and track the vehicle (YOLO11n, a Kalman tracker stepped by the video’s own timestamps, not arrival time). 2 Find the plate (YOLOv9-t) and read it (CCT-XS OCR) on several frames, then vote: a plate is committed only when the frames agree and it fits the Indian registration grammar. 3 Read the date and time burned into the frame (PP-OCRv6), accepted only when a second reading agrees. 4 Store one sighting: camera, printed time, plate, frame.
-The numbers are measured on hand-labelled government footage, blind to the OCR’s output. Say the accuracy plainly: 78% of vehicles read exactly after the vote — below our own 85% target. It was 8.6% before we measured; the measurement drove the fixes. Half the plate crops on these wide-angle cameras were unreadable even to a person; no model reads a 20-pixel plate. On-site, that is why we pick cameras by plate yield.
+The numbers are measured on hand-labelled government footage, blind to the OCR’s output. Say the accuracy plainly: 80.5% of vehicles (33 of 41) read exactly after the vote — below our own 85% target. It was 8.6% before we measured; the measurement drove the fixes. If asked about RapidOCR: that reads the camera’s clock (the 97.7%), not plates. Half the plate crops on these wide-angle cameras were unreadable even to a person; no model reads a 20-pixel plate. On-site, that is why we pick cameras by plate yield.
 All five models run on ONNX Runtime on this laptop’s CPU, with no internet.</a:t>
             </a:r>
             <a:endParaRPr lang="en-US" dirty="0"/>
@@ -5934,7 +5934,7 @@
                 <a:ea typeface="Franklin Gothic Demi Cond" pitchFamily="34" charset="-122"/>
                 <a:cs typeface="Franklin Gothic Demi Cond" pitchFamily="34" charset="-120"/>
               </a:rPr>
-              <a:t>78%</a:t>
+              <a:t>80.5%</a:t>
             </a:r>
             <a:endParaRPr lang="en-US" sz="2400" dirty="0"/>
           </a:p>
@@ -5973,7 +5973,7 @@
                 <a:ea typeface="Franklin Gothic Book" pitchFamily="34" charset="-122"/>
                 <a:cs typeface="Franklin Gothic Book" pitchFamily="34" charset="-120"/>
               </a:rPr>
-              <a:t>41 vehicles, hand-labelled government footage, after the vote</a:t>
+              <a:t>33 of 41 vehicles, hand-labelled government footage, after the vote</a:t>
             </a:r>
             <a:endParaRPr lang="en-US" sz="1200" dirty="0"/>
           </a:p>
@@ -28550,7 +28550,7 @@
                 <a:ea typeface="Franklin Gothic Demi Cond" pitchFamily="34" charset="-122"/>
                 <a:cs typeface="Franklin Gothic Demi Cond" pitchFamily="34" charset="-120"/>
               </a:rPr>
-              <a:t>78%</a:t>
+              <a:t>80.5%</a:t>
             </a:r>
             <a:endParaRPr lang="en-US" sz="4000" dirty="0"/>
           </a:p>
@@ -28628,7 +28628,7 @@
                 <a:ea typeface="Franklin Gothic Book" pitchFamily="34" charset="-122"/>
                 <a:cs typeface="Franklin Gothic Book" pitchFamily="34" charset="-120"/>
               </a:rPr>
-              <a:t>41 vehicles, after the vote</a:t>
+              <a:t>33 of 41 vehicles, after the vote</a:t>
             </a:r>
             <a:endParaRPr lang="en-US" sz="1150" dirty="0"/>
           </a:p>
@@ -28694,7 +28694,7 @@
                 <a:ea typeface="Franklin Gothic Demi Cond" pitchFamily="34" charset="-122"/>
                 <a:cs typeface="Franklin Gothic Demi Cond" pitchFamily="34" charset="-120"/>
               </a:rPr>
-              <a:t>88%</a:t>
+              <a:t>88.6%</a:t>
             </a:r>
             <a:endParaRPr lang="en-US" sz="4000" dirty="0"/>
           </a:p>
@@ -29099,7 +29099,7 @@
                 <a:ea typeface="Franklin Gothic Book" pitchFamily="34" charset="-122"/>
                 <a:cs typeface="Franklin Gothic Book" pitchFamily="34" charset="-120"/>
               </a:rPr>
-              <a:t>Measured on hand-labelled government-grid footage, blind to the OCR. 79 of 160 plate crops were unreadable even to a person and are excluded. 78% is below our own 85% target. evidence/ANPR-ACCURACY.md · evidence/CLOCK-READER-ACCURACY.md</a:t>
+              <a:t>Measured on hand-labelled government-grid footage, blind to the OCR. 79 of 160 plate crops were unreadable even to a person and are excluded. 80.5% is below our own 85% target. evidence/ANPR-ACCURACY.md · evidence/CLOCK-READER-ACCURACY.md</a:t>
             </a:r>
             <a:endParaRPr lang="en-US" sz="1000" dirty="0"/>
           </a:p>

--- a/docs/Sentinel-Finale-Pitch.pptx
+++ b/docs/Sentinel-Finale-Pitch.pptx
@@ -1072,8 +1072,8 @@
               <a:rPr lang="en-US" dirty="0"/>
               <a:t>[0:00–0:45] Open with the outcome, not the technology.
 “Sentinel lets an officer type a registration number and see where that vehicle went, across the government’s cameras — and be told the moment it is seen again.”
-Then ten seconds on who we are — and do not read the credentials out; the panel has heard every team list theirs. Point at them and say what they mean for this room: “I’m Parth Patel, I lead the team; with me is Anuj Patel. Our backgrounds are on the slide — enterprise AI architecture and data science. What that means for you: every number we show today, we measured, and we will tell you where we fell short.”
-If asked: Parth is a consulting AI solution architect who has worked with IBM and United Airlines, with an MTech in Data Science from IIT Bombay. Anuj is a data scientist based in Göttingen, Germany.
+Then ten seconds on who we are — and do not read the credentials out; the panel has heard every team list theirs. Point at them and say what they mean for this room: “I’m Parth Patel, co-founder of Invental Data Labs; with me is Anuj Patel, our AI engineer. Our backgrounds are on the slide — enterprise AI architecture and AI engineering. What that means for you: every number we show today, we measured, and we will tell you where we fell short.”
+If asked: Parth, co-founder, is an AI solution architect who has worked with IBM and United Airlines, with an MTech in Data Science from IIT Bombay. Anuj is an AI engineer with a master’s degree from Germany.
 The row under the screenshot is a real sighting from the government grid: the plate, the camera, and the time printed on that camera’s own frame.
 If the jury hands over a vehicle number or asks for the live trace now, go straight to slide 04 and come back.</a:t>
             </a:r>
@@ -4211,7 +4211,7 @@
                 <a:ea typeface="Franklin Gothic Book" pitchFamily="34" charset="-122"/>
                 <a:cs typeface="Franklin Gothic Book" pitchFamily="34" charset="-120"/>
               </a:rPr>
-              <a:t>   Team lead · AI solution architect</a:t>
+              <a:t>   Co-founder · AI solution architect</a:t>
             </a:r>
             <a:endParaRPr lang="en-US" sz="1400" dirty="0"/>
           </a:p>
@@ -4545,7 +4545,7 @@
                 <a:ea typeface="Franklin Gothic Book" pitchFamily="34" charset="-122"/>
                 <a:cs typeface="Franklin Gothic Book" pitchFamily="34" charset="-120"/>
               </a:rPr>
-              <a:t>   Data scientist</a:t>
+              <a:t>   AI engineer</a:t>
             </a:r>
             <a:endParaRPr lang="en-US" sz="1400" dirty="0"/>
           </a:p>
@@ -4609,7 +4609,7 @@
                 <a:ea typeface="Consolas" pitchFamily="34" charset="-122"/>
                 <a:cs typeface="Consolas" pitchFamily="34" charset="-120"/>
               </a:rPr>
-              <a:t>Göttingen, Germany</a:t>
+              <a:t>Master’s · Germany</a:t>
             </a:r>
             <a:endParaRPr lang="en-US" sz="1100" dirty="0"/>
           </a:p>
@@ -32129,7 +32129,7 @@
                 <a:ea typeface="Consolas" pitchFamily="34" charset="-122"/>
                 <a:cs typeface="Consolas" pitchFamily="34" charset="-120"/>
               </a:rPr>
-              <a:t>cde7918bc28b314a…</a:t>
+              <a:t>8e85d1829a53be09…</a:t>
             </a:r>
             <a:endParaRPr lang="en-US" sz="1100" dirty="0"/>
           </a:p>
@@ -32207,7 +32207,7 @@
                 <a:ea typeface="Consolas" pitchFamily="34" charset="-122"/>
                 <a:cs typeface="Consolas" pitchFamily="34" charset="-120"/>
               </a:rPr>
-              <a:t>7ef88b707cfd252d…</a:t>
+              <a:t>c2b4e5db7d471d8f…</a:t>
             </a:r>
             <a:endParaRPr lang="en-US" sz="1100" dirty="0"/>
           </a:p>
@@ -32285,7 +32285,7 @@
                 <a:ea typeface="Consolas" pitchFamily="34" charset="-122"/>
                 <a:cs typeface="Consolas" pitchFamily="34" charset="-120"/>
               </a:rPr>
-              <a:t>0616ea25c31de3e7…</a:t>
+              <a:t>ca7661f0d5a25ace…</a:t>
             </a:r>
             <a:endParaRPr lang="en-US" sz="1100" dirty="0"/>
           </a:p>
